--- a/Clase_5/PPT/Clase05_Pruebas_de_Hipotesis.pptx
+++ b/Clase_5/PPT/Clase05_Pruebas_de_Hipotesis.pptx
@@ -4,6 +4,9 @@
   <p:sldMasterIdLst>
     <p:sldMasterId id="2147483648" r:id="rId1"/>
   </p:sldMasterIdLst>
+  <p:notesMasterIdLst>
+    <p:notesMasterId r:id="rId23"/>
+  </p:notesMasterIdLst>
   <p:sldIdLst>
     <p:sldId id="256" r:id="rId2"/>
     <p:sldId id="257" r:id="rId3"/>
@@ -27,9 +30,6 @@
     <p:sldId id="275" r:id="rId21"/>
     <p:sldId id="276" r:id="rId22"/>
   </p:sldIdLst>
-  <p:notesMasterIdLst>
-    <p:notesMasterId r:id="rId23"/>
-  </p:notesMasterIdLst>
   <p:sldSz cx="12192000" cy="6858000"/>
   <p:notesSz cx="6858000" cy="12192000"/>
   <p:defaultTextStyle>
@@ -124,18 +124,26 @@
       </a:defRPr>
     </a:lvl9pPr>
   </p:defaultTextStyle>
+  <p:extLst>
+    <p:ext uri="{EFAFB233-063F-42B5-8137-9DF3F51BA10A}">
+      <p15:sldGuideLst xmlns:p15="http://schemas.microsoft.com/office/powerpoint/2012/main"/>
+    </p:ext>
+  </p:extLst>
 </p:presentation>
 </file>
 
 <file path=ppt/charts/chart1.xml><?xml version="1.0" encoding="utf-8"?>
-<c:chartSpace xmlns:c="http://schemas.openxmlformats.org/drawingml/2006/chart" xmlns:a="http://schemas.openxmlformats.org/drawingml/2006/main" xmlns:r="http://schemas.openxmlformats.org/officeDocument/2006/relationships">
+<c:chartSpace xmlns:c="http://schemas.openxmlformats.org/drawingml/2006/chart" xmlns:a="http://schemas.openxmlformats.org/drawingml/2006/main" xmlns:r="http://schemas.openxmlformats.org/officeDocument/2006/relationships" xmlns:c16r2="http://schemas.microsoft.com/office/drawing/2015/06/chart">
   <c:date1904 val="0"/>
+  <c:lang val="en-US"/>
   <c:roundedCorners val="1"/>
+  <c:style val="2"/>
   <c:chart>
     <c:autoTitleDeleted val="1"/>
     <c:plotArea>
       <c:layout/>
       <c:areaChart>
+        <c:grouping val="standard"/>
         <c:varyColors val="0"/>
         <c:ser>
           <c:idx val="0"/>
@@ -159,175 +167,40 @@
             </a:solidFill>
             <a:effectLst/>
           </c:spPr>
-          <c:invertIfNegative val="0"/>
-          <c:dLbls>
-            <c:numFmt formatCode="#,##0" sourceLinked="0"/>
-            <c:txPr>
-              <a:bodyPr/>
-              <a:lstStyle/>
-              <a:p>
-                <a:pPr>
-                  <a:defRPr b="0" i="0" strike="noStrike" sz="1200" u="none">
-                    <a:solidFill>
-                      <a:srgbClr val="000000"/>
-                    </a:solidFill>
-                    <a:latin typeface="Arial"/>
-                  </a:defRPr>
-                </a:pPr>
-              </a:p>
-            </c:txPr>
-            <c:showLegendKey val="0"/>
-            <c:showVal val="0"/>
-            <c:showCatName val="0"/>
-            <c:showSerName val="0"/>
-            <c:showPercent val="0"/>
-            <c:showBubbleSize val="0"/>
-            <c:showLeaderLines val="0"/>
-          </c:dLbls>
           <c:cat>
-            <c:multiLvlStrRef>
+            <c:strRef>
               <c:f>Sheet1!$A$2:$A$46</c:f>
-              <c:multiLvlStrCache>
+              <c:strCache>
                 <c:ptCount val="45"/>
-                <c:lvl>
-                  <c:pt idx="0">
-                    <c:v/>
-                  </c:pt>
-                  <c:pt idx="1">
-                    <c:v/>
-                  </c:pt>
-                  <c:pt idx="2">
-                    <c:v>-4</c:v>
-                  </c:pt>
-                  <c:pt idx="3">
-                    <c:v/>
-                  </c:pt>
-                  <c:pt idx="4">
-                    <c:v/>
-                  </c:pt>
-                  <c:pt idx="5">
-                    <c:v/>
-                  </c:pt>
-                  <c:pt idx="6">
-                    <c:v/>
-                  </c:pt>
-                  <c:pt idx="7">
-                    <c:v>-3</c:v>
-                  </c:pt>
-                  <c:pt idx="8">
-                    <c:v/>
-                  </c:pt>
-                  <c:pt idx="9">
-                    <c:v/>
-                  </c:pt>
-                  <c:pt idx="10">
-                    <c:v/>
-                  </c:pt>
-                  <c:pt idx="11">
-                    <c:v/>
-                  </c:pt>
-                  <c:pt idx="12">
-                    <c:v>-2</c:v>
-                  </c:pt>
-                  <c:pt idx="13">
-                    <c:v/>
-                  </c:pt>
-                  <c:pt idx="14">
-                    <c:v/>
-                  </c:pt>
-                  <c:pt idx="15">
-                    <c:v/>
-                  </c:pt>
-                  <c:pt idx="16">
-                    <c:v/>
-                  </c:pt>
-                  <c:pt idx="17">
-                    <c:v>-1</c:v>
-                  </c:pt>
-                  <c:pt idx="18">
-                    <c:v/>
-                  </c:pt>
-                  <c:pt idx="19">
-                    <c:v/>
-                  </c:pt>
-                  <c:pt idx="20">
-                    <c:v/>
-                  </c:pt>
-                  <c:pt idx="21">
-                    <c:v/>
-                  </c:pt>
-                  <c:pt idx="22">
-                    <c:v>0</c:v>
-                  </c:pt>
-                  <c:pt idx="23">
-                    <c:v/>
-                  </c:pt>
-                  <c:pt idx="24">
-                    <c:v/>
-                  </c:pt>
-                  <c:pt idx="25">
-                    <c:v/>
-                  </c:pt>
-                  <c:pt idx="26">
-                    <c:v/>
-                  </c:pt>
-                  <c:pt idx="27">
-                    <c:v>1</c:v>
-                  </c:pt>
-                  <c:pt idx="28">
-                    <c:v/>
-                  </c:pt>
-                  <c:pt idx="29">
-                    <c:v/>
-                  </c:pt>
-                  <c:pt idx="30">
-                    <c:v/>
-                  </c:pt>
-                  <c:pt idx="31">
-                    <c:v/>
-                  </c:pt>
-                  <c:pt idx="32">
-                    <c:v>2</c:v>
-                  </c:pt>
-                  <c:pt idx="33">
-                    <c:v/>
-                  </c:pt>
-                  <c:pt idx="34">
-                    <c:v/>
-                  </c:pt>
-                  <c:pt idx="35">
-                    <c:v/>
-                  </c:pt>
-                  <c:pt idx="36">
-                    <c:v/>
-                  </c:pt>
-                  <c:pt idx="37">
-                    <c:v>3</c:v>
-                  </c:pt>
-                  <c:pt idx="38">
-                    <c:v/>
-                  </c:pt>
-                  <c:pt idx="39">
-                    <c:v/>
-                  </c:pt>
-                  <c:pt idx="40">
-                    <c:v/>
-                  </c:pt>
-                  <c:pt idx="41">
-                    <c:v/>
-                  </c:pt>
-                  <c:pt idx="42">
-                    <c:v>4</c:v>
-                  </c:pt>
-                  <c:pt idx="43">
-                    <c:v/>
-                  </c:pt>
-                  <c:pt idx="44">
-                    <c:v/>
-                  </c:pt>
-                </c:lvl>
-              </c:multiLvlStrCache>
-            </c:multiLvlStrRef>
+                <c:pt idx="2">
+                  <c:v>-4</c:v>
+                </c:pt>
+                <c:pt idx="7">
+                  <c:v>-3</c:v>
+                </c:pt>
+                <c:pt idx="12">
+                  <c:v>-2</c:v>
+                </c:pt>
+                <c:pt idx="17">
+                  <c:v>-1</c:v>
+                </c:pt>
+                <c:pt idx="22">
+                  <c:v>0</c:v>
+                </c:pt>
+                <c:pt idx="27">
+                  <c:v>1</c:v>
+                </c:pt>
+                <c:pt idx="32">
+                  <c:v>2</c:v>
+                </c:pt>
+                <c:pt idx="37">
+                  <c:v>3</c:v>
+                </c:pt>
+                <c:pt idx="42">
+                  <c:v>4</c:v>
+                </c:pt>
+              </c:strCache>
+            </c:strRef>
           </c:cat>
           <c:val>
             <c:numRef>
@@ -336,46 +209,46 @@
                 <c:formatCode>General</c:formatCode>
                 <c:ptCount val="45"/>
                 <c:pt idx="0">
-                  <c:v>0.00012505841144484726</c:v>
+                  <c:v>1.2505841144484726E-4</c:v>
                 </c:pt>
                 <c:pt idx="1">
-                  <c:v>0.000227485478389053</c:v>
+                  <c:v>2.2748547838905299E-4</c:v>
                 </c:pt>
                 <c:pt idx="2">
-                  <c:v>0.000409415973023718</c:v>
+                  <c:v>4.0941597302371802E-4</c:v>
                 </c:pt>
                 <c:pt idx="3">
-                  <c:v>0.0007279299406815827</c:v>
+                  <c:v>7.2792994068158275E-4</c:v>
                 </c:pt>
                 <c:pt idx="4">
-                  <c:v>0.0012765438103295211</c:v>
+                  <c:v>1.2765438103295211E-3</c:v>
                 </c:pt>
                 <c:pt idx="5">
-                  <c:v>0.0022043333267809254</c:v>
+                  <c:v>2.2043333267809254E-3</c:v>
                 </c:pt>
                 <c:pt idx="6">
-                  <c:v>0.0037416028438765556</c:v>
+                  <c:v>3.7416028438765556E-3</c:v>
                 </c:pt>
                 <c:pt idx="7">
-                  <c:v>0.00623151758146567</c:v>
+                  <c:v>6.2315175814656697E-3</c:v>
                 </c:pt>
                 <c:pt idx="8">
-                  <c:v>0.010164378857716835</c:v>
+                  <c:v>1.0164378857716835E-2</c:v>
                 </c:pt>
                 <c:pt idx="9">
-                  <c:v>0.016206836710712817</c:v>
+                  <c:v>1.6206836710712817E-2</c:v>
                 </c:pt>
                 <c:pt idx="10">
-                  <c:v>0.025212564081914166</c:v>
+                  <c:v>2.5212564081914166E-2</c:v>
                 </c:pt>
                 <c:pt idx="11">
-                  <c:v>0.038195100989066276</c:v>
+                  <c:v>3.8195100989066276E-2</c:v>
                 </c:pt>
                 <c:pt idx="12">
-                  <c:v>0.0562405372323699</c:v>
+                  <c:v>5.6240537232369901E-2</c:v>
                 </c:pt>
                 <c:pt idx="13">
-                  <c:v>0.08034158246715689</c:v>
+                  <c:v>8.0341582467156891E-2</c:v>
                 </c:pt>
                 <c:pt idx="14">
                   <c:v>0.11114957193918909</c:v>
@@ -387,7 +260,7 @@
                   <c:v>0.19195332255498007</c:v>
                 </c:pt>
                 <c:pt idx="17">
-                  <c:v>0.238901427960562</c:v>
+                  <c:v>0.23890142796056199</c:v>
                 </c:pt>
                 <c:pt idx="18">
                   <c:v>0.28625010583229776</c:v>
@@ -402,7 +275,7 @@
                   <c:v>0.3883491798291423</c:v>
                 </c:pt>
                 <c:pt idx="22">
-                  <c:v>0.3963934153651716</c:v>
+                  <c:v>0.39639341536517159</c:v>
                 </c:pt>
                 <c:pt idx="23">
                   <c:v>0.3883491798291423</c:v>
@@ -417,7 +290,7 @@
                   <c:v>0.28625010583229776</c:v>
                 </c:pt>
                 <c:pt idx="27">
-                  <c:v>0.238901427960562</c:v>
+                  <c:v>0.23890142796056199</c:v>
                 </c:pt>
                 <c:pt idx="28">
                   <c:v>0.19195332255498007</c:v>
@@ -429,50 +302,55 @@
                   <c:v>0.11114957193918909</c:v>
                 </c:pt>
                 <c:pt idx="31">
-                  <c:v>0.08034158246715689</c:v>
+                  <c:v>8.0341582467156891E-2</c:v>
                 </c:pt>
                 <c:pt idx="32">
-                  <c:v>0.0562405372323699</c:v>
+                  <c:v>5.6240537232369901E-2</c:v>
                 </c:pt>
                 <c:pt idx="33">
-                  <c:v>0.038195100989066276</c:v>
+                  <c:v>3.8195100989066276E-2</c:v>
                 </c:pt>
                 <c:pt idx="34">
-                  <c:v>0.025212564081914166</c:v>
+                  <c:v>2.5212564081914166E-2</c:v>
                 </c:pt>
                 <c:pt idx="35">
-                  <c:v>0.016206836710712817</c:v>
+                  <c:v>1.6206836710712817E-2</c:v>
                 </c:pt>
                 <c:pt idx="36">
-                  <c:v>0.010164378857716835</c:v>
+                  <c:v>1.0164378857716835E-2</c:v>
                 </c:pt>
                 <c:pt idx="37">
-                  <c:v>0.00623151758146567</c:v>
+                  <c:v>6.2315175814656697E-3</c:v>
                 </c:pt>
                 <c:pt idx="38">
-                  <c:v>0.0037416028438765556</c:v>
+                  <c:v>3.7416028438765556E-3</c:v>
                 </c:pt>
                 <c:pt idx="39">
-                  <c:v>0.0022043333267809254</c:v>
+                  <c:v>2.2043333267809254E-3</c:v>
                 </c:pt>
                 <c:pt idx="40">
-                  <c:v>0.0012765438103295211</c:v>
+                  <c:v>1.2765438103295211E-3</c:v>
                 </c:pt>
                 <c:pt idx="41">
-                  <c:v>0.0007279299406815827</c:v>
+                  <c:v>7.2792994068158275E-4</c:v>
                 </c:pt>
                 <c:pt idx="42">
-                  <c:v>0.000409415973023718</c:v>
+                  <c:v>4.0941597302371802E-4</c:v>
                 </c:pt>
                 <c:pt idx="43">
-                  <c:v>0.000227485478389053</c:v>
+                  <c:v>2.2748547838905299E-4</c:v>
                 </c:pt>
                 <c:pt idx="44">
-                  <c:v>0.00012505841144484726</c:v>
+                  <c:v>1.2505841144484726E-4</c:v>
                 </c:pt>
               </c:numCache>
             </c:numRef>
           </c:val>
+          <c:extLst>
+            <c:ext xmlns:c16="http://schemas.microsoft.com/office/drawing/2014/chart" uri="{C3380CC4-5D6E-409C-BE32-E72D297353CC}">
+              <c16:uniqueId val="{00000000-4052-574A-96BD-7BA85CBAAC86}"/>
+            </c:ext>
+          </c:extLst>
         </c:ser>
         <c:ser>
           <c:idx val="1"/>
@@ -496,175 +374,40 @@
             </a:solidFill>
             <a:effectLst/>
           </c:spPr>
-          <c:invertIfNegative val="0"/>
-          <c:dLbls>
-            <c:numFmt formatCode="#,##0" sourceLinked="0"/>
-            <c:txPr>
-              <a:bodyPr/>
-              <a:lstStyle/>
-              <a:p>
-                <a:pPr>
-                  <a:defRPr b="0" i="0" strike="noStrike" sz="1200" u="none">
-                    <a:solidFill>
-                      <a:srgbClr val="000000"/>
-                    </a:solidFill>
-                    <a:latin typeface="Arial"/>
-                  </a:defRPr>
-                </a:pPr>
-              </a:p>
-            </c:txPr>
-            <c:showLegendKey val="0"/>
-            <c:showVal val="0"/>
-            <c:showCatName val="0"/>
-            <c:showSerName val="0"/>
-            <c:showPercent val="0"/>
-            <c:showBubbleSize val="0"/>
-            <c:showLeaderLines val="0"/>
-          </c:dLbls>
           <c:cat>
-            <c:multiLvlStrRef>
+            <c:strRef>
               <c:f>Sheet1!$A$2:$A$46</c:f>
-              <c:multiLvlStrCache>
+              <c:strCache>
                 <c:ptCount val="45"/>
-                <c:lvl>
-                  <c:pt idx="0">
-                    <c:v/>
-                  </c:pt>
-                  <c:pt idx="1">
-                    <c:v/>
-                  </c:pt>
-                  <c:pt idx="2">
-                    <c:v>-4</c:v>
-                  </c:pt>
-                  <c:pt idx="3">
-                    <c:v/>
-                  </c:pt>
-                  <c:pt idx="4">
-                    <c:v/>
-                  </c:pt>
-                  <c:pt idx="5">
-                    <c:v/>
-                  </c:pt>
-                  <c:pt idx="6">
-                    <c:v/>
-                  </c:pt>
-                  <c:pt idx="7">
-                    <c:v>-3</c:v>
-                  </c:pt>
-                  <c:pt idx="8">
-                    <c:v/>
-                  </c:pt>
-                  <c:pt idx="9">
-                    <c:v/>
-                  </c:pt>
-                  <c:pt idx="10">
-                    <c:v/>
-                  </c:pt>
-                  <c:pt idx="11">
-                    <c:v/>
-                  </c:pt>
-                  <c:pt idx="12">
-                    <c:v>-2</c:v>
-                  </c:pt>
-                  <c:pt idx="13">
-                    <c:v/>
-                  </c:pt>
-                  <c:pt idx="14">
-                    <c:v/>
-                  </c:pt>
-                  <c:pt idx="15">
-                    <c:v/>
-                  </c:pt>
-                  <c:pt idx="16">
-                    <c:v/>
-                  </c:pt>
-                  <c:pt idx="17">
-                    <c:v>-1</c:v>
-                  </c:pt>
-                  <c:pt idx="18">
-                    <c:v/>
-                  </c:pt>
-                  <c:pt idx="19">
-                    <c:v/>
-                  </c:pt>
-                  <c:pt idx="20">
-                    <c:v/>
-                  </c:pt>
-                  <c:pt idx="21">
-                    <c:v/>
-                  </c:pt>
-                  <c:pt idx="22">
-                    <c:v>0</c:v>
-                  </c:pt>
-                  <c:pt idx="23">
-                    <c:v/>
-                  </c:pt>
-                  <c:pt idx="24">
-                    <c:v/>
-                  </c:pt>
-                  <c:pt idx="25">
-                    <c:v/>
-                  </c:pt>
-                  <c:pt idx="26">
-                    <c:v/>
-                  </c:pt>
-                  <c:pt idx="27">
-                    <c:v>1</c:v>
-                  </c:pt>
-                  <c:pt idx="28">
-                    <c:v/>
-                  </c:pt>
-                  <c:pt idx="29">
-                    <c:v/>
-                  </c:pt>
-                  <c:pt idx="30">
-                    <c:v/>
-                  </c:pt>
-                  <c:pt idx="31">
-                    <c:v/>
-                  </c:pt>
-                  <c:pt idx="32">
-                    <c:v>2</c:v>
-                  </c:pt>
-                  <c:pt idx="33">
-                    <c:v/>
-                  </c:pt>
-                  <c:pt idx="34">
-                    <c:v/>
-                  </c:pt>
-                  <c:pt idx="35">
-                    <c:v/>
-                  </c:pt>
-                  <c:pt idx="36">
-                    <c:v/>
-                  </c:pt>
-                  <c:pt idx="37">
-                    <c:v>3</c:v>
-                  </c:pt>
-                  <c:pt idx="38">
-                    <c:v/>
-                  </c:pt>
-                  <c:pt idx="39">
-                    <c:v/>
-                  </c:pt>
-                  <c:pt idx="40">
-                    <c:v/>
-                  </c:pt>
-                  <c:pt idx="41">
-                    <c:v/>
-                  </c:pt>
-                  <c:pt idx="42">
-                    <c:v>4</c:v>
-                  </c:pt>
-                  <c:pt idx="43">
-                    <c:v/>
-                  </c:pt>
-                  <c:pt idx="44">
-                    <c:v/>
-                  </c:pt>
-                </c:lvl>
-              </c:multiLvlStrCache>
-            </c:multiLvlStrRef>
+                <c:pt idx="2">
+                  <c:v>-4</c:v>
+                </c:pt>
+                <c:pt idx="7">
+                  <c:v>-3</c:v>
+                </c:pt>
+                <c:pt idx="12">
+                  <c:v>-2</c:v>
+                </c:pt>
+                <c:pt idx="17">
+                  <c:v>-1</c:v>
+                </c:pt>
+                <c:pt idx="22">
+                  <c:v>0</c:v>
+                </c:pt>
+                <c:pt idx="27">
+                  <c:v>1</c:v>
+                </c:pt>
+                <c:pt idx="32">
+                  <c:v>2</c:v>
+                </c:pt>
+                <c:pt idx="37">
+                  <c:v>3</c:v>
+                </c:pt>
+                <c:pt idx="42">
+                  <c:v>4</c:v>
+                </c:pt>
+              </c:strCache>
+            </c:strRef>
           </c:cat>
           <c:val>
             <c:numRef>
@@ -673,37 +416,37 @@
                 <c:formatCode>General</c:formatCode>
                 <c:ptCount val="45"/>
                 <c:pt idx="0">
-                  <c:v>0.00012505841144484726</c:v>
+                  <c:v>1.2505841144484726E-4</c:v>
                 </c:pt>
                 <c:pt idx="1">
-                  <c:v>0.000227485478389053</c:v>
+                  <c:v>2.2748547838905299E-4</c:v>
                 </c:pt>
                 <c:pt idx="2">
-                  <c:v>0.000409415973023718</c:v>
+                  <c:v>4.0941597302371802E-4</c:v>
                 </c:pt>
                 <c:pt idx="3">
-                  <c:v>0.0007279299406815827</c:v>
+                  <c:v>7.2792994068158275E-4</c:v>
                 </c:pt>
                 <c:pt idx="4">
-                  <c:v>0.0012765438103295211</c:v>
+                  <c:v>1.2765438103295211E-3</c:v>
                 </c:pt>
                 <c:pt idx="5">
-                  <c:v>0.0022043333267809254</c:v>
+                  <c:v>2.2043333267809254E-3</c:v>
                 </c:pt>
                 <c:pt idx="6">
-                  <c:v>0.0037416028438765556</c:v>
+                  <c:v>3.7416028438765556E-3</c:v>
                 </c:pt>
                 <c:pt idx="7">
-                  <c:v>0.00623151758146567</c:v>
+                  <c:v>6.2315175814656697E-3</c:v>
                 </c:pt>
                 <c:pt idx="8">
-                  <c:v>0.010164378857716835</c:v>
+                  <c:v>1.0164378857716835E-2</c:v>
                 </c:pt>
                 <c:pt idx="9">
-                  <c:v>0.016206836710712817</c:v>
+                  <c:v>1.6206836710712817E-2</c:v>
                 </c:pt>
                 <c:pt idx="10">
-                  <c:v>0.025212564081914166</c:v>
+                  <c:v>2.5212564081914166E-2</c:v>
                 </c:pt>
                 <c:pt idx="11">
                   <c:v>0</c:v>
@@ -775,69 +518,57 @@
                   <c:v>0</c:v>
                 </c:pt>
                 <c:pt idx="34">
-                  <c:v>0.025212564081914166</c:v>
+                  <c:v>2.5212564081914166E-2</c:v>
                 </c:pt>
                 <c:pt idx="35">
-                  <c:v>0.016206836710712817</c:v>
+                  <c:v>1.6206836710712817E-2</c:v>
                 </c:pt>
                 <c:pt idx="36">
-                  <c:v>0.010164378857716835</c:v>
+                  <c:v>1.0164378857716835E-2</c:v>
                 </c:pt>
                 <c:pt idx="37">
-                  <c:v>0.00623151758146567</c:v>
+                  <c:v>6.2315175814656697E-3</c:v>
                 </c:pt>
                 <c:pt idx="38">
-                  <c:v>0.0037416028438765556</c:v>
+                  <c:v>3.7416028438765556E-3</c:v>
                 </c:pt>
                 <c:pt idx="39">
-                  <c:v>0.0022043333267809254</c:v>
+                  <c:v>2.2043333267809254E-3</c:v>
                 </c:pt>
                 <c:pt idx="40">
-                  <c:v>0.0012765438103295211</c:v>
+                  <c:v>1.2765438103295211E-3</c:v>
                 </c:pt>
                 <c:pt idx="41">
-                  <c:v>0.0007279299406815827</c:v>
+                  <c:v>7.2792994068158275E-4</c:v>
                 </c:pt>
                 <c:pt idx="42">
-                  <c:v>0.000409415973023718</c:v>
+                  <c:v>4.0941597302371802E-4</c:v>
                 </c:pt>
                 <c:pt idx="43">
-                  <c:v>0.000227485478389053</c:v>
+                  <c:v>2.2748547838905299E-4</c:v>
                 </c:pt>
                 <c:pt idx="44">
-                  <c:v>0.00012505841144484726</c:v>
+                  <c:v>1.2505841144484726E-4</c:v>
                 </c:pt>
               </c:numCache>
             </c:numRef>
           </c:val>
+          <c:extLst>
+            <c:ext xmlns:c16="http://schemas.microsoft.com/office/drawing/2014/chart" uri="{C3380CC4-5D6E-409C-BE32-E72D297353CC}">
+              <c16:uniqueId val="{00000001-4052-574A-96BD-7BA85CBAAC86}"/>
+            </c:ext>
+          </c:extLst>
         </c:ser>
         <c:dLbls>
-          <c:numFmt formatCode="#,##0" sourceLinked="0"/>
-          <c:txPr>
-            <a:bodyPr/>
-            <a:lstStyle/>
-            <a:p>
-              <a:pPr>
-                <a:defRPr b="0" i="0" strike="noStrike" sz="1200" u="none">
-                  <a:solidFill>
-                    <a:srgbClr val="000000"/>
-                  </a:solidFill>
-                  <a:latin typeface="Arial"/>
-                </a:defRPr>
-              </a:pPr>
-            </a:p>
-          </c:txPr>
           <c:showLegendKey val="0"/>
           <c:showVal val="0"/>
           <c:showCatName val="0"/>
           <c:showSerName val="0"/>
           <c:showPercent val="0"/>
           <c:showBubbleSize val="0"/>
-          <c:showLeaderLines val="0"/>
         </c:dLbls>
         <c:axId val="2094734554"/>
         <c:axId val="2094734552"/>
-        <c:axId val="2094734556"/>
       </c:areaChart>
       <c:catAx>
         <c:axId val="2094734554"/>
@@ -861,7 +592,7 @@
                   </a:defRPr>
                 </a:pPr>
                 <a:r>
-                  <a:rPr sz="1000" b="0" i="0" u="none" strike="noStrike">
+                  <a:rPr lang="en-US" sz="1000" b="0" i="0" u="none" strike="noStrike">
                     <a:solidFill>
                       <a:srgbClr val="5B6B87"/>
                     </a:solidFill>
@@ -872,7 +603,6 @@
               </a:p>
             </c:rich>
           </c:tx>
-          <c:layout/>
           <c:overlay val="0"/>
         </c:title>
         <c:numFmt formatCode="General" sourceLinked="1"/>
@@ -907,6 +637,7 @@
         <c:crosses val="autoZero"/>
         <c:auto val="1"/>
         <c:lblAlgn val="ctr"/>
+        <c:lblOffset val="100"/>
         <c:noMultiLvlLbl val="1"/>
       </c:catAx>
       <c:valAx>
@@ -987,6 +718,7 @@
     </c:legend>
     <c:plotVisOnly val="1"/>
     <c:dispBlanksAs val="span"/>
+    <c:showDLblsOverMax val="1"/>
   </c:chart>
   <c:spPr>
     <a:noFill/>
@@ -1002,14 +734,17 @@
 </file>
 
 <file path=ppt/charts/chart2.xml><?xml version="1.0" encoding="utf-8"?>
-<c:chartSpace xmlns:c="http://schemas.openxmlformats.org/drawingml/2006/chart" xmlns:a="http://schemas.openxmlformats.org/drawingml/2006/main" xmlns:r="http://schemas.openxmlformats.org/officeDocument/2006/relationships">
+<c:chartSpace xmlns:c="http://schemas.openxmlformats.org/drawingml/2006/chart" xmlns:a="http://schemas.openxmlformats.org/drawingml/2006/main" xmlns:r="http://schemas.openxmlformats.org/officeDocument/2006/relationships" xmlns:c16r2="http://schemas.microsoft.com/office/drawing/2015/06/chart">
   <c:date1904 val="0"/>
+  <c:lang val="en-US"/>
   <c:roundedCorners val="1"/>
+  <c:style val="2"/>
   <c:chart>
     <c:autoTitleDeleted val="1"/>
     <c:plotArea>
       <c:layout/>
       <c:lineChart>
+        <c:grouping val="standard"/>
         <c:varyColors val="0"/>
         <c:ser>
           <c:idx val="0"/>
@@ -1026,9 +761,6 @@
             </c:strRef>
           </c:tx>
           <c:spPr>
-            <a:solidFill>
-              <a:srgbClr val="12B886"/>
-            </a:solidFill>
             <a:ln w="38100" cap="flat">
               <a:solidFill>
                 <a:srgbClr val="12B886"/>
@@ -1038,31 +770,6 @@
             </a:ln>
             <a:effectLst/>
           </c:spPr>
-          <c:invertIfNegative val="0"/>
-          <c:dLbls>
-            <c:numFmt formatCode="#,##0" sourceLinked="0"/>
-            <c:txPr>
-              <a:bodyPr/>
-              <a:lstStyle/>
-              <a:p>
-                <a:pPr>
-                  <a:defRPr b="0" i="0" strike="noStrike" sz="1200" u="none">
-                    <a:solidFill>
-                      <a:srgbClr val="000000"/>
-                    </a:solidFill>
-                    <a:latin typeface="Arial"/>
-                  </a:defRPr>
-                </a:pPr>
-              </a:p>
-            </c:txPr>
-            <c:showLegendKey val="0"/>
-            <c:showVal val="0"/>
-            <c:showCatName val="0"/>
-            <c:showSerName val="0"/>
-            <c:showPercent val="0"/>
-            <c:showBubbleSize val="0"/>
-            <c:showLeaderLines val="0"/>
-          </c:dLbls>
           <c:marker>
             <c:symbol val="circle"/>
             <c:size val="6"/>
@@ -1081,38 +788,36 @@
             </c:spPr>
           </c:marker>
           <c:cat>
-            <c:multiLvlStrRef>
+            <c:strRef>
               <c:f>Sheet1!$A$2:$A$9</c:f>
-              <c:multiLvlStrCache>
+              <c:strCache>
                 <c:ptCount val="8"/>
-                <c:lvl>
-                  <c:pt idx="0">
-                    <c:v>5</c:v>
-                  </c:pt>
-                  <c:pt idx="1">
-                    <c:v>10</c:v>
-                  </c:pt>
-                  <c:pt idx="2">
-                    <c:v>20</c:v>
-                  </c:pt>
-                  <c:pt idx="3">
-                    <c:v>30</c:v>
-                  </c:pt>
-                  <c:pt idx="4">
-                    <c:v>50</c:v>
-                  </c:pt>
-                  <c:pt idx="5">
-                    <c:v>80</c:v>
-                  </c:pt>
-                  <c:pt idx="6">
-                    <c:v>120</c:v>
-                  </c:pt>
-                  <c:pt idx="7">
-                    <c:v>200</c:v>
-                  </c:pt>
-                </c:lvl>
-              </c:multiLvlStrCache>
-            </c:multiLvlStrRef>
+                <c:pt idx="0">
+                  <c:v>5</c:v>
+                </c:pt>
+                <c:pt idx="1">
+                  <c:v>10</c:v>
+                </c:pt>
+                <c:pt idx="2">
+                  <c:v>20</c:v>
+                </c:pt>
+                <c:pt idx="3">
+                  <c:v>30</c:v>
+                </c:pt>
+                <c:pt idx="4">
+                  <c:v>50</c:v>
+                </c:pt>
+                <c:pt idx="5">
+                  <c:v>80</c:v>
+                </c:pt>
+                <c:pt idx="6">
+                  <c:v>120</c:v>
+                </c:pt>
+                <c:pt idx="7">
+                  <c:v>200</c:v>
+                </c:pt>
+              </c:strCache>
+            </c:strRef>
           </c:cat>
           <c:val>
             <c:numRef>
@@ -1148,6 +853,11 @@
             </c:numRef>
           </c:val>
           <c:smooth val="1"/>
+          <c:extLst>
+            <c:ext xmlns:c16="http://schemas.microsoft.com/office/drawing/2014/chart" uri="{C3380CC4-5D6E-409C-BE32-E72D297353CC}">
+              <c16:uniqueId val="{00000000-1411-3247-8073-0D96ADACFB90}"/>
+            </c:ext>
+          </c:extLst>
         </c:ser>
         <c:ser>
           <c:idx val="1"/>
@@ -1164,9 +874,6 @@
             </c:strRef>
           </c:tx>
           <c:spPr>
-            <a:solidFill>
-              <a:srgbClr val="1A56E8"/>
-            </a:solidFill>
             <a:ln w="38100" cap="flat">
               <a:solidFill>
                 <a:srgbClr val="1A56E8"/>
@@ -1176,31 +883,6 @@
             </a:ln>
             <a:effectLst/>
           </c:spPr>
-          <c:invertIfNegative val="0"/>
-          <c:dLbls>
-            <c:numFmt formatCode="#,##0" sourceLinked="0"/>
-            <c:txPr>
-              <a:bodyPr/>
-              <a:lstStyle/>
-              <a:p>
-                <a:pPr>
-                  <a:defRPr b="0" i="0" strike="noStrike" sz="1200" u="none">
-                    <a:solidFill>
-                      <a:srgbClr val="000000"/>
-                    </a:solidFill>
-                    <a:latin typeface="Arial"/>
-                  </a:defRPr>
-                </a:pPr>
-              </a:p>
-            </c:txPr>
-            <c:showLegendKey val="0"/>
-            <c:showVal val="0"/>
-            <c:showCatName val="0"/>
-            <c:showSerName val="0"/>
-            <c:showPercent val="0"/>
-            <c:showBubbleSize val="0"/>
-            <c:showLeaderLines val="0"/>
-          </c:dLbls>
           <c:marker>
             <c:symbol val="circle"/>
             <c:size val="6"/>
@@ -1219,38 +901,36 @@
             </c:spPr>
           </c:marker>
           <c:cat>
-            <c:multiLvlStrRef>
+            <c:strRef>
               <c:f>Sheet1!$A$2:$A$9</c:f>
-              <c:multiLvlStrCache>
+              <c:strCache>
                 <c:ptCount val="8"/>
-                <c:lvl>
-                  <c:pt idx="0">
-                    <c:v>5</c:v>
-                  </c:pt>
-                  <c:pt idx="1">
-                    <c:v>10</c:v>
-                  </c:pt>
-                  <c:pt idx="2">
-                    <c:v>20</c:v>
-                  </c:pt>
-                  <c:pt idx="3">
-                    <c:v>30</c:v>
-                  </c:pt>
-                  <c:pt idx="4">
-                    <c:v>50</c:v>
-                  </c:pt>
-                  <c:pt idx="5">
-                    <c:v>80</c:v>
-                  </c:pt>
-                  <c:pt idx="6">
-                    <c:v>120</c:v>
-                  </c:pt>
-                  <c:pt idx="7">
-                    <c:v>200</c:v>
-                  </c:pt>
-                </c:lvl>
-              </c:multiLvlStrCache>
-            </c:multiLvlStrRef>
+                <c:pt idx="0">
+                  <c:v>5</c:v>
+                </c:pt>
+                <c:pt idx="1">
+                  <c:v>10</c:v>
+                </c:pt>
+                <c:pt idx="2">
+                  <c:v>20</c:v>
+                </c:pt>
+                <c:pt idx="3">
+                  <c:v>30</c:v>
+                </c:pt>
+                <c:pt idx="4">
+                  <c:v>50</c:v>
+                </c:pt>
+                <c:pt idx="5">
+                  <c:v>80</c:v>
+                </c:pt>
+                <c:pt idx="6">
+                  <c:v>120</c:v>
+                </c:pt>
+                <c:pt idx="7">
+                  <c:v>200</c:v>
+                </c:pt>
+              </c:strCache>
+            </c:strRef>
           </c:cat>
           <c:val>
             <c:numRef>
@@ -1268,7 +948,7 @@
                   <c:v>56.5</c:v>
                 </c:pt>
                 <c:pt idx="3">
-                  <c:v>75.4</c:v>
+                  <c:v>75.400000000000006</c:v>
                 </c:pt>
                 <c:pt idx="4">
                   <c:v>93.4</c:v>
@@ -1286,6 +966,11 @@
             </c:numRef>
           </c:val>
           <c:smooth val="1"/>
+          <c:extLst>
+            <c:ext xmlns:c16="http://schemas.microsoft.com/office/drawing/2014/chart" uri="{C3380CC4-5D6E-409C-BE32-E72D297353CC}">
+              <c16:uniqueId val="{00000001-1411-3247-8073-0D96ADACFB90}"/>
+            </c:ext>
+          </c:extLst>
         </c:ser>
         <c:ser>
           <c:idx val="2"/>
@@ -1302,9 +987,6 @@
             </c:strRef>
           </c:tx>
           <c:spPr>
-            <a:solidFill>
-              <a:srgbClr val="E6115E"/>
-            </a:solidFill>
             <a:ln w="38100" cap="flat">
               <a:solidFill>
                 <a:srgbClr val="E6115E"/>
@@ -1314,31 +996,6 @@
             </a:ln>
             <a:effectLst/>
           </c:spPr>
-          <c:invertIfNegative val="0"/>
-          <c:dLbls>
-            <c:numFmt formatCode="#,##0" sourceLinked="0"/>
-            <c:txPr>
-              <a:bodyPr/>
-              <a:lstStyle/>
-              <a:p>
-                <a:pPr>
-                  <a:defRPr b="0" i="0" strike="noStrike" sz="1200" u="none">
-                    <a:solidFill>
-                      <a:srgbClr val="000000"/>
-                    </a:solidFill>
-                    <a:latin typeface="Arial"/>
-                  </a:defRPr>
-                </a:pPr>
-              </a:p>
-            </c:txPr>
-            <c:showLegendKey val="0"/>
-            <c:showVal val="0"/>
-            <c:showCatName val="0"/>
-            <c:showSerName val="0"/>
-            <c:showPercent val="0"/>
-            <c:showBubbleSize val="0"/>
-            <c:showLeaderLines val="0"/>
-          </c:dLbls>
           <c:marker>
             <c:symbol val="circle"/>
             <c:size val="6"/>
@@ -1357,38 +1014,36 @@
             </c:spPr>
           </c:marker>
           <c:cat>
-            <c:multiLvlStrRef>
+            <c:strRef>
               <c:f>Sheet1!$A$2:$A$9</c:f>
-              <c:multiLvlStrCache>
+              <c:strCache>
                 <c:ptCount val="8"/>
-                <c:lvl>
-                  <c:pt idx="0">
-                    <c:v>5</c:v>
-                  </c:pt>
-                  <c:pt idx="1">
-                    <c:v>10</c:v>
-                  </c:pt>
-                  <c:pt idx="2">
-                    <c:v>20</c:v>
-                  </c:pt>
-                  <c:pt idx="3">
-                    <c:v>30</c:v>
-                  </c:pt>
-                  <c:pt idx="4">
-                    <c:v>50</c:v>
-                  </c:pt>
-                  <c:pt idx="5">
-                    <c:v>80</c:v>
-                  </c:pt>
-                  <c:pt idx="6">
-                    <c:v>120</c:v>
-                  </c:pt>
-                  <c:pt idx="7">
-                    <c:v>200</c:v>
-                  </c:pt>
-                </c:lvl>
-              </c:multiLvlStrCache>
-            </c:multiLvlStrRef>
+                <c:pt idx="0">
+                  <c:v>5</c:v>
+                </c:pt>
+                <c:pt idx="1">
+                  <c:v>10</c:v>
+                </c:pt>
+                <c:pt idx="2">
+                  <c:v>20</c:v>
+                </c:pt>
+                <c:pt idx="3">
+                  <c:v>30</c:v>
+                </c:pt>
+                <c:pt idx="4">
+                  <c:v>50</c:v>
+                </c:pt>
+                <c:pt idx="5">
+                  <c:v>80</c:v>
+                </c:pt>
+                <c:pt idx="6">
+                  <c:v>120</c:v>
+                </c:pt>
+                <c:pt idx="7">
+                  <c:v>200</c:v>
+                </c:pt>
+              </c:strCache>
+            </c:strRef>
           </c:cat>
           <c:val>
             <c:numRef>
@@ -1400,7 +1055,7 @@
                   <c:v>6.4</c:v>
                 </c:pt>
                 <c:pt idx="1">
-                  <c:v>8.8</c:v>
+                  <c:v>8.8000000000000007</c:v>
                 </c:pt>
                 <c:pt idx="2">
                   <c:v>13.6</c:v>
@@ -1418,41 +1073,30 @@
                   <c:v>58.4</c:v>
                 </c:pt>
                 <c:pt idx="7">
-                  <c:v>80.4</c:v>
+                  <c:v>80.400000000000006</c:v>
                 </c:pt>
               </c:numCache>
             </c:numRef>
           </c:val>
           <c:smooth val="1"/>
+          <c:extLst>
+            <c:ext xmlns:c16="http://schemas.microsoft.com/office/drawing/2014/chart" uri="{C3380CC4-5D6E-409C-BE32-E72D297353CC}">
+              <c16:uniqueId val="{00000002-1411-3247-8073-0D96ADACFB90}"/>
+            </c:ext>
+          </c:extLst>
         </c:ser>
         <c:dLbls>
-          <c:numFmt formatCode="#,##0" sourceLinked="0"/>
-          <c:txPr>
-            <a:bodyPr/>
-            <a:lstStyle/>
-            <a:p>
-              <a:pPr>
-                <a:defRPr b="0" i="0" strike="noStrike" sz="1200" u="none">
-                  <a:solidFill>
-                    <a:srgbClr val="000000"/>
-                  </a:solidFill>
-                  <a:latin typeface="Arial"/>
-                </a:defRPr>
-              </a:pPr>
-            </a:p>
-          </c:txPr>
           <c:showLegendKey val="0"/>
           <c:showVal val="0"/>
           <c:showCatName val="0"/>
           <c:showSerName val="0"/>
           <c:showPercent val="0"/>
           <c:showBubbleSize val="0"/>
-          <c:showLeaderLines val="0"/>
         </c:dLbls>
         <c:marker val="1"/>
+        <c:smooth val="0"/>
         <c:axId val="2094734554"/>
         <c:axId val="2094734552"/>
-        <c:axId val="2094734556"/>
       </c:lineChart>
       <c:catAx>
         <c:axId val="2094734554"/>
@@ -1476,7 +1120,7 @@
                   </a:defRPr>
                 </a:pPr>
                 <a:r>
-                  <a:rPr sz="1000" b="0" i="0" u="none" strike="noStrike">
+                  <a:rPr lang="en-US" sz="1000" b="0" i="0" u="none" strike="noStrike">
                     <a:solidFill>
                       <a:srgbClr val="5B6B87"/>
                     </a:solidFill>
@@ -1487,7 +1131,6 @@
               </a:p>
             </c:rich>
           </c:tx>
-          <c:layout/>
           <c:overlay val="0"/>
         </c:title>
         <c:numFmt formatCode="General" sourceLinked="1"/>
@@ -1522,6 +1165,7 @@
         <c:crosses val="autoZero"/>
         <c:auto val="1"/>
         <c:lblAlgn val="ctr"/>
+        <c:lblOffset val="100"/>
         <c:noMultiLvlLbl val="1"/>
       </c:catAx>
       <c:valAx>
@@ -1559,7 +1203,7 @@
                   </a:defRPr>
                 </a:pPr>
                 <a:r>
-                  <a:rPr sz="1000" b="0" i="0" u="none" strike="noStrike">
+                  <a:rPr lang="en-US" sz="1000" b="0" i="0" u="none" strike="noStrike">
                     <a:solidFill>
                       <a:srgbClr val="5B6B87"/>
                     </a:solidFill>
@@ -1570,7 +1214,6 @@
               </a:p>
             </c:rich>
           </c:tx>
-          <c:layout/>
           <c:overlay val="0"/>
         </c:title>
         <c:numFmt formatCode="General" sourceLinked="0"/>
@@ -1633,6 +1276,7 @@
     </c:legend>
     <c:plotVisOnly val="1"/>
     <c:dispBlanksAs val="span"/>
+    <c:showDLblsOverMax val="1"/>
   </c:chart>
   <c:spPr>
     <a:noFill/>
@@ -1648,9 +1292,11 @@
 </file>
 
 <file path=ppt/charts/chart3.xml><?xml version="1.0" encoding="utf-8"?>
-<c:chartSpace xmlns:c="http://schemas.openxmlformats.org/drawingml/2006/chart" xmlns:a="http://schemas.openxmlformats.org/drawingml/2006/main" xmlns:r="http://schemas.openxmlformats.org/officeDocument/2006/relationships">
+<c:chartSpace xmlns:c="http://schemas.openxmlformats.org/drawingml/2006/chart" xmlns:a="http://schemas.openxmlformats.org/drawingml/2006/main" xmlns:r="http://schemas.openxmlformats.org/officeDocument/2006/relationships" xmlns:c16r2="http://schemas.microsoft.com/office/drawing/2015/06/chart">
   <c:date1904 val="0"/>
+  <c:lang val="en-US"/>
   <c:roundedCorners val="1"/>
+  <c:style val="2"/>
   <c:chart>
     <c:autoTitleDeleted val="1"/>
     <c:plotArea>
@@ -1682,18 +1328,26 @@
           <c:invertIfNegative val="0"/>
           <c:dLbls>
             <c:numFmt formatCode="0.0&quot;%&quot;" sourceLinked="0"/>
+            <c:spPr>
+              <a:noFill/>
+              <a:ln>
+                <a:noFill/>
+              </a:ln>
+              <a:effectLst/>
+            </c:spPr>
             <c:txPr>
               <a:bodyPr/>
               <a:lstStyle/>
               <a:p>
                 <a:pPr>
-                  <a:defRPr b="1" i="0" strike="noStrike" sz="1050" u="none">
+                  <a:defRPr sz="1050" b="1" i="0" u="none" strike="noStrike">
                     <a:solidFill>
                       <a:srgbClr val="0A2559"/>
                     </a:solidFill>
                     <a:latin typeface="Arial"/>
                   </a:defRPr>
                 </a:pPr>
+                <a:endParaRPr lang="en-PE"/>
               </a:p>
             </c:txPr>
             <c:showLegendKey val="0"/>
@@ -1703,37 +1357,40 @@
             <c:showPercent val="0"/>
             <c:showBubbleSize val="0"/>
             <c:showLeaderLines val="0"/>
+            <c:extLst>
+              <c:ext xmlns:c15="http://schemas.microsoft.com/office/drawing/2012/chart" uri="{CE6537A1-D6FC-4f65-9D91-7224C49458BB}">
+                <c15:showLeaderLines val="0"/>
+              </c:ext>
+            </c:extLst>
           </c:dLbls>
           <c:cat>
-            <c:multiLvlStrRef>
+            <c:strRef>
               <c:f>Sheet1!$A$2:$A$8</c:f>
-              <c:multiLvlStrCache>
+              <c:strCache>
                 <c:ptCount val="7"/>
-                <c:lvl>
-                  <c:pt idx="0">
-                    <c:v>1</c:v>
-                  </c:pt>
-                  <c:pt idx="1">
-                    <c:v>2</c:v>
-                  </c:pt>
-                  <c:pt idx="2">
-                    <c:v>5</c:v>
-                  </c:pt>
-                  <c:pt idx="3">
-                    <c:v>10</c:v>
-                  </c:pt>
-                  <c:pt idx="4">
-                    <c:v>20</c:v>
-                  </c:pt>
-                  <c:pt idx="5">
-                    <c:v>50</c:v>
-                  </c:pt>
-                  <c:pt idx="6">
-                    <c:v>100</c:v>
-                  </c:pt>
-                </c:lvl>
-              </c:multiLvlStrCache>
-            </c:multiLvlStrRef>
+                <c:pt idx="0">
+                  <c:v>1</c:v>
+                </c:pt>
+                <c:pt idx="1">
+                  <c:v>2</c:v>
+                </c:pt>
+                <c:pt idx="2">
+                  <c:v>5</c:v>
+                </c:pt>
+                <c:pt idx="3">
+                  <c:v>10</c:v>
+                </c:pt>
+                <c:pt idx="4">
+                  <c:v>20</c:v>
+                </c:pt>
+                <c:pt idx="5">
+                  <c:v>50</c:v>
+                </c:pt>
+                <c:pt idx="6">
+                  <c:v>100</c:v>
+                </c:pt>
+              </c:strCache>
+            </c:strRef>
           </c:cat>
           <c:val>
             <c:numRef>
@@ -1745,7 +1402,7 @@
                   <c:v>5</c:v>
                 </c:pt>
                 <c:pt idx="1">
-                  <c:v>9.8</c:v>
+                  <c:v>9.8000000000000007</c:v>
                 </c:pt>
                 <c:pt idx="2">
                   <c:v>22.6</c:v>
@@ -1765,36 +1422,23 @@
               </c:numCache>
             </c:numRef>
           </c:val>
+          <c:extLst>
+            <c:ext xmlns:c16="http://schemas.microsoft.com/office/drawing/2014/chart" uri="{C3380CC4-5D6E-409C-BE32-E72D297353CC}">
+              <c16:uniqueId val="{00000000-10A9-3644-9C82-8E8D9AD2D6AB}"/>
+            </c:ext>
+          </c:extLst>
         </c:ser>
         <c:dLbls>
-          <c:numFmt formatCode="0.0&quot;%&quot;" sourceLinked="0"/>
-          <c:txPr>
-            <a:bodyPr/>
-            <a:lstStyle/>
-            <a:p>
-              <a:pPr>
-                <a:defRPr b="1" i="0" strike="noStrike" sz="1050" u="none">
-                  <a:solidFill>
-                    <a:srgbClr val="0A2559"/>
-                  </a:solidFill>
-                  <a:latin typeface="Arial"/>
-                </a:defRPr>
-              </a:pPr>
-            </a:p>
-          </c:txPr>
           <c:showLegendKey val="0"/>
           <c:showVal val="1"/>
           <c:showCatName val="0"/>
           <c:showSerName val="0"/>
           <c:showPercent val="0"/>
           <c:showBubbleSize val="0"/>
-          <c:showLeaderLines val="0"/>
         </c:dLbls>
         <c:gapWidth val="60"/>
-        <c:overlap val="0"/>
         <c:axId val="2094734554"/>
         <c:axId val="2094734552"/>
-        <c:axId val="2094734556"/>
       </c:barChart>
       <c:catAx>
         <c:axId val="2094734554"/>
@@ -1818,7 +1462,7 @@
                   </a:defRPr>
                 </a:pPr>
                 <a:r>
-                  <a:rPr sz="1000" b="0" i="0" u="none" strike="noStrike">
+                  <a:rPr lang="en-US" sz="1000" b="0" i="0" u="none" strike="noStrike">
                     <a:solidFill>
                       <a:srgbClr val="5B6B87"/>
                     </a:solidFill>
@@ -1829,7 +1473,6 @@
               </a:p>
             </c:rich>
           </c:tx>
-          <c:layout/>
           <c:overlay val="0"/>
         </c:title>
         <c:numFmt formatCode="General" sourceLinked="1"/>
@@ -1864,6 +1507,7 @@
         <c:crosses val="autoZero"/>
         <c:auto val="1"/>
         <c:lblAlgn val="ctr"/>
+        <c:lblOffset val="100"/>
         <c:noMultiLvlLbl val="1"/>
       </c:catAx>
       <c:valAx>
@@ -1928,6 +1572,7 @@
     </c:plotArea>
     <c:plotVisOnly val="1"/>
     <c:dispBlanksAs val="span"/>
+    <c:showDLblsOverMax val="1"/>
   </c:chart>
   <c:spPr>
     <a:noFill/>
@@ -1964,234 +1609,10 @@
           <a:chExt cx="0" cy="0"/>
         </a:xfrm>
       </p:grpSpPr>
-      <p:sp>
-        <p:nvSpPr>
-          <p:cNvPr id="2" name="Header Placeholder 1"/>
-          <p:cNvSpPr>
-            <a:spLocks noGrp="1"/>
-          </p:cNvSpPr>
-          <p:nvPr>
-            <p:ph type="hdr" sz="quarter"/>
-          </p:nvPr>
-        </p:nvSpPr>
-        <p:spPr>
-          <a:xfrm>
-            <a:off x="0" y="0"/>
-            <a:ext cx="2971800" cy="458788"/>
-          </a:xfrm>
-          <a:prstGeom prst="rect">
-            <a:avLst/>
-          </a:prstGeom>
-        </p:spPr>
-        <p:txBody>
-          <a:bodyPr vert="horz" lIns="91440" tIns="45720" rIns="91440" bIns="45720" rtlCol="0"/>
-          <a:lstStyle>
-            <a:lvl1pPr algn="l">
-              <a:defRPr sz="1200"/>
-            </a:lvl1pPr>
-          </a:lstStyle>
-          <a:p>
-            <a:endParaRPr lang="en-US"/>
-          </a:p>
-        </p:txBody>
-      </p:sp>
-      <p:sp>
-        <p:nvSpPr>
-          <p:cNvPr id="3" name="Date Placeholder 2"/>
-          <p:cNvSpPr>
-            <a:spLocks noGrp="1"/>
-          </p:cNvSpPr>
-          <p:nvPr>
-            <p:ph type="dt" idx="1"/>
-          </p:nvPr>
-        </p:nvSpPr>
-        <p:spPr>
-          <a:xfrm>
-            <a:off x="3884613" y="0"/>
-            <a:ext cx="2971800" cy="458788"/>
-          </a:xfrm>
-          <a:prstGeom prst="rect">
-            <a:avLst/>
-          </a:prstGeom>
-        </p:spPr>
-        <p:txBody>
-          <a:bodyPr vert="horz" lIns="91440" tIns="45720" rIns="91440" bIns="45720" rtlCol="0"/>
-          <a:lstStyle>
-            <a:lvl1pPr algn="r">
-              <a:defRPr sz="1200"/>
-            </a:lvl1pPr>
-          </a:lstStyle>
-          <a:p>
-            <a:fld id="{5282F153-3F37-0F45-9E97-73ACFA13230C}" type="datetimeFigureOut">
-              <a:rPr lang="en-US"/>
-              <a:t>7/23/19</a:t>
-            </a:fld>
-            <a:endParaRPr lang="en-US"/>
-          </a:p>
-        </p:txBody>
-      </p:sp>
-      <p:sp>
-        <p:nvSpPr>
-          <p:cNvPr id="4" name="Slide Image Placeholder 3"/>
-          <p:cNvSpPr>
-            <a:spLocks noGrp="1" noRot="1" noChangeAspect="1"/>
-          </p:cNvSpPr>
-          <p:nvPr>
-            <p:ph type="sldImg" idx="2"/>
-          </p:nvPr>
-        </p:nvSpPr>
-        <p:spPr>
-          <a:xfrm>
-            <a:off x="685800" y="1143000"/>
-            <a:ext cx="5486400" cy="3086100"/>
-          </a:xfrm>
-          <a:prstGeom prst="rect">
-            <a:avLst/>
-          </a:prstGeom>
-          <a:noFill/>
-          <a:ln w="12700">
-            <a:solidFill>
-              <a:prstClr val="black"/>
-            </a:solidFill>
-          </a:ln>
-        </p:spPr>
-        <p:txBody>
-          <a:bodyPr vert="horz" lIns="91440" tIns="45720" rIns="91440" bIns="45720" rtlCol="0" anchor="ctr"/>
-          <a:lstStyle/>
-          <a:p>
-            <a:endParaRPr lang="en-US"/>
-          </a:p>
-        </p:txBody>
-      </p:sp>
-      <p:sp>
-        <p:nvSpPr>
-          <p:cNvPr id="5" name="Notes Placeholder 4"/>
-          <p:cNvSpPr>
-            <a:spLocks noGrp="1"/>
-          </p:cNvSpPr>
-          <p:nvPr>
-            <p:ph type="body" sz="quarter" idx="3"/>
-          </p:nvPr>
-        </p:nvSpPr>
-        <p:spPr>
-          <a:xfrm>
-            <a:off x="685800" y="4400550"/>
-            <a:ext cx="5486400" cy="3600450"/>
-          </a:xfrm>
-          <a:prstGeom prst="rect">
-            <a:avLst/>
-          </a:prstGeom>
-        </p:spPr>
-        <p:txBody>
-          <a:bodyPr vert="horz" lIns="91440" tIns="45720" rIns="91440" bIns="45720" rtlCol="0"/>
-          <a:lstStyle/>
-          <a:p>
-            <a:pPr lvl="0"/>
-            <a:r>
-              <a:rPr lang="en-US"/>
-              <a:t>Click to edit Master text styles</a:t>
-            </a:r>
-          </a:p>
-          <a:p>
-            <a:pPr lvl="1"/>
-            <a:r>
-              <a:rPr lang="en-US"/>
-              <a:t>Second level</a:t>
-            </a:r>
-          </a:p>
-          <a:p>
-            <a:pPr lvl="2"/>
-            <a:r>
-              <a:rPr lang="en-US"/>
-              <a:t>Third level</a:t>
-            </a:r>
-          </a:p>
-          <a:p>
-            <a:pPr lvl="3"/>
-            <a:r>
-              <a:rPr lang="en-US"/>
-              <a:t>Fourth level</a:t>
-            </a:r>
-          </a:p>
-          <a:p>
-            <a:pPr lvl="4"/>
-            <a:r>
-              <a:rPr lang="en-US"/>
-              <a:t>Fifth level</a:t>
-            </a:r>
-          </a:p>
-        </p:txBody>
-      </p:sp>
-      <p:sp>
-        <p:nvSpPr>
-          <p:cNvPr id="6" name="Footer Placeholder 5"/>
-          <p:cNvSpPr>
-            <a:spLocks noGrp="1"/>
-          </p:cNvSpPr>
-          <p:nvPr>
-            <p:ph type="ftr" sz="quarter" idx="4"/>
-          </p:nvPr>
-        </p:nvSpPr>
-        <p:spPr>
-          <a:xfrm>
-            <a:off x="0" y="8685213"/>
-            <a:ext cx="2971800" cy="458787"/>
-          </a:xfrm>
-          <a:prstGeom prst="rect">
-            <a:avLst/>
-          </a:prstGeom>
-        </p:spPr>
-        <p:txBody>
-          <a:bodyPr vert="horz" lIns="91440" tIns="45720" rIns="91440" bIns="45720" rtlCol="0" anchor="b"/>
-          <a:lstStyle>
-            <a:lvl1pPr algn="l">
-              <a:defRPr sz="1200"/>
-            </a:lvl1pPr>
-          </a:lstStyle>
-          <a:p>
-            <a:endParaRPr lang="en-US"/>
-          </a:p>
-        </p:txBody>
-      </p:sp>
-      <p:sp>
-        <p:nvSpPr>
-          <p:cNvPr id="7" name="Slide Number Placeholder 6"/>
-          <p:cNvSpPr>
-            <a:spLocks noGrp="1"/>
-          </p:cNvSpPr>
-          <p:nvPr>
-            <p:ph type="sldNum" sz="quarter" idx="5"/>
-          </p:nvPr>
-        </p:nvSpPr>
-        <p:spPr>
-          <a:xfrm>
-            <a:off x="3884613" y="8685213"/>
-            <a:ext cx="2971800" cy="458787"/>
-          </a:xfrm>
-          <a:prstGeom prst="rect">
-            <a:avLst/>
-          </a:prstGeom>
-        </p:spPr>
-        <p:txBody>
-          <a:bodyPr vert="horz" lIns="91440" tIns="45720" rIns="91440" bIns="45720" rtlCol="0" anchor="b"/>
-          <a:lstStyle>
-            <a:lvl1pPr algn="r">
-              <a:defRPr sz="1200"/>
-            </a:lvl1pPr>
-          </a:lstStyle>
-          <a:p>
-            <a:fld id="{CE5E9CC1-C706-0F49-92D6-E571CC5EEA8F}" type="slidenum">
-              <a:rPr lang="en-US"/>
-              <a:t>‹#›</a:t>
-            </a:fld>
-            <a:endParaRPr lang="en-US"/>
-          </a:p>
-        </p:txBody>
-      </p:sp>
     </p:spTree>
     <p:extLst>
       <p:ext uri="{BB962C8B-B14F-4D97-AF65-F5344CB8AC3E}">
-        <p14:creationId xmlns:p14="http://schemas.microsoft.com/office/powerpoint/2010/main" val="1024086991"/>
+        <p14:creationId xmlns:p14="http://schemas.microsoft.com/office/powerpoint/2010/main" val="2964486236"/>
       </p:ext>
     </p:extLst>
   </p:cSld>
@@ -2339,7 +1760,6 @@
               <a:rPr lang="en-US" dirty="0"/>
               <a:t>Arranca con la promesa del cierre de la Clase 4: 'hoy van a ver que el intervalo de la clase pasada y la prueba de hoy son la misma cosa dicha con distinta gramática'. Y con la advertencia: 'el p-valor es el número más usado y peor entendido de toda la estadística. No vamos a aprender a calcularlo — eso es una línea de código. Vamos a aprender a no decir tonterías con él.'</a:t>
             </a:r>
-            <a:endParaRPr lang="en-US" dirty="0"/>
           </a:p>
         </p:txBody>
       </p:sp>
@@ -2427,7 +1847,6 @@
               <a:rPr lang="en-US" dirty="0"/>
               <a:t>El error 1 merece 90 segundos y la analogía del test médico del pie, que lo hace evidente: si una enfermedad afecta a 1 en 10 000 y el test tiene 99 % de sensibilidad y especificidad, un positivo da apenas ~1 % de probabilidad de estar enfermo. Mismo error de invertir el condicional. El error 3 es el que produce daño en empresas con muchos datos, y es la slide 14. El error 4: pide que a partir de hoy reporten p = 0.043, no 'p &lt; 0.05'.</a:t>
             </a:r>
-            <a:endParaRPr lang="en-US" dirty="0"/>
           </a:p>
         </p:txBody>
       </p:sp>
@@ -2515,7 +1934,6 @@
               <a:rPr lang="en-US" dirty="0"/>
               <a:t>Tres minutos. El dato que engancha es el institucional: una asociación profesional emitiendo su primera declaración sobre un método en más de siglo y medio. Eso comunica la magnitud del problema mejor que cualquier argumento técnico. La tarjeta oscura final es la que hay que decir despacio, porque es la traducción a su trabajo: el sesgo de publicación existe dentro de las empresas y ahí nadie replica nada. Si preguntan por los números exactos de las replicaciones, no los inventes: di que las cifras varían por campo y por criterio de replicación, y que lo relevante es el orden de magnitud del problema.</a:t>
             </a:r>
-            <a:endParaRPr lang="en-US" dirty="0"/>
           </a:p>
         </p:txBody>
       </p:sp>
@@ -2603,7 +2021,6 @@
               <a:rPr lang="en-US" dirty="0"/>
               <a:t>La tabla 2×2 es estándar; el valor está en los dos ejemplos y en la tarjeta final. Pregunta al grupo: '¿cuál de los dos errores les cuesta más en su trabajo?'. En fraude la respuesta suele ser el tipo II, y sin embargo todos los controles están puestos sobre el tipo I. Esa contradicción es el punto de la slide. Y remata: bajar α sube β. No se pueden minimizar los dos a la vez con la misma n; lo único que rompe el trade-off es más muestra.</a:t>
             </a:r>
-            <a:endParaRPr lang="en-US" dirty="0"/>
           </a:p>
         </p:txBody>
       </p:sp>
@@ -2691,7 +2108,6 @@
               <a:rPr lang="en-US" dirty="0"/>
               <a:t>Recorre la curva magenta: con n=30 y un efecto pequeño la potencia es del 18.5 %. Es decir, 4 de cada 5 veces el estudio no vería el efecto aunque exista. Y el investigador escribiría 'no encontramos diferencias'. Ese es el diagnóstico de una parte enorme de la literatura y de los análisis internos que verán. La tabla de la derecha es la herramienta operativa: 15, 34, 199. Vale que anoten esos tres números.</a:t>
             </a:r>
-            <a:endParaRPr lang="en-US" dirty="0"/>
           </a:p>
         </p:txBody>
       </p:sp>
@@ -2779,7 +2195,6 @@
               <a:rPr lang="en-US" dirty="0"/>
               <a:t>Recorre la columna del p-valor de arriba abajo y detente en n = 400: es ahí donde cruza. Pregunta: '¿cambió el efecto entre la fila 1 y la fila 6?'. No: sigue siendo 0.10. Lo único que cambió fue n. Con sus 40 000 filas, todo va a salir significativo, y por eso el p-valor casi no les sirve como criterio de decisión. La frase de cierre: la pregunta correcta es cuántos soles, no si p es menor que 0.05.</a:t>
             </a:r>
-            <a:endParaRPr lang="en-US" dirty="0"/>
           </a:p>
         </p:txBody>
       </p:sp>
@@ -2867,7 +2282,6 @@
               <a:rPr lang="en-US" dirty="0"/>
               <a:t>Tres minutos. La fuerza del caso es que el método quedó descrito por el propio investigador en un texto público: no hay que interpretar intenciones. Las cuatro tarjetas de abajo son el contenido operativo: pide que levanten la mano quienes hayan hecho la número 4 (buscar subgrupos). Se levantan muchas manos, y sin mala intención. Ese es el punto: el p-hacking no requiere deshonestidad, solo requiere curiosidad sin registro previo. Si preguntan por el número exacto de retractaciones, di que fueron más de una decena y que la cifra siguió moviéndose; no inventes un número redondo.</a:t>
             </a:r>
-            <a:endParaRPr lang="en-US" dirty="0"/>
           </a:p>
         </p:txBody>
       </p:sp>
@@ -2955,7 +2369,6 @@
               <a:rPr lang="en-US" dirty="0"/>
               <a:t>Anuncia 'slide para fotografiar' y da 20 segundos de silencio. Después señala solo dos filas: la t de Welch (porque el default de scipy es el equivocado y casi nadie lo cambia) y la última (no paramétricas). La tarjeta oscura es el cierre conceptual: muchas pruebas en informes corporativos no responden ninguna decisión.</a:t>
             </a:r>
-            <a:endParaRPr lang="en-US" dirty="0"/>
           </a:p>
         </p:txBody>
       </p:sp>
@@ -3043,7 +2456,6 @@
               <a:rPr lang="en-US" dirty="0"/>
               <a:t>El gráfico habla solo: con 20 pruebas la probabilidad de al menos un falso positivo es del 64 %, no del 5 %. La tarjeta de abajo a la izquierda es la que les toca: el dashboard de 30 métricas produce un falso hallazgo y medio cada mes, y alguien lo va a presentar como tendencia. De las tres correcciones, la única que hay que recordar como default es Holm; FDR cuando son cientos. Bonferroni se nombra porque es la que todos conocen.</a:t>
             </a:r>
-            <a:endParaRPr lang="en-US" dirty="0"/>
           </a:p>
         </p:txBody>
       </p:sp>
@@ -3131,7 +2543,6 @@
               <a:rPr lang="en-US" dirty="0"/>
               <a:t>El error 1 es el más frecuente en informes internos; el 2 es el más frecuente cuando hay muchos datos, que es su caso. Si el tiempo aprieta, di el 1 y el 4 y pasa al Colab: los cuatro están escritos.</a:t>
             </a:r>
-            <a:endParaRPr lang="en-US" dirty="0"/>
           </a:p>
         </p:txBody>
       </p:sp>
@@ -3219,7 +2630,6 @@
               <a:rPr lang="en-US" dirty="0"/>
               <a:t>Reparte el enlace acá, no antes. Trabajan en parejas. Recorre el aula durante el bloque 2: la dualidad se entiende cuando la ven salir de su propio código, y ahí es donde se traban con el bucle sobre μ₀. El bloque 5 es el que van a recordar en un año.</a:t>
             </a:r>
-            <a:endParaRPr lang="en-US" dirty="0"/>
           </a:p>
         </p:txBody>
       </p:sp>
@@ -3307,7 +2717,6 @@
               <a:rPr lang="en-US" dirty="0"/>
               <a:t>Insiste en que no es un tema nuevo. Muchos cursos presentan IC y pruebas como capítulos separados y los alumnos nunca conectan. Aquí la conexión es el eje: la slide 8 la demuestra con los mismos números de la clase pasada. La tarjeta oscura es el caso que resolveremos tres veces a lo largo de la sesión.</a:t>
             </a:r>
-            <a:endParaRPr lang="en-US" dirty="0"/>
           </a:p>
         </p:txBody>
       </p:sp>
@@ -3395,7 +2804,6 @@
               <a:rPr lang="en-US" dirty="0"/>
               <a:t>Esta slide es la más práctica de la sesión y la que más rápido cambia su trabajo. Lee las dos versiones en voz alta, una después de la otra: el contraste convence sin argumentar. Y remata: el sexto punto ('cuántas pruebas corriste') es el que casi nadie escribe y el único que permite a un tercero juzgar si el resultado es creíble.</a:t>
             </a:r>
-            <a:endParaRPr lang="en-US" dirty="0"/>
           </a:p>
         </p:txBody>
       </p:sp>
@@ -3483,7 +2891,6 @@
               <a:rPr lang="en-US" dirty="0"/>
               <a:t>Lee el checklist y pide pulgares en cada punto. El punto crítico es el segundo: si no pueden enunciar qué dice un p-valor, vuelve 20 segundos a la tarjeta oscura de la slide 9 y repítela. El reto es de campo y va a producir la mejor conversación de la Clase 6: casi nadie va a poder contestar las tres preguntas, y descubrir eso sobre informes de su propia organización es más persuasivo que cualquier slide.</a:t>
             </a:r>
-            <a:endParaRPr lang="en-US" dirty="0"/>
           </a:p>
         </p:txBody>
       </p:sp>
@@ -3571,7 +2978,6 @@
               <a:rPr lang="en-US" dirty="0"/>
               <a:t>El bloque 4 es el que se comprime si vienen retrasados. Los bloques 2 y 3 no se tocan: la dualidad IC-prueba y la potencia son lo que distingue esta clase de un tutorial de scipy.</a:t>
             </a:r>
-            <a:endParaRPr lang="en-US" dirty="0"/>
           </a:p>
         </p:txBody>
       </p:sp>
@@ -3659,7 +3065,6 @@
               <a:rPr lang="en-US" dirty="0"/>
               <a:t>No leas las ocho. Lee H₀, H₁ y p-valor, y di que las otras cinco están ahí para volver durante el laboratorio. La regla del pie es la más útil de la slide y hay que decirla mirando al grupo: H₀ es siempre lo aburrido. «El tratamiento no funciona», «la tasa no cambió», «los dos grupos son iguales». Si tu H₀ suena interesante, la invertiste.</a:t>
             </a:r>
-            <a:endParaRPr lang="en-US" dirty="0"/>
           </a:p>
         </p:txBody>
       </p:sp>
@@ -3747,7 +3152,6 @@
               <a:rPr lang="en-US" dirty="0"/>
               <a:t>La analogía del juicio funciona en cualquier grupo y vale los 90 segundos. Lo importante es el remate: absuelto ≠ inocente. Las tres tarjetas de abajo son las frases que van a leer en informes reales, incluidos los suyos. Si el grupo es de riesgo: la frase 'el modelo no muestra sesgo' suele significar 'no lo detectamos con la muestra que usamos', y son cosas muy distintas ante un regulador.</a:t>
             </a:r>
-            <a:endParaRPr lang="en-US" dirty="0"/>
           </a:p>
         </p:txBody>
       </p:sp>
@@ -3835,7 +3239,6 @@
               <a:rPr lang="en-US" dirty="0"/>
               <a:t>Recorre los cinco con el puntero y detente en el 5: 'decide Y REDACTA'. El paso que todos omiten es reportar el efecto y el intervalo. Un informe que dice solo 'p &lt; 0.05' es un informe incompleto y hoy aprenden por qué. La tarjeta oscura del final es la semilla del p-hacking; anúnciala y déjala pendiente.</a:t>
             </a:r>
-            <a:endParaRPr lang="en-US" dirty="0"/>
           </a:p>
         </p:txBody>
       </p:sp>
@@ -3923,7 +3326,6 @@
               <a:rPr lang="en-US" dirty="0"/>
               <a:t>Haz el cálculo del segundo caso en la pizarra: (3125 − 2300) / 349.43 = 2.361. Es la misma aritmética del z de la Clase 3. El punto de la tabla: la muestra es idéntica en las dos filas. El p-valor no es una propiedad de tus datos, es una propiedad de la pareja (datos, hipótesis). Mucha gente habla del p-valor como si midiera la calidad de los datos.</a:t>
             </a:r>
-            <a:endParaRPr lang="en-US" dirty="0"/>
           </a:p>
         </p:txBody>
       </p:sp>
@@ -4011,7 +3413,6 @@
               <a:rPr lang="en-US" dirty="0"/>
               <a:t>Esta slide es la que hace que la clase valga la pena para quien ya vio pruebas de hipótesis. Muéstrala en silencio unos segundos y luego recorre la recta con el puntero: el verde está dentro, el magenta está fuera. Después lee la tarjeta oscura despejando la desigualdad en voz alta. Consecuencia práctica que vale decir: si reportas el intervalo, ya reportaste el resultado de TODAS las pruebas posibles, y encima informas del tamaño del efecto. Por eso muchas revistas exigen intervalos y no p-valores.</a:t>
             </a:r>
-            <a:endParaRPr lang="en-US" dirty="0"/>
           </a:p>
         </p:txBody>
       </p:sp>
@@ -4099,7 +3500,6 @@
               <a:rPr lang="en-US" dirty="0"/>
               <a:t>Lee la tarjeta oscura literalmente y luego repite: 'todo lo que no está en esa frase, no es el p-valor'. Es el gancho para la slide 10. Señala el área magenta: es diminuta, y eso es lo que significa 2.3 %. La tarjeta del ×2 es donde se hace trampa con más frecuencia: elegir una cola después de ver el signo del efecto duplica tu tasa de falsos positivos sin que se note.</a:t>
             </a:r>
-            <a:endParaRPr lang="en-US" dirty="0"/>
           </a:p>
         </p:txBody>
       </p:sp>
@@ -4172,6 +3572,11 @@
 <file path=ppt/slideMasters/slideMaster1.xml><?xml version="1.0" encoding="utf-8"?>
 <p:sldMaster xmlns:a="http://schemas.openxmlformats.org/drawingml/2006/main" xmlns:r="http://schemas.openxmlformats.org/officeDocument/2006/relationships" xmlns:p="http://schemas.openxmlformats.org/presentationml/2006/main">
   <p:cSld>
+    <p:bg>
+      <p:bgRef idx="1001">
+        <a:schemeClr val="bg1"/>
+      </p:bgRef>
+    </p:bg>
     <p:spTree>
       <p:nvGrpSpPr>
         <p:cNvPr id="1" name=""/>
@@ -4454,6 +3859,7 @@
         <a:solidFill>
           <a:srgbClr val="0A2559"/>
         </a:solidFill>
+        <a:effectLst/>
       </p:bgPr>
     </p:bg>
     <p:spTree>
@@ -6539,7 +5945,7 @@
           <a:bodyPr wrap="square" lIns="0" tIns="0" rIns="0" bIns="0" rtlCol="0" anchor="ctr"/>
           <a:lstStyle/>
           <a:p>
-            <a:pPr algn="ctr" indent="0" marL="0">
+            <a:pPr marL="0" indent="0" algn="ctr">
               <a:buNone/>
             </a:pPr>
             <a:r>
@@ -6605,11 +6011,11 @@
           <a:bodyPr wrap="square" lIns="0" tIns="0" rIns="0" bIns="0" rtlCol="0" anchor="ctr"/>
           <a:lstStyle/>
           <a:p>
-            <a:pPr algn="ctr" indent="0" marL="0">
+            <a:pPr marL="0" indent="0" algn="ctr">
               <a:buNone/>
             </a:pPr>
             <a:r>
-              <a:rPr lang="en-US" sz="1150" b="1" spc="100" kern="0" dirty="0">
+              <a:rPr lang="en-US" sz="1150" b="1" kern="0" spc="100" dirty="0">
                 <a:solidFill>
                   <a:srgbClr val="FFFFFF"/>
                 </a:solidFill>
@@ -6644,7 +6050,7 @@
           <a:bodyPr wrap="square" lIns="0" tIns="0" rIns="0" bIns="0" rtlCol="0" anchor="t"/>
           <a:lstStyle/>
           <a:p>
-            <a:pPr indent="0" marL="0">
+            <a:pPr marL="0" indent="0">
               <a:lnSpc>
                 <a:spcPct val="98000"/>
               </a:lnSpc>
@@ -6664,7 +6070,7 @@
             <a:endParaRPr lang="en-US" sz="4400" dirty="0"/>
           </a:p>
           <a:p>
-            <a:pPr indent="0" marL="0">
+            <a:pPr marL="0" indent="0">
               <a:lnSpc>
                 <a:spcPct val="98000"/>
               </a:lnSpc>
@@ -6706,7 +6112,7 @@
           <a:bodyPr wrap="square" lIns="0" tIns="0" rIns="0" bIns="0" rtlCol="0" anchor="t"/>
           <a:lstStyle/>
           <a:p>
-            <a:pPr algn="l" indent="0" marL="0">
+            <a:pPr marL="0" indent="0" algn="l">
               <a:lnSpc>
                 <a:spcPct val="120000"/>
               </a:lnSpc>
@@ -6726,7 +6132,7 @@
             <a:endParaRPr lang="en-US" sz="1500" dirty="0"/>
           </a:p>
           <a:p>
-            <a:pPr algn="l" indent="0" marL="0">
+            <a:pPr marL="0" indent="0" algn="l">
               <a:lnSpc>
                 <a:spcPct val="120000"/>
               </a:lnSpc>
@@ -6768,7 +6174,7 @@
           <a:bodyPr wrap="square" lIns="0" tIns="0" rIns="0" bIns="0" rtlCol="0" anchor="ctr"/>
           <a:lstStyle/>
           <a:p>
-            <a:pPr indent="0" marL="0">
+            <a:pPr marL="0" indent="0">
               <a:buNone/>
             </a:pPr>
             <a:r>
@@ -6807,7 +6213,7 @@
           <a:bodyPr wrap="square" lIns="0" tIns="0" rIns="0" bIns="0" rtlCol="0" anchor="t"/>
           <a:lstStyle/>
           <a:p>
-            <a:pPr indent="0" marL="0">
+            <a:pPr marL="0" indent="0">
               <a:buNone/>
             </a:pPr>
             <a:r>
@@ -6846,7 +6252,7 @@
           <a:bodyPr wrap="square" lIns="0" tIns="0" rIns="0" bIns="0" rtlCol="0" anchor="ctr"/>
           <a:lstStyle/>
           <a:p>
-            <a:pPr indent="0" marL="0">
+            <a:pPr marL="0" indent="0">
               <a:buNone/>
             </a:pPr>
             <a:r>
@@ -6885,7 +6291,7 @@
           <a:bodyPr wrap="square" lIns="0" tIns="0" rIns="0" bIns="0" rtlCol="0" anchor="t"/>
           <a:lstStyle/>
           <a:p>
-            <a:pPr indent="0" marL="0">
+            <a:pPr marL="0" indent="0">
               <a:buNone/>
             </a:pPr>
             <a:r>
@@ -6924,7 +6330,7 @@
           <a:bodyPr wrap="square" lIns="0" tIns="0" rIns="0" bIns="0" rtlCol="0" anchor="ctr"/>
           <a:lstStyle/>
           <a:p>
-            <a:pPr indent="0" marL="0">
+            <a:pPr marL="0" indent="0">
               <a:buNone/>
             </a:pPr>
             <a:r>
@@ -6963,7 +6369,7 @@
           <a:bodyPr wrap="square" lIns="0" tIns="0" rIns="0" bIns="0" rtlCol="0" anchor="t"/>
           <a:lstStyle/>
           <a:p>
-            <a:pPr indent="0" marL="0">
+            <a:pPr marL="0" indent="0">
               <a:buNone/>
             </a:pPr>
             <a:r>
@@ -7002,7 +6408,7 @@
           <a:bodyPr wrap="square" lIns="0" tIns="0" rIns="0" bIns="0" rtlCol="0" anchor="ctr"/>
           <a:lstStyle/>
           <a:p>
-            <a:pPr indent="0" marL="0">
+            <a:pPr marL="0" indent="0">
               <a:buNone/>
             </a:pPr>
             <a:r>
@@ -7036,6 +6442,7 @@
         <a:solidFill>
           <a:srgbClr val="F5F7FB"/>
         </a:solidFill>
+        <a:effectLst/>
       </p:bgPr>
     </p:bg>
     <p:spTree>
@@ -7100,11 +6507,11 @@
           <a:bodyPr wrap="square" lIns="0" tIns="0" rIns="0" bIns="0" rtlCol="0" anchor="ctr"/>
           <a:lstStyle/>
           <a:p>
-            <a:pPr algn="ctr" indent="0" marL="0">
+            <a:pPr marL="0" indent="0" algn="ctr">
               <a:buNone/>
             </a:pPr>
             <a:r>
-              <a:rPr lang="en-US" sz="1150" b="1" spc="100" kern="0" dirty="0">
+              <a:rPr lang="en-US" sz="1150" b="1" kern="0" spc="100" dirty="0">
                 <a:solidFill>
                   <a:srgbClr val="FFFFFF"/>
                 </a:solidFill>
@@ -7139,7 +6546,7 @@
           <a:bodyPr wrap="square" lIns="0" tIns="0" rIns="0" bIns="0" rtlCol="0" anchor="ctr"/>
           <a:lstStyle/>
           <a:p>
-            <a:pPr indent="0" marL="0">
+            <a:pPr marL="0" indent="0">
               <a:buNone/>
             </a:pPr>
             <a:r>
@@ -7178,7 +6585,7 @@
           <a:bodyPr wrap="square" lIns="0" tIns="0" rIns="0" bIns="0" rtlCol="0" anchor="ctr"/>
           <a:lstStyle/>
           <a:p>
-            <a:pPr indent="0" marL="0">
+            <a:pPr marL="0" indent="0">
               <a:buNone/>
             </a:pPr>
             <a:r>
@@ -7271,7 +6678,7 @@
           <a:bodyPr wrap="square" lIns="0" tIns="0" rIns="0" bIns="0" rtlCol="0" anchor="ctr"/>
           <a:lstStyle/>
           <a:p>
-            <a:pPr algn="ctr" indent="0" marL="0">
+            <a:pPr marL="0" indent="0" algn="ctr">
               <a:buNone/>
             </a:pPr>
             <a:r>
@@ -7310,7 +6717,7 @@
           <a:bodyPr wrap="square" lIns="0" tIns="0" rIns="0" bIns="0" rtlCol="0" anchor="ctr"/>
           <a:lstStyle/>
           <a:p>
-            <a:pPr indent="0" marL="0">
+            <a:pPr marL="0" indent="0">
               <a:buNone/>
             </a:pPr>
             <a:r>
@@ -7349,7 +6756,7 @@
           <a:bodyPr wrap="square" lIns="0" tIns="0" rIns="0" bIns="0" rtlCol="0" anchor="t"/>
           <a:lstStyle/>
           <a:p>
-            <a:pPr algn="l" indent="0" marL="0">
+            <a:pPr marL="0" indent="0" algn="l">
               <a:lnSpc>
                 <a:spcPct val="108000"/>
               </a:lnSpc>
@@ -7445,7 +6852,7 @@
           <a:bodyPr wrap="square" lIns="0" tIns="0" rIns="0" bIns="0" rtlCol="0" anchor="ctr"/>
           <a:lstStyle/>
           <a:p>
-            <a:pPr algn="ctr" indent="0" marL="0">
+            <a:pPr marL="0" indent="0" algn="ctr">
               <a:buNone/>
             </a:pPr>
             <a:r>
@@ -7484,7 +6891,7 @@
           <a:bodyPr wrap="square" lIns="0" tIns="0" rIns="0" bIns="0" rtlCol="0" anchor="ctr"/>
           <a:lstStyle/>
           <a:p>
-            <a:pPr indent="0" marL="0">
+            <a:pPr marL="0" indent="0">
               <a:buNone/>
             </a:pPr>
             <a:r>
@@ -7523,7 +6930,7 @@
           <a:bodyPr wrap="square" lIns="0" tIns="0" rIns="0" bIns="0" rtlCol="0" anchor="t"/>
           <a:lstStyle/>
           <a:p>
-            <a:pPr algn="l" indent="0" marL="0">
+            <a:pPr marL="0" indent="0" algn="l">
               <a:lnSpc>
                 <a:spcPct val="108000"/>
               </a:lnSpc>
@@ -7619,7 +7026,7 @@
           <a:bodyPr wrap="square" lIns="0" tIns="0" rIns="0" bIns="0" rtlCol="0" anchor="ctr"/>
           <a:lstStyle/>
           <a:p>
-            <a:pPr algn="ctr" indent="0" marL="0">
+            <a:pPr marL="0" indent="0" algn="ctr">
               <a:buNone/>
             </a:pPr>
             <a:r>
@@ -7658,7 +7065,7 @@
           <a:bodyPr wrap="square" lIns="0" tIns="0" rIns="0" bIns="0" rtlCol="0" anchor="ctr"/>
           <a:lstStyle/>
           <a:p>
-            <a:pPr indent="0" marL="0">
+            <a:pPr marL="0" indent="0">
               <a:buNone/>
             </a:pPr>
             <a:r>
@@ -7697,7 +7104,7 @@
           <a:bodyPr wrap="square" lIns="0" tIns="0" rIns="0" bIns="0" rtlCol="0" anchor="t"/>
           <a:lstStyle/>
           <a:p>
-            <a:pPr algn="l" indent="0" marL="0">
+            <a:pPr marL="0" indent="0" algn="l">
               <a:lnSpc>
                 <a:spcPct val="108000"/>
               </a:lnSpc>
@@ -7793,7 +7200,7 @@
           <a:bodyPr wrap="square" lIns="0" tIns="0" rIns="0" bIns="0" rtlCol="0" anchor="ctr"/>
           <a:lstStyle/>
           <a:p>
-            <a:pPr algn="ctr" indent="0" marL="0">
+            <a:pPr marL="0" indent="0" algn="ctr">
               <a:buNone/>
             </a:pPr>
             <a:r>
@@ -7832,7 +7239,7 @@
           <a:bodyPr wrap="square" lIns="0" tIns="0" rIns="0" bIns="0" rtlCol="0" anchor="ctr"/>
           <a:lstStyle/>
           <a:p>
-            <a:pPr indent="0" marL="0">
+            <a:pPr marL="0" indent="0">
               <a:buNone/>
             </a:pPr>
             <a:r>
@@ -7871,7 +7278,7 @@
           <a:bodyPr wrap="square" lIns="0" tIns="0" rIns="0" bIns="0" rtlCol="0" anchor="t"/>
           <a:lstStyle/>
           <a:p>
-            <a:pPr algn="l" indent="0" marL="0">
+            <a:pPr marL="0" indent="0" algn="l">
               <a:lnSpc>
                 <a:spcPct val="108000"/>
               </a:lnSpc>
@@ -7913,7 +7320,7 @@
           <a:bodyPr wrap="square" lIns="0" tIns="0" rIns="0" bIns="0" rtlCol="0" anchor="ctr"/>
           <a:lstStyle/>
           <a:p>
-            <a:pPr indent="0" marL="0">
+            <a:pPr marL="0" indent="0">
               <a:buNone/>
             </a:pPr>
             <a:r>
@@ -7947,6 +7354,7 @@
         <a:solidFill>
           <a:srgbClr val="F5F7FB"/>
         </a:solidFill>
+        <a:effectLst/>
       </p:bgPr>
     </p:bg>
     <p:spTree>
@@ -8011,11 +7419,11 @@
           <a:bodyPr wrap="square" lIns="0" tIns="0" rIns="0" bIns="0" rtlCol="0" anchor="ctr"/>
           <a:lstStyle/>
           <a:p>
-            <a:pPr algn="ctr" indent="0" marL="0">
+            <a:pPr marL="0" indent="0" algn="ctr">
               <a:buNone/>
             </a:pPr>
             <a:r>
-              <a:rPr lang="en-US" sz="1150" b="1" spc="100" kern="0" dirty="0">
+              <a:rPr lang="en-US" sz="1150" b="1" kern="0" spc="100" dirty="0">
                 <a:solidFill>
                   <a:srgbClr val="FFFFFF"/>
                 </a:solidFill>
@@ -8050,7 +7458,7 @@
           <a:bodyPr wrap="square" lIns="0" tIns="0" rIns="0" bIns="0" rtlCol="0" anchor="ctr"/>
           <a:lstStyle/>
           <a:p>
-            <a:pPr indent="0" marL="0">
+            <a:pPr marL="0" indent="0">
               <a:buNone/>
             </a:pPr>
             <a:r>
@@ -8089,7 +7497,7 @@
           <a:bodyPr wrap="square" lIns="0" tIns="0" rIns="0" bIns="0" rtlCol="0" anchor="ctr"/>
           <a:lstStyle/>
           <a:p>
-            <a:pPr indent="0" marL="0">
+            <a:pPr marL="0" indent="0">
               <a:buNone/>
             </a:pPr>
             <a:r>
@@ -8141,9 +7549,9 @@
           <p:nvPr/>
         </p:nvSpPr>
         <p:spPr>
-          <a:xfrm>
-            <a:off x="804672" y="2231136"/>
-            <a:ext cx="118872" cy="118872"/>
+          <a:xfrm flipV="1">
+            <a:off x="850392" y="2112264"/>
+            <a:ext cx="73152" cy="118872"/>
           </a:xfrm>
           <a:prstGeom prst="roundRect">
             <a:avLst>
@@ -8169,7 +7577,7 @@
         </p:nvSpPr>
         <p:spPr>
           <a:xfrm>
-            <a:off x="1042416" y="2130552"/>
+            <a:off x="1042416" y="2039112"/>
             <a:ext cx="6163056" cy="292608"/>
           </a:xfrm>
           <a:prstGeom prst="rect">
@@ -8182,7 +7590,7 @@
           <a:bodyPr wrap="square" lIns="0" tIns="0" rIns="0" bIns="0" rtlCol="0" anchor="ctr"/>
           <a:lstStyle/>
           <a:p>
-            <a:pPr indent="0" marL="0">
+            <a:pPr marL="0" indent="0">
               <a:buNone/>
             </a:pPr>
             <a:r>
@@ -8208,8 +7616,8 @@
         </p:nvSpPr>
         <p:spPr>
           <a:xfrm>
-            <a:off x="804672" y="2514600"/>
-            <a:ext cx="6355080" cy="1737360"/>
+            <a:off x="789432" y="2322576"/>
+            <a:ext cx="6355080" cy="1325880"/>
           </a:xfrm>
           <a:prstGeom prst="rect">
             <a:avLst/>
@@ -8221,7 +7629,7 @@
           <a:bodyPr wrap="square" lIns="0" tIns="0" rIns="0" bIns="0" rtlCol="0" anchor="t"/>
           <a:lstStyle/>
           <a:p>
-            <a:pPr algn="l" indent="0" marL="0">
+            <a:pPr marL="0" indent="0" algn="l">
               <a:lnSpc>
                 <a:spcPct val="108000"/>
               </a:lnSpc>
@@ -8241,7 +7649,7 @@
             <a:endParaRPr lang="en-US" sz="1150" dirty="0"/>
           </a:p>
           <a:p>
-            <a:pPr algn="l" indent="0" marL="0">
+            <a:pPr marL="0" indent="0" algn="l">
               <a:lnSpc>
                 <a:spcPct val="108000"/>
               </a:lnSpc>
@@ -8250,7 +7658,7 @@
             <a:endParaRPr lang="en-US" sz="1150" dirty="0"/>
           </a:p>
           <a:p>
-            <a:pPr algn="l" indent="0" marL="0">
+            <a:pPr marL="0" indent="0" algn="l">
               <a:lnSpc>
                 <a:spcPct val="108000"/>
               </a:lnSpc>
@@ -8270,7 +7678,7 @@
             <a:endParaRPr lang="en-US" sz="1150" dirty="0"/>
           </a:p>
           <a:p>
-            <a:pPr algn="l" indent="0" marL="0">
+            <a:pPr marL="0" indent="0" algn="l">
               <a:lnSpc>
                 <a:spcPct val="108000"/>
               </a:lnSpc>
@@ -8279,7 +7687,7 @@
             <a:endParaRPr lang="en-US" sz="1150" dirty="0"/>
           </a:p>
           <a:p>
-            <a:pPr algn="l" indent="0" marL="0">
+            <a:pPr marL="0" indent="0" algn="l">
               <a:lnSpc>
                 <a:spcPct val="108000"/>
               </a:lnSpc>
@@ -8375,7 +7783,7 @@
           <a:bodyPr wrap="square" lIns="0" tIns="0" rIns="0" bIns="0" rtlCol="0" anchor="ctr"/>
           <a:lstStyle/>
           <a:p>
-            <a:pPr indent="0" marL="0">
+            <a:pPr marL="0" indent="0">
               <a:buNone/>
             </a:pPr>
             <a:r>
@@ -8414,7 +7822,7 @@
           <a:bodyPr wrap="square" lIns="0" tIns="0" rIns="0" bIns="0" rtlCol="0" anchor="t"/>
           <a:lstStyle/>
           <a:p>
-            <a:pPr algn="l" indent="0" marL="0">
+            <a:pPr marL="0" indent="0" algn="l">
               <a:lnSpc>
                 <a:spcPct val="104000"/>
               </a:lnSpc>
@@ -8510,7 +7918,7 @@
           <a:bodyPr wrap="square" lIns="0" tIns="0" rIns="0" bIns="0" rtlCol="0" anchor="ctr"/>
           <a:lstStyle/>
           <a:p>
-            <a:pPr indent="0" marL="0">
+            <a:pPr marL="0" indent="0">
               <a:buNone/>
             </a:pPr>
             <a:r>
@@ -8549,7 +7957,7 @@
           <a:bodyPr wrap="square" lIns="0" tIns="0" rIns="0" bIns="0" rtlCol="0" anchor="t"/>
           <a:lstStyle/>
           <a:p>
-            <a:pPr algn="l" indent="0" marL="0">
+            <a:pPr marL="0" indent="0" algn="l">
               <a:lnSpc>
                 <a:spcPct val="104000"/>
               </a:lnSpc>
@@ -8645,7 +8053,7 @@
           <a:bodyPr wrap="square" lIns="0" tIns="0" rIns="0" bIns="0" rtlCol="0" anchor="ctr"/>
           <a:lstStyle/>
           <a:p>
-            <a:pPr indent="0" marL="0">
+            <a:pPr marL="0" indent="0">
               <a:buNone/>
             </a:pPr>
             <a:r>
@@ -8684,7 +8092,7 @@
           <a:bodyPr wrap="square" lIns="0" tIns="0" rIns="0" bIns="0" rtlCol="0" anchor="t"/>
           <a:lstStyle/>
           <a:p>
-            <a:pPr algn="l" indent="0" marL="0">
+            <a:pPr marL="0" indent="0" algn="l">
               <a:lnSpc>
                 <a:spcPct val="108000"/>
               </a:lnSpc>
@@ -8704,7 +8112,7 @@
             <a:endParaRPr lang="en-US" sz="1200" dirty="0"/>
           </a:p>
           <a:p>
-            <a:pPr algn="l" indent="0" marL="0">
+            <a:pPr marL="0" indent="0" algn="l">
               <a:lnSpc>
                 <a:spcPct val="108000"/>
               </a:lnSpc>
@@ -8713,7 +8121,7 @@
             <a:endParaRPr lang="en-US" sz="1200" dirty="0"/>
           </a:p>
           <a:p>
-            <a:pPr algn="l" indent="0" marL="0">
+            <a:pPr marL="0" indent="0" algn="l">
               <a:lnSpc>
                 <a:spcPct val="108000"/>
               </a:lnSpc>
@@ -8755,7 +8163,7 @@
           <a:bodyPr wrap="square" lIns="0" tIns="0" rIns="0" bIns="0" rtlCol="0" anchor="ctr"/>
           <a:lstStyle/>
           <a:p>
-            <a:pPr indent="0" marL="0">
+            <a:pPr marL="0" indent="0">
               <a:buNone/>
             </a:pPr>
             <a:r>
@@ -8789,6 +8197,7 @@
         <a:solidFill>
           <a:srgbClr val="F5F7FB"/>
         </a:solidFill>
+        <a:effectLst/>
       </p:bgPr>
     </p:bg>
     <p:spTree>
@@ -8853,11 +8262,11 @@
           <a:bodyPr wrap="square" lIns="0" tIns="0" rIns="0" bIns="0" rtlCol="0" anchor="ctr"/>
           <a:lstStyle/>
           <a:p>
-            <a:pPr algn="ctr" indent="0" marL="0">
+            <a:pPr marL="0" indent="0" algn="ctr">
               <a:buNone/>
             </a:pPr>
             <a:r>
-              <a:rPr lang="en-US" sz="1150" b="1" spc="100" kern="0" dirty="0">
+              <a:rPr lang="en-US" sz="1150" b="1" kern="0" spc="100" dirty="0">
                 <a:solidFill>
                   <a:srgbClr val="FFFFFF"/>
                 </a:solidFill>
@@ -8892,7 +8301,7 @@
           <a:bodyPr wrap="square" lIns="0" tIns="0" rIns="0" bIns="0" rtlCol="0" anchor="ctr"/>
           <a:lstStyle/>
           <a:p>
-            <a:pPr indent="0" marL="0">
+            <a:pPr marL="0" indent="0">
               <a:buNone/>
             </a:pPr>
             <a:r>
@@ -8931,7 +8340,7 @@
           <a:bodyPr wrap="square" lIns="0" tIns="0" rIns="0" bIns="0" rtlCol="0" anchor="ctr"/>
           <a:lstStyle/>
           <a:p>
-            <a:pPr indent="0" marL="0">
+            <a:pPr marL="0" indent="0">
               <a:buNone/>
             </a:pPr>
             <a:r>
@@ -8965,16 +8374,34 @@
         </p:nvGraphicFramePr>
         <p:xfrm>
           <a:off x="548640" y="1965960"/>
-          <a:ext cx="11091672" cy="914400"/>
+          <a:ext cx="11091672" cy="1975104"/>
         </p:xfrm>
         <a:graphic>
           <a:graphicData uri="http://schemas.openxmlformats.org/drawingml/2006/table">
             <a:tbl>
               <a:tblPr/>
               <a:tblGrid>
-                <a:gridCol w="2377440"/>
-                <a:gridCol w="4352544"/>
-                <a:gridCol w="4361688"/>
+                <a:gridCol w="2377440">
+                  <a:extLst>
+                    <a:ext uri="{9D8B030D-6E8A-4147-A177-3AD203B41FA5}">
+                      <a16:colId xmlns:a16="http://schemas.microsoft.com/office/drawing/2014/main" val="20000"/>
+                    </a:ext>
+                  </a:extLst>
+                </a:gridCol>
+                <a:gridCol w="4352544">
+                  <a:extLst>
+                    <a:ext uri="{9D8B030D-6E8A-4147-A177-3AD203B41FA5}">
+                      <a16:colId xmlns:a16="http://schemas.microsoft.com/office/drawing/2014/main" val="20001"/>
+                    </a:ext>
+                  </a:extLst>
+                </a:gridCol>
+                <a:gridCol w="4361688">
+                  <a:extLst>
+                    <a:ext uri="{9D8B030D-6E8A-4147-A177-3AD203B41FA5}">
+                      <a16:colId xmlns:a16="http://schemas.microsoft.com/office/drawing/2014/main" val="20002"/>
+                    </a:ext>
+                  </a:extLst>
+                </a:gridCol>
               </a:tblGrid>
               <a:tr h="658368">
                 <a:tc>
@@ -8982,7 +8409,7 @@
                     <a:bodyPr/>
                     <a:lstStyle/>
                     <a:p>
-                      <a:pPr indent="0" marL="0">
+                      <a:pPr marL="0" indent="0">
                         <a:buNone/>
                       </a:pPr>
                       <a:endParaRPr lang="en-US" sz="1150" dirty="0">
@@ -9039,7 +8466,7 @@
                     <a:bodyPr/>
                     <a:lstStyle/>
                     <a:p>
-                      <a:pPr indent="0" marL="0">
+                      <a:pPr marL="0" indent="0">
                         <a:buNone/>
                       </a:pPr>
                       <a:r>
@@ -9107,7 +8534,7 @@
                     <a:bodyPr/>
                     <a:lstStyle/>
                     <a:p>
-                      <a:pPr indent="0" marL="0">
+                      <a:pPr marL="0" indent="0">
                         <a:buNone/>
                       </a:pPr>
                       <a:r>
@@ -9170,6 +8597,11 @@
                     </a:solidFill>
                   </a:tcPr>
                 </a:tc>
+                <a:extLst>
+                  <a:ext uri="{0D108BD9-81ED-4DB2-BD59-A6C34878D82A}">
+                    <a16:rowId xmlns:a16="http://schemas.microsoft.com/office/drawing/2014/main" val="10000"/>
+                  </a:ext>
+                </a:extLst>
               </a:tr>
               <a:tr h="658368">
                 <a:tc>
@@ -9177,7 +8609,7 @@
                     <a:bodyPr/>
                     <a:lstStyle/>
                     <a:p>
-                      <a:pPr indent="0" marL="0">
+                      <a:pPr marL="0" indent="0">
                         <a:buNone/>
                       </a:pPr>
                       <a:r>
@@ -9245,7 +8677,7 @@
                     <a:bodyPr/>
                     <a:lstStyle/>
                     <a:p>
-                      <a:pPr indent="0" marL="0">
+                      <a:pPr marL="0" indent="0">
                         <a:buNone/>
                       </a:pPr>
                       <a:r>
@@ -9266,7 +8698,7 @@
                       </a:endParaRPr>
                     </a:p>
                     <a:p>
-                      <a:pPr indent="0" marL="0">
+                      <a:pPr marL="0" indent="0">
                         <a:buNone/>
                       </a:pPr>
                       <a:r>
@@ -9334,7 +8766,7 @@
                     <a:bodyPr/>
                     <a:lstStyle/>
                     <a:p>
-                      <a:pPr indent="0" marL="0">
+                      <a:pPr marL="0" indent="0">
                         <a:buNone/>
                       </a:pPr>
                       <a:r>
@@ -9355,7 +8787,7 @@
                       </a:endParaRPr>
                     </a:p>
                     <a:p>
-                      <a:pPr indent="0" marL="0">
+                      <a:pPr marL="0" indent="0">
                         <a:buNone/>
                       </a:pPr>
                       <a:r>
@@ -9418,6 +8850,11 @@
                     </a:solidFill>
                   </a:tcPr>
                 </a:tc>
+                <a:extLst>
+                  <a:ext uri="{0D108BD9-81ED-4DB2-BD59-A6C34878D82A}">
+                    <a16:rowId xmlns:a16="http://schemas.microsoft.com/office/drawing/2014/main" val="10001"/>
+                  </a:ext>
+                </a:extLst>
               </a:tr>
               <a:tr h="658368">
                 <a:tc>
@@ -9425,7 +8862,7 @@
                     <a:bodyPr/>
                     <a:lstStyle/>
                     <a:p>
-                      <a:pPr indent="0" marL="0">
+                      <a:pPr marL="0" indent="0">
                         <a:buNone/>
                       </a:pPr>
                       <a:r>
@@ -9493,7 +8930,7 @@
                     <a:bodyPr/>
                     <a:lstStyle/>
                     <a:p>
-                      <a:pPr indent="0" marL="0">
+                      <a:pPr marL="0" indent="0">
                         <a:buNone/>
                       </a:pPr>
                       <a:r>
@@ -9561,7 +8998,7 @@
                     <a:bodyPr/>
                     <a:lstStyle/>
                     <a:p>
-                      <a:pPr indent="0" marL="0">
+                      <a:pPr marL="0" indent="0">
                         <a:buNone/>
                       </a:pPr>
                       <a:r>
@@ -9582,7 +9019,7 @@
                       </a:endParaRPr>
                     </a:p>
                     <a:p>
-                      <a:pPr indent="0" marL="0">
+                      <a:pPr marL="0" indent="0">
                         <a:buNone/>
                       </a:pPr>
                       <a:r>
@@ -9645,6 +9082,11 @@
                     </a:solidFill>
                   </a:tcPr>
                 </a:tc>
+                <a:extLst>
+                  <a:ext uri="{0D108BD9-81ED-4DB2-BD59-A6C34878D82A}">
+                    <a16:rowId xmlns:a16="http://schemas.microsoft.com/office/drawing/2014/main" val="10002"/>
+                  </a:ext>
+                </a:extLst>
               </a:tr>
             </a:tbl>
           </a:graphicData>
@@ -9725,7 +9167,7 @@
           <a:bodyPr wrap="square" lIns="0" tIns="0" rIns="0" bIns="0" rtlCol="0" anchor="ctr"/>
           <a:lstStyle/>
           <a:p>
-            <a:pPr indent="0" marL="0">
+            <a:pPr marL="0" indent="0">
               <a:buNone/>
             </a:pPr>
             <a:r>
@@ -9764,7 +9206,7 @@
           <a:bodyPr wrap="square" lIns="0" tIns="0" rIns="0" bIns="0" rtlCol="0" anchor="t"/>
           <a:lstStyle/>
           <a:p>
-            <a:pPr algn="l" indent="0" marL="0">
+            <a:pPr marL="0" indent="0" algn="l">
               <a:lnSpc>
                 <a:spcPct val="106000"/>
               </a:lnSpc>
@@ -9841,7 +9283,7 @@
       </p:sp>
       <p:sp>
         <p:nvSpPr>
-          <p:cNvPr id="13" name="Text 10"/>
+          <p:cNvPr id="6" name="Text 10"/>
           <p:cNvSpPr/>
           <p:nvPr/>
         </p:nvSpPr>
@@ -9860,7 +9302,7 @@
           <a:bodyPr wrap="square" lIns="0" tIns="0" rIns="0" bIns="0" rtlCol="0" anchor="ctr"/>
           <a:lstStyle/>
           <a:p>
-            <a:pPr indent="0" marL="0">
+            <a:pPr marL="0" indent="0">
               <a:buNone/>
             </a:pPr>
             <a:r>
@@ -9899,7 +9341,7 @@
           <a:bodyPr wrap="square" lIns="0" tIns="0" rIns="0" bIns="0" rtlCol="0" anchor="t"/>
           <a:lstStyle/>
           <a:p>
-            <a:pPr algn="l" indent="0" marL="0">
+            <a:pPr marL="0" indent="0" algn="l">
               <a:lnSpc>
                 <a:spcPct val="106000"/>
               </a:lnSpc>
@@ -9995,7 +9437,7 @@
           <a:bodyPr wrap="square" lIns="0" tIns="0" rIns="0" bIns="0" rtlCol="0" anchor="ctr"/>
           <a:lstStyle/>
           <a:p>
-            <a:pPr indent="0" marL="0">
+            <a:pPr marL="0" indent="0">
               <a:buNone/>
             </a:pPr>
             <a:r>
@@ -10034,7 +9476,7 @@
           <a:bodyPr wrap="square" lIns="0" tIns="0" rIns="0" bIns="0" rtlCol="0" anchor="t"/>
           <a:lstStyle/>
           <a:p>
-            <a:pPr algn="l" indent="0" marL="0">
+            <a:pPr marL="0" indent="0" algn="l">
               <a:lnSpc>
                 <a:spcPct val="104000"/>
               </a:lnSpc>
@@ -10071,6 +9513,7 @@
         <a:solidFill>
           <a:srgbClr val="F5F7FB"/>
         </a:solidFill>
+        <a:effectLst/>
       </p:bgPr>
     </p:bg>
     <p:spTree>
@@ -10135,11 +9578,11 @@
           <a:bodyPr wrap="square" lIns="0" tIns="0" rIns="0" bIns="0" rtlCol="0" anchor="ctr"/>
           <a:lstStyle/>
           <a:p>
-            <a:pPr algn="ctr" indent="0" marL="0">
+            <a:pPr marL="0" indent="0" algn="ctr">
               <a:buNone/>
             </a:pPr>
             <a:r>
-              <a:rPr lang="en-US" sz="1150" b="1" spc="100" kern="0" dirty="0">
+              <a:rPr lang="en-US" sz="1150" b="1" kern="0" spc="100" dirty="0">
                 <a:solidFill>
                   <a:srgbClr val="FFFFFF"/>
                 </a:solidFill>
@@ -10174,7 +9617,7 @@
           <a:bodyPr wrap="square" lIns="0" tIns="0" rIns="0" bIns="0" rtlCol="0" anchor="ctr"/>
           <a:lstStyle/>
           <a:p>
-            <a:pPr indent="0" marL="0">
+            <a:pPr marL="0" indent="0">
               <a:buNone/>
             </a:pPr>
             <a:r>
@@ -10213,7 +9656,7 @@
           <a:bodyPr wrap="square" lIns="0" tIns="0" rIns="0" bIns="0" rtlCol="0" anchor="ctr"/>
           <a:lstStyle/>
           <a:p>
-            <a:pPr indent="0" marL="0">
+            <a:pPr marL="0" indent="0">
               <a:buNone/>
             </a:pPr>
             <a:r>
@@ -10233,7 +9676,7 @@
       </p:sp>
       <p:graphicFrame>
         <p:nvGraphicFramePr>
-          <p:cNvPr id="6" name="Chart 0" descr=""/>
+          <p:cNvPr id="6" name="Chart 0"/>
           <p:cNvGraphicFramePr/>
           <p:nvPr/>
         </p:nvGraphicFramePr>
@@ -10241,9 +9684,9 @@
           <a:off x="548640" y="1965960"/>
           <a:ext cx="6858000" cy="3200400"/>
         </p:xfrm>
-        <a:graphic xmlns:a="http://schemas.openxmlformats.org/drawingml/2006/main">
+        <a:graphic>
           <a:graphicData uri="http://schemas.openxmlformats.org/drawingml/2006/chart">
-            <c:chart xmlns:c="http://schemas.openxmlformats.org/drawingml/2006/chart" r:id="rId1"/>
+            <c:chart xmlns:c="http://schemas.openxmlformats.org/drawingml/2006/chart" xmlns:r="http://schemas.openxmlformats.org/officeDocument/2006/relationships" r:id="rId3"/>
           </a:graphicData>
         </a:graphic>
       </p:graphicFrame>
@@ -10322,7 +9765,7 @@
           <a:bodyPr wrap="square" lIns="0" tIns="0" rIns="0" bIns="0" rtlCol="0" anchor="ctr"/>
           <a:lstStyle/>
           <a:p>
-            <a:pPr indent="0" marL="0">
+            <a:pPr marL="0" indent="0">
               <a:buNone/>
             </a:pPr>
             <a:r>
@@ -10361,7 +9804,7 @@
           <a:bodyPr wrap="square" lIns="0" tIns="0" rIns="0" bIns="0" rtlCol="0" anchor="t"/>
           <a:lstStyle/>
           <a:p>
-            <a:pPr algn="l" indent="0" marL="0">
+            <a:pPr marL="0" indent="0" algn="l">
               <a:lnSpc>
                 <a:spcPct val="106000"/>
               </a:lnSpc>
@@ -10398,16 +9841,34 @@
         </p:nvGraphicFramePr>
         <p:xfrm>
           <a:off x="7635240" y="3310128"/>
-          <a:ext cx="4005072" cy="914400"/>
+          <a:ext cx="4005072" cy="1389888"/>
         </p:xfrm>
         <a:graphic>
           <a:graphicData uri="http://schemas.openxmlformats.org/drawingml/2006/table">
             <a:tbl>
               <a:tblPr/>
               <a:tblGrid>
-                <a:gridCol w="1536192"/>
-                <a:gridCol w="960120"/>
-                <a:gridCol w="1508760"/>
+                <a:gridCol w="1536192">
+                  <a:extLst>
+                    <a:ext uri="{9D8B030D-6E8A-4147-A177-3AD203B41FA5}">
+                      <a16:colId xmlns:a16="http://schemas.microsoft.com/office/drawing/2014/main" val="20000"/>
+                    </a:ext>
+                  </a:extLst>
+                </a:gridCol>
+                <a:gridCol w="960120">
+                  <a:extLst>
+                    <a:ext uri="{9D8B030D-6E8A-4147-A177-3AD203B41FA5}">
+                      <a16:colId xmlns:a16="http://schemas.microsoft.com/office/drawing/2014/main" val="20001"/>
+                    </a:ext>
+                  </a:extLst>
+                </a:gridCol>
+                <a:gridCol w="1508760">
+                  <a:extLst>
+                    <a:ext uri="{9D8B030D-6E8A-4147-A177-3AD203B41FA5}">
+                      <a16:colId xmlns:a16="http://schemas.microsoft.com/office/drawing/2014/main" val="20002"/>
+                    </a:ext>
+                  </a:extLst>
+                </a:gridCol>
               </a:tblGrid>
               <a:tr h="347472">
                 <a:tc>
@@ -10415,7 +9876,7 @@
                     <a:bodyPr/>
                     <a:lstStyle/>
                     <a:p>
-                      <a:pPr indent="0" marL="0">
+                      <a:pPr marL="0" indent="0">
                         <a:buNone/>
                       </a:pPr>
                       <a:r>
@@ -10483,7 +9944,7 @@
                     <a:bodyPr/>
                     <a:lstStyle/>
                     <a:p>
-                      <a:pPr indent="0" marL="0">
+                      <a:pPr marL="0" indent="0">
                         <a:buNone/>
                       </a:pPr>
                       <a:r>
@@ -10551,7 +10012,7 @@
                     <a:bodyPr/>
                     <a:lstStyle/>
                     <a:p>
-                      <a:pPr indent="0" marL="0">
+                      <a:pPr marL="0" indent="0">
                         <a:buNone/>
                       </a:pPr>
                       <a:r>
@@ -10614,6 +10075,11 @@
                     </a:solidFill>
                   </a:tcPr>
                 </a:tc>
+                <a:extLst>
+                  <a:ext uri="{0D108BD9-81ED-4DB2-BD59-A6C34878D82A}">
+                    <a16:rowId xmlns:a16="http://schemas.microsoft.com/office/drawing/2014/main" val="10000"/>
+                  </a:ext>
+                </a:extLst>
               </a:tr>
               <a:tr h="347472">
                 <a:tc>
@@ -10621,7 +10087,7 @@
                     <a:bodyPr/>
                     <a:lstStyle/>
                     <a:p>
-                      <a:pPr indent="0" marL="0">
+                      <a:pPr marL="0" indent="0">
                         <a:buNone/>
                       </a:pPr>
                       <a:r>
@@ -10689,7 +10155,7 @@
                     <a:bodyPr/>
                     <a:lstStyle/>
                     <a:p>
-                      <a:pPr algn="ctr" indent="0" marL="0">
+                      <a:pPr marL="0" indent="0" algn="ctr">
                         <a:buNone/>
                       </a:pPr>
                       <a:r>
@@ -10757,7 +10223,7 @@
                     <a:bodyPr/>
                     <a:lstStyle/>
                     <a:p>
-                      <a:pPr algn="ctr" indent="0" marL="0">
+                      <a:pPr marL="0" indent="0" algn="ctr">
                         <a:buNone/>
                       </a:pPr>
                       <a:r>
@@ -10820,6 +10286,11 @@
                     </a:solidFill>
                   </a:tcPr>
                 </a:tc>
+                <a:extLst>
+                  <a:ext uri="{0D108BD9-81ED-4DB2-BD59-A6C34878D82A}">
+                    <a16:rowId xmlns:a16="http://schemas.microsoft.com/office/drawing/2014/main" val="10001"/>
+                  </a:ext>
+                </a:extLst>
               </a:tr>
               <a:tr h="347472">
                 <a:tc>
@@ -10827,7 +10298,7 @@
                     <a:bodyPr/>
                     <a:lstStyle/>
                     <a:p>
-                      <a:pPr indent="0" marL="0">
+                      <a:pPr marL="0" indent="0">
                         <a:buNone/>
                       </a:pPr>
                       <a:r>
@@ -10895,7 +10366,7 @@
                     <a:bodyPr/>
                     <a:lstStyle/>
                     <a:p>
-                      <a:pPr algn="ctr" indent="0" marL="0">
+                      <a:pPr marL="0" indent="0" algn="ctr">
                         <a:buNone/>
                       </a:pPr>
                       <a:r>
@@ -10963,7 +10434,7 @@
                     <a:bodyPr/>
                     <a:lstStyle/>
                     <a:p>
-                      <a:pPr algn="ctr" indent="0" marL="0">
+                      <a:pPr marL="0" indent="0" algn="ctr">
                         <a:buNone/>
                       </a:pPr>
                       <a:r>
@@ -11026,6 +10497,11 @@
                     </a:solidFill>
                   </a:tcPr>
                 </a:tc>
+                <a:extLst>
+                  <a:ext uri="{0D108BD9-81ED-4DB2-BD59-A6C34878D82A}">
+                    <a16:rowId xmlns:a16="http://schemas.microsoft.com/office/drawing/2014/main" val="10002"/>
+                  </a:ext>
+                </a:extLst>
               </a:tr>
               <a:tr h="347472">
                 <a:tc>
@@ -11033,7 +10509,7 @@
                     <a:bodyPr/>
                     <a:lstStyle/>
                     <a:p>
-                      <a:pPr indent="0" marL="0">
+                      <a:pPr marL="0" indent="0">
                         <a:buNone/>
                       </a:pPr>
                       <a:r>
@@ -11101,7 +10577,7 @@
                     <a:bodyPr/>
                     <a:lstStyle/>
                     <a:p>
-                      <a:pPr algn="ctr" indent="0" marL="0">
+                      <a:pPr marL="0" indent="0" algn="ctr">
                         <a:buNone/>
                       </a:pPr>
                       <a:r>
@@ -11169,7 +10645,7 @@
                     <a:bodyPr/>
                     <a:lstStyle/>
                     <a:p>
-                      <a:pPr algn="ctr" indent="0" marL="0">
+                      <a:pPr marL="0" indent="0" algn="ctr">
                         <a:buNone/>
                       </a:pPr>
                       <a:r>
@@ -11232,6 +10708,11 @@
                     </a:solidFill>
                   </a:tcPr>
                 </a:tc>
+                <a:extLst>
+                  <a:ext uri="{0D108BD9-81ED-4DB2-BD59-A6C34878D82A}">
+                    <a16:rowId xmlns:a16="http://schemas.microsoft.com/office/drawing/2014/main" val="10003"/>
+                  </a:ext>
+                </a:extLst>
               </a:tr>
             </a:tbl>
           </a:graphicData>
@@ -11293,7 +10774,7 @@
       </p:sp>
       <p:sp>
         <p:nvSpPr>
-          <p:cNvPr id="14" name="Text 10"/>
+          <p:cNvPr id="11" name="Text 10"/>
           <p:cNvSpPr/>
           <p:nvPr/>
         </p:nvSpPr>
@@ -11312,7 +10793,7 @@
           <a:bodyPr wrap="square" lIns="0" tIns="0" rIns="0" bIns="0" rtlCol="0" anchor="ctr"/>
           <a:lstStyle/>
           <a:p>
-            <a:pPr indent="0" marL="0">
+            <a:pPr marL="0" indent="0">
               <a:buNone/>
             </a:pPr>
             <a:r>
@@ -11351,7 +10832,7 @@
           <a:bodyPr wrap="square" lIns="0" tIns="0" rIns="0" bIns="0" rtlCol="0" anchor="t"/>
           <a:lstStyle/>
           <a:p>
-            <a:pPr algn="l" indent="0" marL="0">
+            <a:pPr marL="0" indent="0" algn="l">
               <a:lnSpc>
                 <a:spcPct val="106000"/>
               </a:lnSpc>
@@ -11420,7 +10901,7 @@
           <a:bodyPr wrap="square" lIns="0" tIns="0" rIns="0" bIns="0" rtlCol="0" anchor="ctr"/>
           <a:lstStyle/>
           <a:p>
-            <a:pPr algn="l" indent="0" marL="0">
+            <a:pPr marL="0" indent="0" algn="l">
               <a:lnSpc>
                 <a:spcPct val="106000"/>
               </a:lnSpc>
@@ -11462,7 +10943,7 @@
           <a:bodyPr wrap="square" lIns="0" tIns="0" rIns="0" bIns="0" rtlCol="0" anchor="ctr"/>
           <a:lstStyle/>
           <a:p>
-            <a:pPr indent="0" marL="0">
+            <a:pPr marL="0" indent="0">
               <a:buNone/>
             </a:pPr>
             <a:r>
@@ -11496,6 +10977,7 @@
         <a:solidFill>
           <a:srgbClr val="F5F7FB"/>
         </a:solidFill>
+        <a:effectLst/>
       </p:bgPr>
     </p:bg>
     <p:spTree>
@@ -11560,11 +11042,11 @@
           <a:bodyPr wrap="square" lIns="0" tIns="0" rIns="0" bIns="0" rtlCol="0" anchor="ctr"/>
           <a:lstStyle/>
           <a:p>
-            <a:pPr algn="ctr" indent="0" marL="0">
+            <a:pPr marL="0" indent="0" algn="ctr">
               <a:buNone/>
             </a:pPr>
             <a:r>
-              <a:rPr lang="en-US" sz="1150" b="1" spc="100" kern="0" dirty="0">
+              <a:rPr lang="en-US" sz="1150" b="1" kern="0" spc="100" dirty="0">
                 <a:solidFill>
                   <a:srgbClr val="FFFFFF"/>
                 </a:solidFill>
@@ -11599,7 +11081,7 @@
           <a:bodyPr wrap="square" lIns="0" tIns="0" rIns="0" bIns="0" rtlCol="0" anchor="ctr"/>
           <a:lstStyle/>
           <a:p>
-            <a:pPr indent="0" marL="0">
+            <a:pPr marL="0" indent="0">
               <a:buNone/>
             </a:pPr>
             <a:r>
@@ -11638,7 +11120,7 @@
           <a:bodyPr wrap="square" lIns="0" tIns="0" rIns="0" bIns="0" rtlCol="0" anchor="ctr"/>
           <a:lstStyle/>
           <a:p>
-            <a:pPr indent="0" marL="0">
+            <a:pPr marL="0" indent="0">
               <a:buNone/>
             </a:pPr>
             <a:r>
@@ -11672,19 +11154,55 @@
         </p:nvGraphicFramePr>
         <p:xfrm>
           <a:off x="548640" y="1965960"/>
-          <a:ext cx="11091672" cy="914400"/>
+          <a:ext cx="11091672" cy="2560320"/>
         </p:xfrm>
         <a:graphic>
           <a:graphicData uri="http://schemas.openxmlformats.org/drawingml/2006/table">
             <a:tbl>
               <a:tblPr/>
               <a:tblGrid>
-                <a:gridCol w="1188720"/>
-                <a:gridCol w="1280160"/>
-                <a:gridCol w="1371600"/>
-                <a:gridCol w="1737360"/>
-                <a:gridCol w="1828800"/>
-                <a:gridCol w="3685032"/>
+                <a:gridCol w="1188720">
+                  <a:extLst>
+                    <a:ext uri="{9D8B030D-6E8A-4147-A177-3AD203B41FA5}">
+                      <a16:colId xmlns:a16="http://schemas.microsoft.com/office/drawing/2014/main" val="20000"/>
+                    </a:ext>
+                  </a:extLst>
+                </a:gridCol>
+                <a:gridCol w="1280160">
+                  <a:extLst>
+                    <a:ext uri="{9D8B030D-6E8A-4147-A177-3AD203B41FA5}">
+                      <a16:colId xmlns:a16="http://schemas.microsoft.com/office/drawing/2014/main" val="20001"/>
+                    </a:ext>
+                  </a:extLst>
+                </a:gridCol>
+                <a:gridCol w="1371600">
+                  <a:extLst>
+                    <a:ext uri="{9D8B030D-6E8A-4147-A177-3AD203B41FA5}">
+                      <a16:colId xmlns:a16="http://schemas.microsoft.com/office/drawing/2014/main" val="20002"/>
+                    </a:ext>
+                  </a:extLst>
+                </a:gridCol>
+                <a:gridCol w="1737360">
+                  <a:extLst>
+                    <a:ext uri="{9D8B030D-6E8A-4147-A177-3AD203B41FA5}">
+                      <a16:colId xmlns:a16="http://schemas.microsoft.com/office/drawing/2014/main" val="20003"/>
+                    </a:ext>
+                  </a:extLst>
+                </a:gridCol>
+                <a:gridCol w="1828800">
+                  <a:extLst>
+                    <a:ext uri="{9D8B030D-6E8A-4147-A177-3AD203B41FA5}">
+                      <a16:colId xmlns:a16="http://schemas.microsoft.com/office/drawing/2014/main" val="20004"/>
+                    </a:ext>
+                  </a:extLst>
+                </a:gridCol>
+                <a:gridCol w="3685032">
+                  <a:extLst>
+                    <a:ext uri="{9D8B030D-6E8A-4147-A177-3AD203B41FA5}">
+                      <a16:colId xmlns:a16="http://schemas.microsoft.com/office/drawing/2014/main" val="20005"/>
+                    </a:ext>
+                  </a:extLst>
+                </a:gridCol>
               </a:tblGrid>
               <a:tr h="365760">
                 <a:tc>
@@ -11692,7 +11210,7 @@
                     <a:bodyPr/>
                     <a:lstStyle/>
                     <a:p>
-                      <a:pPr indent="0" marL="0">
+                      <a:pPr marL="0" indent="0">
                         <a:buNone/>
                       </a:pPr>
                       <a:r>
@@ -11760,7 +11278,7 @@
                     <a:bodyPr/>
                     <a:lstStyle/>
                     <a:p>
-                      <a:pPr indent="0" marL="0">
+                      <a:pPr marL="0" indent="0">
                         <a:buNone/>
                       </a:pPr>
                       <a:r>
@@ -11828,7 +11346,7 @@
                     <a:bodyPr/>
                     <a:lstStyle/>
                     <a:p>
-                      <a:pPr indent="0" marL="0">
+                      <a:pPr marL="0" indent="0">
                         <a:buNone/>
                       </a:pPr>
                       <a:r>
@@ -11896,7 +11414,7 @@
                     <a:bodyPr/>
                     <a:lstStyle/>
                     <a:p>
-                      <a:pPr indent="0" marL="0">
+                      <a:pPr marL="0" indent="0">
                         <a:buNone/>
                       </a:pPr>
                       <a:r>
@@ -11964,7 +11482,7 @@
                     <a:bodyPr/>
                     <a:lstStyle/>
                     <a:p>
-                      <a:pPr indent="0" marL="0">
+                      <a:pPr marL="0" indent="0">
                         <a:buNone/>
                       </a:pPr>
                       <a:r>
@@ -12032,7 +11550,7 @@
                     <a:bodyPr/>
                     <a:lstStyle/>
                     <a:p>
-                      <a:pPr indent="0" marL="0">
+                      <a:pPr marL="0" indent="0">
                         <a:buNone/>
                       </a:pPr>
                       <a:r>
@@ -12095,6 +11613,11 @@
                     </a:solidFill>
                   </a:tcPr>
                 </a:tc>
+                <a:extLst>
+                  <a:ext uri="{0D108BD9-81ED-4DB2-BD59-A6C34878D82A}">
+                    <a16:rowId xmlns:a16="http://schemas.microsoft.com/office/drawing/2014/main" val="10000"/>
+                  </a:ext>
+                </a:extLst>
               </a:tr>
               <a:tr h="365760">
                 <a:tc>
@@ -12102,7 +11625,7 @@
                     <a:bodyPr/>
                     <a:lstStyle/>
                     <a:p>
-                      <a:pPr algn="ctr" indent="0" marL="0">
+                      <a:pPr marL="0" indent="0" algn="ctr">
                         <a:buNone/>
                       </a:pPr>
                       <a:r>
@@ -12170,7 +11693,7 @@
                     <a:bodyPr/>
                     <a:lstStyle/>
                     <a:p>
-                      <a:pPr algn="ctr" indent="0" marL="0">
+                      <a:pPr marL="0" indent="0" algn="ctr">
                         <a:buNone/>
                       </a:pPr>
                       <a:r>
@@ -12238,7 +11761,7 @@
                     <a:bodyPr/>
                     <a:lstStyle/>
                     <a:p>
-                      <a:pPr algn="ctr" indent="0" marL="0">
+                      <a:pPr marL="0" indent="0" algn="ctr">
                         <a:buNone/>
                       </a:pPr>
                       <a:r>
@@ -12306,7 +11829,7 @@
                     <a:bodyPr/>
                     <a:lstStyle/>
                     <a:p>
-                      <a:pPr algn="ctr" indent="0" marL="0">
+                      <a:pPr marL="0" indent="0" algn="ctr">
                         <a:buNone/>
                       </a:pPr>
                       <a:r>
@@ -12374,7 +11897,7 @@
                     <a:bodyPr/>
                     <a:lstStyle/>
                     <a:p>
-                      <a:pPr algn="ctr" indent="0" marL="0">
+                      <a:pPr marL="0" indent="0" algn="ctr">
                         <a:buNone/>
                       </a:pPr>
                       <a:r>
@@ -12442,7 +11965,7 @@
                     <a:bodyPr/>
                     <a:lstStyle/>
                     <a:p>
-                      <a:pPr algn="ctr" indent="0" marL="0">
+                      <a:pPr marL="0" indent="0" algn="ctr">
                         <a:buNone/>
                       </a:pPr>
                       <a:r>
@@ -12505,6 +12028,11 @@
                     </a:solidFill>
                   </a:tcPr>
                 </a:tc>
+                <a:extLst>
+                  <a:ext uri="{0D108BD9-81ED-4DB2-BD59-A6C34878D82A}">
+                    <a16:rowId xmlns:a16="http://schemas.microsoft.com/office/drawing/2014/main" val="10001"/>
+                  </a:ext>
+                </a:extLst>
               </a:tr>
               <a:tr h="365760">
                 <a:tc>
@@ -12512,7 +12040,7 @@
                     <a:bodyPr/>
                     <a:lstStyle/>
                     <a:p>
-                      <a:pPr algn="ctr" indent="0" marL="0">
+                      <a:pPr marL="0" indent="0" algn="ctr">
                         <a:buNone/>
                       </a:pPr>
                       <a:r>
@@ -12580,7 +12108,7 @@
                     <a:bodyPr/>
                     <a:lstStyle/>
                     <a:p>
-                      <a:pPr algn="ctr" indent="0" marL="0">
+                      <a:pPr marL="0" indent="0" algn="ctr">
                         <a:buNone/>
                       </a:pPr>
                       <a:r>
@@ -12648,7 +12176,7 @@
                     <a:bodyPr/>
                     <a:lstStyle/>
                     <a:p>
-                      <a:pPr algn="ctr" indent="0" marL="0">
+                      <a:pPr marL="0" indent="0" algn="ctr">
                         <a:buNone/>
                       </a:pPr>
                       <a:r>
@@ -12716,7 +12244,7 @@
                     <a:bodyPr/>
                     <a:lstStyle/>
                     <a:p>
-                      <a:pPr algn="ctr" indent="0" marL="0">
+                      <a:pPr marL="0" indent="0" algn="ctr">
                         <a:buNone/>
                       </a:pPr>
                       <a:r>
@@ -12784,7 +12312,7 @@
                     <a:bodyPr/>
                     <a:lstStyle/>
                     <a:p>
-                      <a:pPr algn="ctr" indent="0" marL="0">
+                      <a:pPr marL="0" indent="0" algn="ctr">
                         <a:buNone/>
                       </a:pPr>
                       <a:r>
@@ -12852,7 +12380,7 @@
                     <a:bodyPr/>
                     <a:lstStyle/>
                     <a:p>
-                      <a:pPr algn="ctr" indent="0" marL="0">
+                      <a:pPr marL="0" indent="0" algn="ctr">
                         <a:buNone/>
                       </a:pPr>
                       <a:r>
@@ -12915,6 +12443,11 @@
                     </a:solidFill>
                   </a:tcPr>
                 </a:tc>
+                <a:extLst>
+                  <a:ext uri="{0D108BD9-81ED-4DB2-BD59-A6C34878D82A}">
+                    <a16:rowId xmlns:a16="http://schemas.microsoft.com/office/drawing/2014/main" val="10002"/>
+                  </a:ext>
+                </a:extLst>
               </a:tr>
               <a:tr h="365760">
                 <a:tc>
@@ -12922,7 +12455,7 @@
                     <a:bodyPr/>
                     <a:lstStyle/>
                     <a:p>
-                      <a:pPr algn="ctr" indent="0" marL="0">
+                      <a:pPr marL="0" indent="0" algn="ctr">
                         <a:buNone/>
                       </a:pPr>
                       <a:r>
@@ -12990,7 +12523,7 @@
                     <a:bodyPr/>
                     <a:lstStyle/>
                     <a:p>
-                      <a:pPr algn="ctr" indent="0" marL="0">
+                      <a:pPr marL="0" indent="0" algn="ctr">
                         <a:buNone/>
                       </a:pPr>
                       <a:r>
@@ -13058,7 +12591,7 @@
                     <a:bodyPr/>
                     <a:lstStyle/>
                     <a:p>
-                      <a:pPr algn="ctr" indent="0" marL="0">
+                      <a:pPr marL="0" indent="0" algn="ctr">
                         <a:buNone/>
                       </a:pPr>
                       <a:r>
@@ -13126,7 +12659,7 @@
                     <a:bodyPr/>
                     <a:lstStyle/>
                     <a:p>
-                      <a:pPr algn="ctr" indent="0" marL="0">
+                      <a:pPr marL="0" indent="0" algn="ctr">
                         <a:buNone/>
                       </a:pPr>
                       <a:r>
@@ -13194,7 +12727,7 @@
                     <a:bodyPr/>
                     <a:lstStyle/>
                     <a:p>
-                      <a:pPr algn="ctr" indent="0" marL="0">
+                      <a:pPr marL="0" indent="0" algn="ctr">
                         <a:buNone/>
                       </a:pPr>
                       <a:r>
@@ -13262,7 +12795,7 @@
                     <a:bodyPr/>
                     <a:lstStyle/>
                     <a:p>
-                      <a:pPr algn="ctr" indent="0" marL="0">
+                      <a:pPr marL="0" indent="0" algn="ctr">
                         <a:buNone/>
                       </a:pPr>
                       <a:r>
@@ -13325,6 +12858,11 @@
                     </a:solidFill>
                   </a:tcPr>
                 </a:tc>
+                <a:extLst>
+                  <a:ext uri="{0D108BD9-81ED-4DB2-BD59-A6C34878D82A}">
+                    <a16:rowId xmlns:a16="http://schemas.microsoft.com/office/drawing/2014/main" val="10003"/>
+                  </a:ext>
+                </a:extLst>
               </a:tr>
               <a:tr h="365760">
                 <a:tc>
@@ -13332,7 +12870,7 @@
                     <a:bodyPr/>
                     <a:lstStyle/>
                     <a:p>
-                      <a:pPr algn="ctr" indent="0" marL="0">
+                      <a:pPr marL="0" indent="0" algn="ctr">
                         <a:buNone/>
                       </a:pPr>
                       <a:r>
@@ -13400,7 +12938,7 @@
                     <a:bodyPr/>
                     <a:lstStyle/>
                     <a:p>
-                      <a:pPr algn="ctr" indent="0" marL="0">
+                      <a:pPr marL="0" indent="0" algn="ctr">
                         <a:buNone/>
                       </a:pPr>
                       <a:r>
@@ -13468,7 +13006,7 @@
                     <a:bodyPr/>
                     <a:lstStyle/>
                     <a:p>
-                      <a:pPr algn="ctr" indent="0" marL="0">
+                      <a:pPr marL="0" indent="0" algn="ctr">
                         <a:buNone/>
                       </a:pPr>
                       <a:r>
@@ -13536,7 +13074,7 @@
                     <a:bodyPr/>
                     <a:lstStyle/>
                     <a:p>
-                      <a:pPr algn="ctr" indent="0" marL="0">
+                      <a:pPr marL="0" indent="0" algn="ctr">
                         <a:buNone/>
                       </a:pPr>
                       <a:r>
@@ -13604,7 +13142,7 @@
                     <a:bodyPr/>
                     <a:lstStyle/>
                     <a:p>
-                      <a:pPr algn="ctr" indent="0" marL="0">
+                      <a:pPr marL="0" indent="0" algn="ctr">
                         <a:buNone/>
                       </a:pPr>
                       <a:r>
@@ -13672,7 +13210,7 @@
                     <a:bodyPr/>
                     <a:lstStyle/>
                     <a:p>
-                      <a:pPr algn="ctr" indent="0" marL="0">
+                      <a:pPr marL="0" indent="0" algn="ctr">
                         <a:buNone/>
                       </a:pPr>
                       <a:r>
@@ -13735,6 +13273,11 @@
                     </a:solidFill>
                   </a:tcPr>
                 </a:tc>
+                <a:extLst>
+                  <a:ext uri="{0D108BD9-81ED-4DB2-BD59-A6C34878D82A}">
+                    <a16:rowId xmlns:a16="http://schemas.microsoft.com/office/drawing/2014/main" val="10004"/>
+                  </a:ext>
+                </a:extLst>
               </a:tr>
               <a:tr h="365760">
                 <a:tc>
@@ -13742,7 +13285,7 @@
                     <a:bodyPr/>
                     <a:lstStyle/>
                     <a:p>
-                      <a:pPr algn="ctr" indent="0" marL="0">
+                      <a:pPr marL="0" indent="0" algn="ctr">
                         <a:buNone/>
                       </a:pPr>
                       <a:r>
@@ -13810,7 +13353,7 @@
                     <a:bodyPr/>
                     <a:lstStyle/>
                     <a:p>
-                      <a:pPr algn="ctr" indent="0" marL="0">
+                      <a:pPr marL="0" indent="0" algn="ctr">
                         <a:buNone/>
                       </a:pPr>
                       <a:r>
@@ -13878,7 +13421,7 @@
                     <a:bodyPr/>
                     <a:lstStyle/>
                     <a:p>
-                      <a:pPr algn="ctr" indent="0" marL="0">
+                      <a:pPr marL="0" indent="0" algn="ctr">
                         <a:buNone/>
                       </a:pPr>
                       <a:r>
@@ -13946,7 +13489,7 @@
                     <a:bodyPr/>
                     <a:lstStyle/>
                     <a:p>
-                      <a:pPr algn="ctr" indent="0" marL="0">
+                      <a:pPr marL="0" indent="0" algn="ctr">
                         <a:buNone/>
                       </a:pPr>
                       <a:r>
@@ -14014,7 +13557,7 @@
                     <a:bodyPr/>
                     <a:lstStyle/>
                     <a:p>
-                      <a:pPr algn="ctr" indent="0" marL="0">
+                      <a:pPr marL="0" indent="0" algn="ctr">
                         <a:buNone/>
                       </a:pPr>
                       <a:r>
@@ -14082,7 +13625,7 @@
                     <a:bodyPr/>
                     <a:lstStyle/>
                     <a:p>
-                      <a:pPr algn="ctr" indent="0" marL="0">
+                      <a:pPr marL="0" indent="0" algn="ctr">
                         <a:buNone/>
                       </a:pPr>
                       <a:r>
@@ -14145,6 +13688,11 @@
                     </a:solidFill>
                   </a:tcPr>
                 </a:tc>
+                <a:extLst>
+                  <a:ext uri="{0D108BD9-81ED-4DB2-BD59-A6C34878D82A}">
+                    <a16:rowId xmlns:a16="http://schemas.microsoft.com/office/drawing/2014/main" val="10005"/>
+                  </a:ext>
+                </a:extLst>
               </a:tr>
               <a:tr h="365760">
                 <a:tc>
@@ -14152,7 +13700,7 @@
                     <a:bodyPr/>
                     <a:lstStyle/>
                     <a:p>
-                      <a:pPr algn="ctr" indent="0" marL="0">
+                      <a:pPr marL="0" indent="0" algn="ctr">
                         <a:buNone/>
                       </a:pPr>
                       <a:r>
@@ -14220,7 +13768,7 @@
                     <a:bodyPr/>
                     <a:lstStyle/>
                     <a:p>
-                      <a:pPr algn="ctr" indent="0" marL="0">
+                      <a:pPr marL="0" indent="0" algn="ctr">
                         <a:buNone/>
                       </a:pPr>
                       <a:r>
@@ -14288,7 +13836,7 @@
                     <a:bodyPr/>
                     <a:lstStyle/>
                     <a:p>
-                      <a:pPr algn="ctr" indent="0" marL="0">
+                      <a:pPr marL="0" indent="0" algn="ctr">
                         <a:buNone/>
                       </a:pPr>
                       <a:r>
@@ -14356,7 +13904,7 @@
                     <a:bodyPr/>
                     <a:lstStyle/>
                     <a:p>
-                      <a:pPr algn="ctr" indent="0" marL="0">
+                      <a:pPr marL="0" indent="0" algn="ctr">
                         <a:buNone/>
                       </a:pPr>
                       <a:r>
@@ -14424,7 +13972,7 @@
                     <a:bodyPr/>
                     <a:lstStyle/>
                     <a:p>
-                      <a:pPr algn="ctr" indent="0" marL="0">
+                      <a:pPr marL="0" indent="0" algn="ctr">
                         <a:buNone/>
                       </a:pPr>
                       <a:r>
@@ -14492,7 +14040,7 @@
                     <a:bodyPr/>
                     <a:lstStyle/>
                     <a:p>
-                      <a:pPr algn="ctr" indent="0" marL="0">
+                      <a:pPr marL="0" indent="0" algn="ctr">
                         <a:buNone/>
                       </a:pPr>
                       <a:r>
@@ -14555,6 +14103,11 @@
                     </a:solidFill>
                   </a:tcPr>
                 </a:tc>
+                <a:extLst>
+                  <a:ext uri="{0D108BD9-81ED-4DB2-BD59-A6C34878D82A}">
+                    <a16:rowId xmlns:a16="http://schemas.microsoft.com/office/drawing/2014/main" val="10006"/>
+                  </a:ext>
+                </a:extLst>
               </a:tr>
             </a:tbl>
           </a:graphicData>
@@ -14635,7 +14188,7 @@
           <a:bodyPr wrap="square" lIns="0" tIns="0" rIns="0" bIns="0" rtlCol="0" anchor="ctr"/>
           <a:lstStyle/>
           <a:p>
-            <a:pPr indent="0" marL="0">
+            <a:pPr marL="0" indent="0">
               <a:buNone/>
             </a:pPr>
             <a:r>
@@ -14674,7 +14227,7 @@
           <a:bodyPr wrap="square" lIns="0" tIns="0" rIns="0" bIns="0" rtlCol="0" anchor="t"/>
           <a:lstStyle/>
           <a:p>
-            <a:pPr algn="l" indent="0" marL="0">
+            <a:pPr marL="0" indent="0" algn="l">
               <a:lnSpc>
                 <a:spcPct val="104000"/>
               </a:lnSpc>
@@ -14770,7 +14323,7 @@
           <a:bodyPr wrap="square" lIns="0" tIns="0" rIns="0" bIns="0" rtlCol="0" anchor="ctr"/>
           <a:lstStyle/>
           <a:p>
-            <a:pPr indent="0" marL="0">
+            <a:pPr marL="0" indent="0">
               <a:buNone/>
             </a:pPr>
             <a:r>
@@ -14809,7 +14362,7 @@
           <a:bodyPr wrap="square" lIns="0" tIns="0" rIns="0" bIns="0" rtlCol="0" anchor="t"/>
           <a:lstStyle/>
           <a:p>
-            <a:pPr algn="l" indent="0" marL="0">
+            <a:pPr marL="0" indent="0" algn="l">
               <a:lnSpc>
                 <a:spcPct val="104000"/>
               </a:lnSpc>
@@ -14832,7 +14385,7 @@
       </p:sp>
       <p:sp>
         <p:nvSpPr>
-          <p:cNvPr id="15" name="Shape 12"/>
+          <p:cNvPr id="6" name="Shape 12"/>
           <p:cNvSpPr/>
           <p:nvPr/>
         </p:nvSpPr>
@@ -14905,7 +14458,7 @@
           <a:bodyPr wrap="square" lIns="0" tIns="0" rIns="0" bIns="0" rtlCol="0" anchor="ctr"/>
           <a:lstStyle/>
           <a:p>
-            <a:pPr indent="0" marL="0">
+            <a:pPr marL="0" indent="0">
               <a:buNone/>
             </a:pPr>
             <a:r>
@@ -14944,7 +14497,7 @@
           <a:bodyPr wrap="square" lIns="0" tIns="0" rIns="0" bIns="0" rtlCol="0" anchor="t"/>
           <a:lstStyle/>
           <a:p>
-            <a:pPr algn="l" indent="0" marL="0">
+            <a:pPr marL="0" indent="0" algn="l">
               <a:lnSpc>
                 <a:spcPct val="104000"/>
               </a:lnSpc>
@@ -14981,6 +14534,7 @@
         <a:solidFill>
           <a:srgbClr val="F5F7FB"/>
         </a:solidFill>
+        <a:effectLst/>
       </p:bgPr>
     </p:bg>
     <p:spTree>
@@ -15045,11 +14599,11 @@
           <a:bodyPr wrap="square" lIns="0" tIns="0" rIns="0" bIns="0" rtlCol="0" anchor="ctr"/>
           <a:lstStyle/>
           <a:p>
-            <a:pPr algn="ctr" indent="0" marL="0">
+            <a:pPr marL="0" indent="0" algn="ctr">
               <a:buNone/>
             </a:pPr>
             <a:r>
-              <a:rPr lang="en-US" sz="1150" b="1" spc="100" kern="0" dirty="0">
+              <a:rPr lang="en-US" sz="1150" b="1" kern="0" spc="100" dirty="0">
                 <a:solidFill>
                   <a:srgbClr val="FFFFFF"/>
                 </a:solidFill>
@@ -15084,7 +14638,7 @@
           <a:bodyPr wrap="square" lIns="0" tIns="0" rIns="0" bIns="0" rtlCol="0" anchor="ctr"/>
           <a:lstStyle/>
           <a:p>
-            <a:pPr indent="0" marL="0">
+            <a:pPr marL="0" indent="0">
               <a:buNone/>
             </a:pPr>
             <a:r>
@@ -15123,7 +14677,7 @@
           <a:bodyPr wrap="square" lIns="0" tIns="0" rIns="0" bIns="0" rtlCol="0" anchor="ctr"/>
           <a:lstStyle/>
           <a:p>
-            <a:pPr indent="0" marL="0">
+            <a:pPr marL="0" indent="0">
               <a:buNone/>
             </a:pPr>
             <a:r>
@@ -15216,7 +14770,7 @@
           <a:bodyPr wrap="square" lIns="0" tIns="0" rIns="0" bIns="0" rtlCol="0" anchor="ctr"/>
           <a:lstStyle/>
           <a:p>
-            <a:pPr indent="0" marL="0">
+            <a:pPr marL="0" indent="0">
               <a:buNone/>
             </a:pPr>
             <a:r>
@@ -15255,7 +14809,7 @@
           <a:bodyPr wrap="square" lIns="0" tIns="0" rIns="0" bIns="0" rtlCol="0" anchor="t"/>
           <a:lstStyle/>
           <a:p>
-            <a:pPr algn="l" indent="0" marL="0">
+            <a:pPr marL="0" indent="0" algn="l">
               <a:lnSpc>
                 <a:spcPct val="108000"/>
               </a:lnSpc>
@@ -15275,7 +14829,7 @@
             <a:endParaRPr lang="en-US" sz="1150" dirty="0"/>
           </a:p>
           <a:p>
-            <a:pPr algn="l" indent="0" marL="0">
+            <a:pPr marL="0" indent="0" algn="l">
               <a:lnSpc>
                 <a:spcPct val="108000"/>
               </a:lnSpc>
@@ -15284,7 +14838,7 @@
             <a:endParaRPr lang="en-US" sz="1150" dirty="0"/>
           </a:p>
           <a:p>
-            <a:pPr algn="l" indent="0" marL="0">
+            <a:pPr marL="0" indent="0" algn="l">
               <a:lnSpc>
                 <a:spcPct val="108000"/>
               </a:lnSpc>
@@ -15304,7 +14858,7 @@
             <a:endParaRPr lang="en-US" sz="1150" dirty="0"/>
           </a:p>
           <a:p>
-            <a:pPr algn="l" indent="0" marL="0">
+            <a:pPr marL="0" indent="0" algn="l">
               <a:lnSpc>
                 <a:spcPct val="108000"/>
               </a:lnSpc>
@@ -15313,7 +14867,7 @@
             <a:endParaRPr lang="en-US" sz="1150" dirty="0"/>
           </a:p>
           <a:p>
-            <a:pPr algn="l" indent="0" marL="0">
+            <a:pPr marL="0" indent="0" algn="l">
               <a:lnSpc>
                 <a:spcPct val="108000"/>
               </a:lnSpc>
@@ -15409,7 +14963,7 @@
           <a:bodyPr wrap="square" lIns="0" tIns="0" rIns="0" bIns="0" rtlCol="0" anchor="ctr"/>
           <a:lstStyle/>
           <a:p>
-            <a:pPr indent="0" marL="0">
+            <a:pPr marL="0" indent="0">
               <a:buNone/>
             </a:pPr>
             <a:r>
@@ -15448,7 +15002,7 @@
           <a:bodyPr wrap="square" lIns="0" tIns="0" rIns="0" bIns="0" rtlCol="0" anchor="t"/>
           <a:lstStyle/>
           <a:p>
-            <a:pPr algn="l" indent="0" marL="0">
+            <a:pPr marL="0" indent="0" algn="l">
               <a:lnSpc>
                 <a:spcPct val="104000"/>
               </a:lnSpc>
@@ -15544,7 +15098,7 @@
           <a:bodyPr wrap="square" lIns="0" tIns="0" rIns="0" bIns="0" rtlCol="0" anchor="ctr"/>
           <a:lstStyle/>
           <a:p>
-            <a:pPr indent="0" marL="0">
+            <a:pPr marL="0" indent="0">
               <a:buNone/>
             </a:pPr>
             <a:r>
@@ -15583,7 +15137,7 @@
           <a:bodyPr wrap="square" lIns="0" tIns="0" rIns="0" bIns="0" rtlCol="0" anchor="t"/>
           <a:lstStyle/>
           <a:p>
-            <a:pPr algn="l" indent="0" marL="0">
+            <a:pPr marL="0" indent="0" algn="l">
               <a:lnSpc>
                 <a:spcPct val="104000"/>
               </a:lnSpc>
@@ -15679,11 +15233,11 @@
           <a:bodyPr wrap="square" lIns="0" tIns="0" rIns="0" bIns="0" rtlCol="0" anchor="ctr"/>
           <a:lstStyle/>
           <a:p>
-            <a:pPr algn="ctr" indent="0" marL="0">
+            <a:pPr marL="0" indent="0" algn="ctr">
               <a:buNone/>
             </a:pPr>
             <a:r>
-              <a:rPr lang="en-US" sz="1150" b="1" spc="100" kern="0" dirty="0">
+              <a:rPr lang="en-US" sz="1150" b="1" kern="0" spc="100" dirty="0">
                 <a:solidFill>
                   <a:srgbClr val="FFFFFF"/>
                 </a:solidFill>
@@ -15718,7 +15272,7 @@
           <a:bodyPr wrap="square" lIns="0" tIns="0" rIns="0" bIns="0" rtlCol="0" anchor="ctr"/>
           <a:lstStyle/>
           <a:p>
-            <a:pPr indent="0" marL="0">
+            <a:pPr marL="0" indent="0">
               <a:buNone/>
             </a:pPr>
             <a:r>
@@ -15757,7 +15311,7 @@
           <a:bodyPr wrap="square" lIns="0" tIns="0" rIns="0" bIns="0" rtlCol="0" anchor="t"/>
           <a:lstStyle/>
           <a:p>
-            <a:pPr algn="l" indent="0" marL="0">
+            <a:pPr marL="0" indent="0" algn="l">
               <a:lnSpc>
                 <a:spcPct val="104000"/>
               </a:lnSpc>
@@ -15853,11 +15407,11 @@
           <a:bodyPr wrap="square" lIns="0" tIns="0" rIns="0" bIns="0" rtlCol="0" anchor="ctr"/>
           <a:lstStyle/>
           <a:p>
-            <a:pPr algn="ctr" indent="0" marL="0">
+            <a:pPr marL="0" indent="0" algn="ctr">
               <a:buNone/>
             </a:pPr>
             <a:r>
-              <a:rPr lang="en-US" sz="1150" b="1" spc="100" kern="0" dirty="0">
+              <a:rPr lang="en-US" sz="1150" b="1" kern="0" spc="100" dirty="0">
                 <a:solidFill>
                   <a:srgbClr val="FFFFFF"/>
                 </a:solidFill>
@@ -15892,7 +15446,7 @@
           <a:bodyPr wrap="square" lIns="0" tIns="0" rIns="0" bIns="0" rtlCol="0" anchor="ctr"/>
           <a:lstStyle/>
           <a:p>
-            <a:pPr indent="0" marL="0">
+            <a:pPr marL="0" indent="0">
               <a:buNone/>
             </a:pPr>
             <a:r>
@@ -15931,7 +15485,7 @@
           <a:bodyPr wrap="square" lIns="0" tIns="0" rIns="0" bIns="0" rtlCol="0" anchor="t"/>
           <a:lstStyle/>
           <a:p>
-            <a:pPr algn="l" indent="0" marL="0">
+            <a:pPr marL="0" indent="0" algn="l">
               <a:lnSpc>
                 <a:spcPct val="104000"/>
               </a:lnSpc>
@@ -16027,11 +15581,11 @@
           <a:bodyPr wrap="square" lIns="0" tIns="0" rIns="0" bIns="0" rtlCol="0" anchor="ctr"/>
           <a:lstStyle/>
           <a:p>
-            <a:pPr algn="ctr" indent="0" marL="0">
+            <a:pPr marL="0" indent="0" algn="ctr">
               <a:buNone/>
             </a:pPr>
             <a:r>
-              <a:rPr lang="en-US" sz="1150" b="1" spc="100" kern="0" dirty="0">
+              <a:rPr lang="en-US" sz="1150" b="1" kern="0" spc="100" dirty="0">
                 <a:solidFill>
                   <a:srgbClr val="FFFFFF"/>
                 </a:solidFill>
@@ -16066,7 +15620,7 @@
           <a:bodyPr wrap="square" lIns="0" tIns="0" rIns="0" bIns="0" rtlCol="0" anchor="ctr"/>
           <a:lstStyle/>
           <a:p>
-            <a:pPr indent="0" marL="0">
+            <a:pPr marL="0" indent="0">
               <a:buNone/>
             </a:pPr>
             <a:r>
@@ -16105,7 +15659,7 @@
           <a:bodyPr wrap="square" lIns="0" tIns="0" rIns="0" bIns="0" rtlCol="0" anchor="t"/>
           <a:lstStyle/>
           <a:p>
-            <a:pPr algn="l" indent="0" marL="0">
+            <a:pPr marL="0" indent="0" algn="l">
               <a:lnSpc>
                 <a:spcPct val="104000"/>
               </a:lnSpc>
@@ -16201,11 +15755,11 @@
           <a:bodyPr wrap="square" lIns="0" tIns="0" rIns="0" bIns="0" rtlCol="0" anchor="ctr"/>
           <a:lstStyle/>
           <a:p>
-            <a:pPr algn="ctr" indent="0" marL="0">
+            <a:pPr marL="0" indent="0" algn="ctr">
               <a:buNone/>
             </a:pPr>
             <a:r>
-              <a:rPr lang="en-US" sz="1150" b="1" spc="100" kern="0" dirty="0">
+              <a:rPr lang="en-US" sz="1150" b="1" kern="0" spc="100" dirty="0">
                 <a:solidFill>
                   <a:srgbClr val="FFFFFF"/>
                 </a:solidFill>
@@ -16240,7 +15794,7 @@
           <a:bodyPr wrap="square" lIns="0" tIns="0" rIns="0" bIns="0" rtlCol="0" anchor="ctr"/>
           <a:lstStyle/>
           <a:p>
-            <a:pPr indent="0" marL="0">
+            <a:pPr marL="0" indent="0">
               <a:buNone/>
             </a:pPr>
             <a:r>
@@ -16279,7 +15833,7 @@
           <a:bodyPr wrap="square" lIns="0" tIns="0" rIns="0" bIns="0" rtlCol="0" anchor="t"/>
           <a:lstStyle/>
           <a:p>
-            <a:pPr algn="l" indent="0" marL="0">
+            <a:pPr marL="0" indent="0" algn="l">
               <a:lnSpc>
                 <a:spcPct val="104000"/>
               </a:lnSpc>
@@ -16321,7 +15875,7 @@
           <a:bodyPr wrap="square" lIns="0" tIns="0" rIns="0" bIns="0" rtlCol="0" anchor="ctr"/>
           <a:lstStyle/>
           <a:p>
-            <a:pPr indent="0" marL="0">
+            <a:pPr marL="0" indent="0">
               <a:buNone/>
             </a:pPr>
             <a:r>
@@ -16355,6 +15909,7 @@
         <a:solidFill>
           <a:srgbClr val="F5F7FB"/>
         </a:solidFill>
+        <a:effectLst/>
       </p:bgPr>
     </p:bg>
     <p:spTree>
@@ -16419,11 +15974,11 @@
           <a:bodyPr wrap="square" lIns="0" tIns="0" rIns="0" bIns="0" rtlCol="0" anchor="ctr"/>
           <a:lstStyle/>
           <a:p>
-            <a:pPr algn="ctr" indent="0" marL="0">
+            <a:pPr marL="0" indent="0" algn="ctr">
               <a:buNone/>
             </a:pPr>
             <a:r>
-              <a:rPr lang="en-US" sz="1150" b="1" spc="100" kern="0" dirty="0">
+              <a:rPr lang="en-US" sz="1150" b="1" kern="0" spc="100" dirty="0">
                 <a:solidFill>
                   <a:srgbClr val="FFFFFF"/>
                 </a:solidFill>
@@ -16458,7 +16013,7 @@
           <a:bodyPr wrap="square" lIns="0" tIns="0" rIns="0" bIns="0" rtlCol="0" anchor="ctr"/>
           <a:lstStyle/>
           <a:p>
-            <a:pPr indent="0" marL="0">
+            <a:pPr marL="0" indent="0">
               <a:buNone/>
             </a:pPr>
             <a:r>
@@ -16484,7 +16039,7 @@
         </p:nvSpPr>
         <p:spPr>
           <a:xfrm>
-            <a:off x="548640" y="1481328"/>
+            <a:off x="579120" y="1219447"/>
             <a:ext cx="11064240" cy="365760"/>
           </a:xfrm>
           <a:prstGeom prst="rect">
@@ -16497,7 +16052,7 @@
           <a:bodyPr wrap="square" lIns="0" tIns="0" rIns="0" bIns="0" rtlCol="0" anchor="ctr"/>
           <a:lstStyle/>
           <a:p>
-            <a:pPr indent="0" marL="0">
+            <a:pPr marL="0" indent="0">
               <a:buNone/>
             </a:pPr>
             <a:r>
@@ -16524,32 +16079,56 @@
           <p:nvPr>
             <p:extLst>
               <p:ext uri="{D42A27DB-BD31-4B8C-83A1-F6EECF244321}">
-                <p14:modId xmlns:p14="http://schemas.microsoft.com/office/powerpoint/2010/main" val="1579011935"/>
+                <p14:modId xmlns:p14="http://schemas.microsoft.com/office/powerpoint/2010/main" val="3135997064"/>
               </p:ext>
             </p:extLst>
           </p:nvPr>
         </p:nvGraphicFramePr>
         <p:xfrm>
-          <a:off x="548640" y="1965960"/>
-          <a:ext cx="11091672" cy="914400"/>
+          <a:off x="534924" y="1530343"/>
+          <a:ext cx="11091672" cy="3645161"/>
         </p:xfrm>
         <a:graphic>
           <a:graphicData uri="http://schemas.openxmlformats.org/drawingml/2006/table">
             <a:tbl>
               <a:tblPr/>
               <a:tblGrid>
-                <a:gridCol w="3200400"/>
-                <a:gridCol w="2286000"/>
-                <a:gridCol w="2651760"/>
-                <a:gridCol w="2953512"/>
+                <a:gridCol w="3200400">
+                  <a:extLst>
+                    <a:ext uri="{9D8B030D-6E8A-4147-A177-3AD203B41FA5}">
+                      <a16:colId xmlns:a16="http://schemas.microsoft.com/office/drawing/2014/main" val="20000"/>
+                    </a:ext>
+                  </a:extLst>
+                </a:gridCol>
+                <a:gridCol w="2286000">
+                  <a:extLst>
+                    <a:ext uri="{9D8B030D-6E8A-4147-A177-3AD203B41FA5}">
+                      <a16:colId xmlns:a16="http://schemas.microsoft.com/office/drawing/2014/main" val="20001"/>
+                    </a:ext>
+                  </a:extLst>
+                </a:gridCol>
+                <a:gridCol w="2651760">
+                  <a:extLst>
+                    <a:ext uri="{9D8B030D-6E8A-4147-A177-3AD203B41FA5}">
+                      <a16:colId xmlns:a16="http://schemas.microsoft.com/office/drawing/2014/main" val="20002"/>
+                    </a:ext>
+                  </a:extLst>
+                </a:gridCol>
+                <a:gridCol w="2953512">
+                  <a:extLst>
+                    <a:ext uri="{9D8B030D-6E8A-4147-A177-3AD203B41FA5}">
+                      <a16:colId xmlns:a16="http://schemas.microsoft.com/office/drawing/2014/main" val="20003"/>
+                    </a:ext>
+                  </a:extLst>
+                </a:gridCol>
               </a:tblGrid>
-              <a:tr h="384048">
+              <a:tr h="578873">
                 <a:tc>
                   <a:txBody>
                     <a:bodyPr/>
                     <a:lstStyle/>
                     <a:p>
-                      <a:pPr indent="0" marL="0">
+                      <a:pPr marL="0" indent="0">
                         <a:buNone/>
                       </a:pPr>
                       <a:r>
@@ -16617,7 +16196,7 @@
                     <a:bodyPr/>
                     <a:lstStyle/>
                     <a:p>
-                      <a:pPr indent="0" marL="0">
+                      <a:pPr marL="0" indent="0">
                         <a:buNone/>
                       </a:pPr>
                       <a:r>
@@ -16685,7 +16264,7 @@
                     <a:bodyPr/>
                     <a:lstStyle/>
                     <a:p>
-                      <a:pPr indent="0" marL="0">
+                      <a:pPr marL="0" indent="0">
                         <a:buNone/>
                       </a:pPr>
                       <a:r>
@@ -16753,7 +16332,7 @@
                     <a:bodyPr/>
                     <a:lstStyle/>
                     <a:p>
-                      <a:pPr indent="0" marL="0">
+                      <a:pPr marL="0" indent="0">
                         <a:buNone/>
                       </a:pPr>
                       <a:r>
@@ -16816,6 +16395,11 @@
                     </a:solidFill>
                   </a:tcPr>
                 </a:tc>
+                <a:extLst>
+                  <a:ext uri="{0D108BD9-81ED-4DB2-BD59-A6C34878D82A}">
+                    <a16:rowId xmlns:a16="http://schemas.microsoft.com/office/drawing/2014/main" val="10000"/>
+                  </a:ext>
+                </a:extLst>
               </a:tr>
               <a:tr h="384048">
                 <a:tc>
@@ -16823,7 +16407,7 @@
                     <a:bodyPr/>
                     <a:lstStyle/>
                     <a:p>
-                      <a:pPr indent="0" marL="0">
+                      <a:pPr marL="0" indent="0">
                         <a:buNone/>
                       </a:pPr>
                       <a:r>
@@ -16891,7 +16475,7 @@
                     <a:bodyPr/>
                     <a:lstStyle/>
                     <a:p>
-                      <a:pPr indent="0" marL="0">
+                      <a:pPr marL="0" indent="0">
                         <a:buNone/>
                       </a:pPr>
                       <a:r>
@@ -16959,7 +16543,7 @@
                     <a:bodyPr/>
                     <a:lstStyle/>
                     <a:p>
-                      <a:pPr indent="0" marL="0">
+                      <a:pPr marL="0" indent="0">
                         <a:buNone/>
                       </a:pPr>
                       <a:r>
@@ -17027,7 +16611,7 @@
                     <a:bodyPr/>
                     <a:lstStyle/>
                     <a:p>
-                      <a:pPr indent="0" marL="0">
+                      <a:pPr marL="0" indent="0">
                         <a:buNone/>
                       </a:pPr>
                       <a:r>
@@ -17090,6 +16674,11 @@
                     </a:solidFill>
                   </a:tcPr>
                 </a:tc>
+                <a:extLst>
+                  <a:ext uri="{0D108BD9-81ED-4DB2-BD59-A6C34878D82A}">
+                    <a16:rowId xmlns:a16="http://schemas.microsoft.com/office/drawing/2014/main" val="10001"/>
+                  </a:ext>
+                </a:extLst>
               </a:tr>
               <a:tr h="384048">
                 <a:tc>
@@ -17097,7 +16686,7 @@
                     <a:bodyPr/>
                     <a:lstStyle/>
                     <a:p>
-                      <a:pPr indent="0" marL="0">
+                      <a:pPr marL="0" indent="0">
                         <a:buNone/>
                       </a:pPr>
                       <a:r>
@@ -17165,7 +16754,7 @@
                     <a:bodyPr/>
                     <a:lstStyle/>
                     <a:p>
-                      <a:pPr indent="0" marL="0">
+                      <a:pPr marL="0" indent="0">
                         <a:buNone/>
                       </a:pPr>
                       <a:r>
@@ -17233,7 +16822,7 @@
                     <a:bodyPr/>
                     <a:lstStyle/>
                     <a:p>
-                      <a:pPr indent="0" marL="0">
+                      <a:pPr marL="0" indent="0">
                         <a:buNone/>
                       </a:pPr>
                       <a:r>
@@ -17301,7 +16890,7 @@
                     <a:bodyPr/>
                     <a:lstStyle/>
                     <a:p>
-                      <a:pPr indent="0" marL="0">
+                      <a:pPr marL="0" indent="0">
                         <a:buNone/>
                       </a:pPr>
                       <a:r>
@@ -17364,6 +16953,11 @@
                     </a:solidFill>
                   </a:tcPr>
                 </a:tc>
+                <a:extLst>
+                  <a:ext uri="{0D108BD9-81ED-4DB2-BD59-A6C34878D82A}">
+                    <a16:rowId xmlns:a16="http://schemas.microsoft.com/office/drawing/2014/main" val="10002"/>
+                  </a:ext>
+                </a:extLst>
               </a:tr>
               <a:tr h="384048">
                 <a:tc>
@@ -17371,7 +16965,7 @@
                     <a:bodyPr/>
                     <a:lstStyle/>
                     <a:p>
-                      <a:pPr indent="0" marL="0">
+                      <a:pPr marL="0" indent="0">
                         <a:buNone/>
                       </a:pPr>
                       <a:r>
@@ -17439,7 +17033,7 @@
                     <a:bodyPr/>
                     <a:lstStyle/>
                     <a:p>
-                      <a:pPr indent="0" marL="0">
+                      <a:pPr marL="0" indent="0">
                         <a:buNone/>
                       </a:pPr>
                       <a:r>
@@ -17507,7 +17101,7 @@
                     <a:bodyPr/>
                     <a:lstStyle/>
                     <a:p>
-                      <a:pPr indent="0" marL="0">
+                      <a:pPr marL="0" indent="0">
                         <a:buNone/>
                       </a:pPr>
                       <a:r>
@@ -17575,7 +17169,7 @@
                     <a:bodyPr/>
                     <a:lstStyle/>
                     <a:p>
-                      <a:pPr indent="0" marL="0">
+                      <a:pPr marL="0" indent="0">
                         <a:buNone/>
                       </a:pPr>
                       <a:r>
@@ -17638,6 +17232,11 @@
                     </a:solidFill>
                   </a:tcPr>
                 </a:tc>
+                <a:extLst>
+                  <a:ext uri="{0D108BD9-81ED-4DB2-BD59-A6C34878D82A}">
+                    <a16:rowId xmlns:a16="http://schemas.microsoft.com/office/drawing/2014/main" val="10003"/>
+                  </a:ext>
+                </a:extLst>
               </a:tr>
               <a:tr h="384048">
                 <a:tc>
@@ -17645,7 +17244,7 @@
                     <a:bodyPr/>
                     <a:lstStyle/>
                     <a:p>
-                      <a:pPr indent="0" marL="0">
+                      <a:pPr marL="0" indent="0">
                         <a:buNone/>
                       </a:pPr>
                       <a:r>
@@ -17713,7 +17312,7 @@
                     <a:bodyPr/>
                     <a:lstStyle/>
                     <a:p>
-                      <a:pPr indent="0" marL="0">
+                      <a:pPr marL="0" indent="0">
                         <a:buNone/>
                       </a:pPr>
                       <a:r>
@@ -17781,7 +17380,7 @@
                     <a:bodyPr/>
                     <a:lstStyle/>
                     <a:p>
-                      <a:pPr indent="0" marL="0">
+                      <a:pPr marL="0" indent="0">
                         <a:buNone/>
                       </a:pPr>
                       <a:r>
@@ -17849,7 +17448,7 @@
                     <a:bodyPr/>
                     <a:lstStyle/>
                     <a:p>
-                      <a:pPr indent="0" marL="0">
+                      <a:pPr marL="0" indent="0">
                         <a:buNone/>
                       </a:pPr>
                       <a:r>
@@ -17912,6 +17511,11 @@
                     </a:solidFill>
                   </a:tcPr>
                 </a:tc>
+                <a:extLst>
+                  <a:ext uri="{0D108BD9-81ED-4DB2-BD59-A6C34878D82A}">
+                    <a16:rowId xmlns:a16="http://schemas.microsoft.com/office/drawing/2014/main" val="10004"/>
+                  </a:ext>
+                </a:extLst>
               </a:tr>
               <a:tr h="384048">
                 <a:tc>
@@ -17919,7 +17523,7 @@
                     <a:bodyPr/>
                     <a:lstStyle/>
                     <a:p>
-                      <a:pPr indent="0" marL="0">
+                      <a:pPr marL="0" indent="0">
                         <a:buNone/>
                       </a:pPr>
                       <a:r>
@@ -17987,7 +17591,7 @@
                     <a:bodyPr/>
                     <a:lstStyle/>
                     <a:p>
-                      <a:pPr indent="0" marL="0">
+                      <a:pPr marL="0" indent="0">
                         <a:buNone/>
                       </a:pPr>
                       <a:r>
@@ -18055,7 +17659,7 @@
                     <a:bodyPr/>
                     <a:lstStyle/>
                     <a:p>
-                      <a:pPr indent="0" marL="0">
+                      <a:pPr marL="0" indent="0">
                         <a:buNone/>
                       </a:pPr>
                       <a:r>
@@ -18123,7 +17727,7 @@
                     <a:bodyPr/>
                     <a:lstStyle/>
                     <a:p>
-                      <a:pPr indent="0" marL="0">
+                      <a:pPr marL="0" indent="0">
                         <a:buNone/>
                       </a:pPr>
                       <a:r>
@@ -18186,6 +17790,11 @@
                     </a:solidFill>
                   </a:tcPr>
                 </a:tc>
+                <a:extLst>
+                  <a:ext uri="{0D108BD9-81ED-4DB2-BD59-A6C34878D82A}">
+                    <a16:rowId xmlns:a16="http://schemas.microsoft.com/office/drawing/2014/main" val="10005"/>
+                  </a:ext>
+                </a:extLst>
               </a:tr>
               <a:tr h="384048">
                 <a:tc>
@@ -18193,7 +17802,7 @@
                     <a:bodyPr/>
                     <a:lstStyle/>
                     <a:p>
-                      <a:pPr indent="0" marL="0">
+                      <a:pPr marL="0" indent="0">
                         <a:buNone/>
                       </a:pPr>
                       <a:r>
@@ -18261,7 +17870,7 @@
                     <a:bodyPr/>
                     <a:lstStyle/>
                     <a:p>
-                      <a:pPr indent="0" marL="0">
+                      <a:pPr marL="0" indent="0">
                         <a:buNone/>
                       </a:pPr>
                       <a:r>
@@ -18329,7 +17938,7 @@
                     <a:bodyPr/>
                     <a:lstStyle/>
                     <a:p>
-                      <a:pPr indent="0" marL="0">
+                      <a:pPr marL="0" indent="0">
                         <a:buNone/>
                       </a:pPr>
                       <a:r>
@@ -18397,7 +18006,7 @@
                     <a:bodyPr/>
                     <a:lstStyle/>
                     <a:p>
-                      <a:pPr indent="0" marL="0">
+                      <a:pPr marL="0" indent="0">
                         <a:buNone/>
                       </a:pPr>
                       <a:r>
@@ -18460,6 +18069,11 @@
                     </a:solidFill>
                   </a:tcPr>
                 </a:tc>
+                <a:extLst>
+                  <a:ext uri="{0D108BD9-81ED-4DB2-BD59-A6C34878D82A}">
+                    <a16:rowId xmlns:a16="http://schemas.microsoft.com/office/drawing/2014/main" val="10006"/>
+                  </a:ext>
+                </a:extLst>
               </a:tr>
               <a:tr h="384048">
                 <a:tc>
@@ -18467,7 +18081,7 @@
                     <a:bodyPr/>
                     <a:lstStyle/>
                     <a:p>
-                      <a:pPr indent="0" marL="0">
+                      <a:pPr marL="0" indent="0">
                         <a:buNone/>
                       </a:pPr>
                       <a:r>
@@ -18535,7 +18149,7 @@
                     <a:bodyPr/>
                     <a:lstStyle/>
                     <a:p>
-                      <a:pPr indent="0" marL="0">
+                      <a:pPr marL="0" indent="0">
                         <a:buNone/>
                       </a:pPr>
                       <a:r>
@@ -18603,7 +18217,7 @@
                     <a:bodyPr/>
                     <a:lstStyle/>
                     <a:p>
-                      <a:pPr indent="0" marL="0">
+                      <a:pPr marL="0" indent="0">
                         <a:buNone/>
                       </a:pPr>
                       <a:r>
@@ -18671,7 +18285,7 @@
                     <a:bodyPr/>
                     <a:lstStyle/>
                     <a:p>
-                      <a:pPr indent="0" marL="0">
+                      <a:pPr marL="0" indent="0">
                         <a:buNone/>
                       </a:pPr>
                       <a:r>
@@ -18734,6 +18348,11 @@
                     </a:solidFill>
                   </a:tcPr>
                 </a:tc>
+                <a:extLst>
+                  <a:ext uri="{0D108BD9-81ED-4DB2-BD59-A6C34878D82A}">
+                    <a16:rowId xmlns:a16="http://schemas.microsoft.com/office/drawing/2014/main" val="10007"/>
+                  </a:ext>
+                </a:extLst>
               </a:tr>
             </a:tbl>
           </a:graphicData>
@@ -18814,7 +18433,7 @@
           <a:bodyPr wrap="square" lIns="0" tIns="0" rIns="0" bIns="0" rtlCol="0" anchor="ctr"/>
           <a:lstStyle/>
           <a:p>
-            <a:pPr indent="0" marL="0">
+            <a:pPr marL="0" indent="0">
               <a:buNone/>
             </a:pPr>
             <a:r>
@@ -18853,7 +18472,7 @@
           <a:bodyPr wrap="square" lIns="0" tIns="0" rIns="0" bIns="0" rtlCol="0" anchor="t"/>
           <a:lstStyle/>
           <a:p>
-            <a:pPr algn="l" indent="0" marL="0">
+            <a:pPr marL="0" indent="0" algn="l">
               <a:lnSpc>
                 <a:spcPct val="106000"/>
               </a:lnSpc>
@@ -18890,6 +18509,7 @@
         <a:solidFill>
           <a:srgbClr val="F5F7FB"/>
         </a:solidFill>
+        <a:effectLst/>
       </p:bgPr>
     </p:bg>
     <p:spTree>
@@ -18954,11 +18574,11 @@
           <a:bodyPr wrap="square" lIns="0" tIns="0" rIns="0" bIns="0" rtlCol="0" anchor="ctr"/>
           <a:lstStyle/>
           <a:p>
-            <a:pPr algn="ctr" indent="0" marL="0">
+            <a:pPr marL="0" indent="0" algn="ctr">
               <a:buNone/>
             </a:pPr>
             <a:r>
-              <a:rPr lang="en-US" sz="1150" b="1" spc="100" kern="0" dirty="0">
+              <a:rPr lang="en-US" sz="1150" b="1" kern="0" spc="100" dirty="0">
                 <a:solidFill>
                   <a:srgbClr val="FFFFFF"/>
                 </a:solidFill>
@@ -18993,7 +18613,7 @@
           <a:bodyPr wrap="square" lIns="0" tIns="0" rIns="0" bIns="0" rtlCol="0" anchor="ctr"/>
           <a:lstStyle/>
           <a:p>
-            <a:pPr indent="0" marL="0">
+            <a:pPr marL="0" indent="0">
               <a:buNone/>
             </a:pPr>
             <a:r>
@@ -19032,7 +18652,7 @@
           <a:bodyPr wrap="square" lIns="0" tIns="0" rIns="0" bIns="0" rtlCol="0" anchor="ctr"/>
           <a:lstStyle/>
           <a:p>
-            <a:pPr indent="0" marL="0">
+            <a:pPr marL="0" indent="0">
               <a:buNone/>
             </a:pPr>
             <a:r>
@@ -19052,7 +18672,7 @@
       </p:sp>
       <p:graphicFrame>
         <p:nvGraphicFramePr>
-          <p:cNvPr id="6" name="Chart 0" descr=""/>
+          <p:cNvPr id="6" name="Chart 0"/>
           <p:cNvGraphicFramePr/>
           <p:nvPr/>
         </p:nvGraphicFramePr>
@@ -19060,9 +18680,9 @@
           <a:off x="548640" y="1965960"/>
           <a:ext cx="6035040" cy="3017520"/>
         </p:xfrm>
-        <a:graphic xmlns:a="http://schemas.openxmlformats.org/drawingml/2006/main">
+        <a:graphic>
           <a:graphicData uri="http://schemas.openxmlformats.org/drawingml/2006/chart">
-            <c:chart xmlns:c="http://schemas.openxmlformats.org/drawingml/2006/chart" r:id="rId1"/>
+            <c:chart xmlns:c="http://schemas.openxmlformats.org/drawingml/2006/chart" xmlns:r="http://schemas.openxmlformats.org/officeDocument/2006/relationships" r:id="rId3"/>
           </a:graphicData>
         </a:graphic>
       </p:graphicFrame>
@@ -19114,7 +18734,7 @@
           <a:bodyPr wrap="square" lIns="0" tIns="0" rIns="0" bIns="0" rtlCol="0" anchor="ctr"/>
           <a:lstStyle/>
           <a:p>
-            <a:pPr algn="ctr" indent="0" marL="0">
+            <a:pPr marL="0" indent="0" algn="ctr">
               <a:buNone/>
             </a:pPr>
             <a:r>
@@ -19207,7 +18827,7 @@
           <a:bodyPr wrap="square" lIns="0" tIns="0" rIns="0" bIns="0" rtlCol="0" anchor="ctr"/>
           <a:lstStyle/>
           <a:p>
-            <a:pPr indent="0" marL="0">
+            <a:pPr marL="0" indent="0">
               <a:buNone/>
             </a:pPr>
             <a:r>
@@ -19246,7 +18866,7 @@
           <a:bodyPr wrap="square" lIns="0" tIns="0" rIns="0" bIns="0" rtlCol="0" anchor="t"/>
           <a:lstStyle/>
           <a:p>
-            <a:pPr algn="l" indent="0" marL="0">
+            <a:pPr marL="0" indent="0" algn="l">
               <a:lnSpc>
                 <a:spcPct val="102000"/>
               </a:lnSpc>
@@ -19342,7 +18962,7 @@
           <a:bodyPr wrap="square" lIns="0" tIns="0" rIns="0" bIns="0" rtlCol="0" anchor="ctr"/>
           <a:lstStyle/>
           <a:p>
-            <a:pPr indent="0" marL="0">
+            <a:pPr marL="0" indent="0">
               <a:buNone/>
             </a:pPr>
             <a:r>
@@ -19381,7 +19001,7 @@
           <a:bodyPr wrap="square" lIns="0" tIns="0" rIns="0" bIns="0" rtlCol="0" anchor="t"/>
           <a:lstStyle/>
           <a:p>
-            <a:pPr algn="l" indent="0" marL="0">
+            <a:pPr marL="0" indent="0" algn="l">
               <a:lnSpc>
                 <a:spcPct val="102000"/>
               </a:lnSpc>
@@ -19477,7 +19097,7 @@
           <a:bodyPr wrap="square" lIns="0" tIns="0" rIns="0" bIns="0" rtlCol="0" anchor="ctr"/>
           <a:lstStyle/>
           <a:p>
-            <a:pPr indent="0" marL="0">
+            <a:pPr marL="0" indent="0">
               <a:buNone/>
             </a:pPr>
             <a:r>
@@ -19516,7 +19136,7 @@
           <a:bodyPr wrap="square" lIns="0" tIns="0" rIns="0" bIns="0" rtlCol="0" anchor="t"/>
           <a:lstStyle/>
           <a:p>
-            <a:pPr algn="l" indent="0" marL="0">
+            <a:pPr marL="0" indent="0" algn="l">
               <a:lnSpc>
                 <a:spcPct val="102000"/>
               </a:lnSpc>
@@ -19612,7 +19232,7 @@
           <a:bodyPr wrap="square" lIns="0" tIns="0" rIns="0" bIns="0" rtlCol="0" anchor="ctr"/>
           <a:lstStyle/>
           <a:p>
-            <a:pPr indent="0" marL="0">
+            <a:pPr marL="0" indent="0">
               <a:buNone/>
             </a:pPr>
             <a:r>
@@ -19651,7 +19271,7 @@
           <a:bodyPr wrap="square" lIns="0" tIns="0" rIns="0" bIns="0" rtlCol="0" anchor="t"/>
           <a:lstStyle/>
           <a:p>
-            <a:pPr algn="l" indent="0" marL="0">
+            <a:pPr marL="0" indent="0" algn="l">
               <a:lnSpc>
                 <a:spcPct val="104000"/>
               </a:lnSpc>
@@ -19688,6 +19308,7 @@
         <a:solidFill>
           <a:srgbClr val="F5F7FB"/>
         </a:solidFill>
+        <a:effectLst/>
       </p:bgPr>
     </p:bg>
     <p:spTree>
@@ -19752,11 +19373,11 @@
           <a:bodyPr wrap="square" lIns="0" tIns="0" rIns="0" bIns="0" rtlCol="0" anchor="ctr"/>
           <a:lstStyle/>
           <a:p>
-            <a:pPr algn="ctr" indent="0" marL="0">
+            <a:pPr marL="0" indent="0" algn="ctr">
               <a:buNone/>
             </a:pPr>
             <a:r>
-              <a:rPr lang="en-US" sz="1150" b="1" spc="100" kern="0" dirty="0">
+              <a:rPr lang="en-US" sz="1150" b="1" kern="0" spc="100" dirty="0">
                 <a:solidFill>
                   <a:srgbClr val="FFFFFF"/>
                 </a:solidFill>
@@ -19791,7 +19412,7 @@
           <a:bodyPr wrap="square" lIns="0" tIns="0" rIns="0" bIns="0" rtlCol="0" anchor="ctr"/>
           <a:lstStyle/>
           <a:p>
-            <a:pPr indent="0" marL="0">
+            <a:pPr marL="0" indent="0">
               <a:buNone/>
             </a:pPr>
             <a:r>
@@ -19830,7 +19451,7 @@
           <a:bodyPr wrap="square" lIns="0" tIns="0" rIns="0" bIns="0" rtlCol="0" anchor="ctr"/>
           <a:lstStyle/>
           <a:p>
-            <a:pPr indent="0" marL="0">
+            <a:pPr marL="0" indent="0">
               <a:buNone/>
             </a:pPr>
             <a:r>
@@ -19923,11 +19544,11 @@
           <a:bodyPr wrap="square" lIns="0" tIns="0" rIns="0" bIns="0" rtlCol="0" anchor="ctr"/>
           <a:lstStyle/>
           <a:p>
-            <a:pPr algn="ctr" indent="0" marL="0">
+            <a:pPr marL="0" indent="0" algn="ctr">
               <a:buNone/>
             </a:pPr>
             <a:r>
-              <a:rPr lang="en-US" sz="1300" b="1" spc="100" kern="0" dirty="0">
+              <a:rPr lang="en-US" sz="1300" b="1" kern="0" spc="100" dirty="0">
                 <a:solidFill>
                   <a:srgbClr val="FFFFFF"/>
                 </a:solidFill>
@@ -19962,7 +19583,7 @@
           <a:bodyPr wrap="square" lIns="0" tIns="0" rIns="0" bIns="0" rtlCol="0" anchor="ctr"/>
           <a:lstStyle/>
           <a:p>
-            <a:pPr indent="0" marL="0">
+            <a:pPr marL="0" indent="0">
               <a:buNone/>
             </a:pPr>
             <a:r>
@@ -20001,7 +19622,7 @@
           <a:bodyPr wrap="square" lIns="0" tIns="0" rIns="0" bIns="0" rtlCol="0" anchor="t"/>
           <a:lstStyle/>
           <a:p>
-            <a:pPr algn="l" indent="0" marL="0">
+            <a:pPr marL="0" indent="0" algn="l">
               <a:lnSpc>
                 <a:spcPct val="108000"/>
               </a:lnSpc>
@@ -20097,11 +19718,11 @@
           <a:bodyPr wrap="square" lIns="0" tIns="0" rIns="0" bIns="0" rtlCol="0" anchor="ctr"/>
           <a:lstStyle/>
           <a:p>
-            <a:pPr algn="ctr" indent="0" marL="0">
+            <a:pPr marL="0" indent="0" algn="ctr">
               <a:buNone/>
             </a:pPr>
             <a:r>
-              <a:rPr lang="en-US" sz="1300" b="1" spc="100" kern="0" dirty="0">
+              <a:rPr lang="en-US" sz="1300" b="1" kern="0" spc="100" dirty="0">
                 <a:solidFill>
                   <a:srgbClr val="FFFFFF"/>
                 </a:solidFill>
@@ -20136,7 +19757,7 @@
           <a:bodyPr wrap="square" lIns="0" tIns="0" rIns="0" bIns="0" rtlCol="0" anchor="ctr"/>
           <a:lstStyle/>
           <a:p>
-            <a:pPr indent="0" marL="0">
+            <a:pPr marL="0" indent="0">
               <a:buNone/>
             </a:pPr>
             <a:r>
@@ -20175,7 +19796,7 @@
           <a:bodyPr wrap="square" lIns="0" tIns="0" rIns="0" bIns="0" rtlCol="0" anchor="t"/>
           <a:lstStyle/>
           <a:p>
-            <a:pPr algn="l" indent="0" marL="0">
+            <a:pPr marL="0" indent="0" algn="l">
               <a:lnSpc>
                 <a:spcPct val="108000"/>
               </a:lnSpc>
@@ -20271,11 +19892,11 @@
           <a:bodyPr wrap="square" lIns="0" tIns="0" rIns="0" bIns="0" rtlCol="0" anchor="ctr"/>
           <a:lstStyle/>
           <a:p>
-            <a:pPr algn="ctr" indent="0" marL="0">
+            <a:pPr marL="0" indent="0" algn="ctr">
               <a:buNone/>
             </a:pPr>
             <a:r>
-              <a:rPr lang="en-US" sz="1300" b="1" spc="100" kern="0" dirty="0">
+              <a:rPr lang="en-US" sz="1300" b="1" kern="0" spc="100" dirty="0">
                 <a:solidFill>
                   <a:srgbClr val="FFFFFF"/>
                 </a:solidFill>
@@ -20310,7 +19931,7 @@
           <a:bodyPr wrap="square" lIns="0" tIns="0" rIns="0" bIns="0" rtlCol="0" anchor="ctr"/>
           <a:lstStyle/>
           <a:p>
-            <a:pPr indent="0" marL="0">
+            <a:pPr marL="0" indent="0">
               <a:buNone/>
             </a:pPr>
             <a:r>
@@ -20349,7 +19970,7 @@
           <a:bodyPr wrap="square" lIns="0" tIns="0" rIns="0" bIns="0" rtlCol="0" anchor="t"/>
           <a:lstStyle/>
           <a:p>
-            <a:pPr algn="l" indent="0" marL="0">
+            <a:pPr marL="0" indent="0" algn="l">
               <a:lnSpc>
                 <a:spcPct val="108000"/>
               </a:lnSpc>
@@ -20445,11 +20066,11 @@
           <a:bodyPr wrap="square" lIns="0" tIns="0" rIns="0" bIns="0" rtlCol="0" anchor="ctr"/>
           <a:lstStyle/>
           <a:p>
-            <a:pPr algn="ctr" indent="0" marL="0">
+            <a:pPr marL="0" indent="0" algn="ctr">
               <a:buNone/>
             </a:pPr>
             <a:r>
-              <a:rPr lang="en-US" sz="1300" b="1" spc="100" kern="0" dirty="0">
+              <a:rPr lang="en-US" sz="1300" b="1" kern="0" spc="100" dirty="0">
                 <a:solidFill>
                   <a:srgbClr val="FFFFFF"/>
                 </a:solidFill>
@@ -20484,7 +20105,7 @@
           <a:bodyPr wrap="square" lIns="0" tIns="0" rIns="0" bIns="0" rtlCol="0" anchor="ctr"/>
           <a:lstStyle/>
           <a:p>
-            <a:pPr indent="0" marL="0">
+            <a:pPr marL="0" indent="0">
               <a:buNone/>
             </a:pPr>
             <a:r>
@@ -20523,7 +20144,7 @@
           <a:bodyPr wrap="square" lIns="0" tIns="0" rIns="0" bIns="0" rtlCol="0" anchor="t"/>
           <a:lstStyle/>
           <a:p>
-            <a:pPr algn="l" indent="0" marL="0">
+            <a:pPr marL="0" indent="0" algn="l">
               <a:lnSpc>
                 <a:spcPct val="108000"/>
               </a:lnSpc>
@@ -20565,7 +20186,7 @@
           <a:bodyPr wrap="square" lIns="0" tIns="0" rIns="0" bIns="0" rtlCol="0" anchor="ctr"/>
           <a:lstStyle/>
           <a:p>
-            <a:pPr indent="0" marL="0">
+            <a:pPr marL="0" indent="0">
               <a:buNone/>
             </a:pPr>
             <a:r>
@@ -20599,6 +20220,7 @@
         <a:solidFill>
           <a:srgbClr val="F5F7FB"/>
         </a:solidFill>
+        <a:effectLst/>
       </p:bgPr>
     </p:bg>
     <p:spTree>
@@ -20663,11 +20285,11 @@
           <a:bodyPr wrap="square" lIns="0" tIns="0" rIns="0" bIns="0" rtlCol="0" anchor="ctr"/>
           <a:lstStyle/>
           <a:p>
-            <a:pPr algn="ctr" indent="0" marL="0">
+            <a:pPr marL="0" indent="0" algn="ctr">
               <a:buNone/>
             </a:pPr>
             <a:r>
-              <a:rPr lang="en-US" sz="1150" b="1" spc="100" kern="0" dirty="0">
+              <a:rPr lang="en-US" sz="1150" b="1" kern="0" spc="100" dirty="0">
                 <a:solidFill>
                   <a:srgbClr val="FFFFFF"/>
                 </a:solidFill>
@@ -20702,7 +20324,7 @@
           <a:bodyPr wrap="square" lIns="0" tIns="0" rIns="0" bIns="0" rtlCol="0" anchor="ctr"/>
           <a:lstStyle/>
           <a:p>
-            <a:pPr indent="0" marL="0">
+            <a:pPr marL="0" indent="0">
               <a:buNone/>
             </a:pPr>
             <a:r>
@@ -20741,7 +20363,7 @@
           <a:bodyPr wrap="square" lIns="0" tIns="0" rIns="0" bIns="0" rtlCol="0" anchor="ctr"/>
           <a:lstStyle/>
           <a:p>
-            <a:pPr indent="0" marL="0">
+            <a:pPr marL="0" indent="0">
               <a:buNone/>
             </a:pPr>
             <a:r>
@@ -20834,11 +20456,11 @@
           <a:bodyPr wrap="square" lIns="0" tIns="0" rIns="0" bIns="0" rtlCol="0" anchor="ctr"/>
           <a:lstStyle/>
           <a:p>
-            <a:pPr algn="ctr" indent="0" marL="0">
+            <a:pPr marL="0" indent="0" algn="ctr">
               <a:buNone/>
             </a:pPr>
             <a:r>
-              <a:rPr lang="en-US" sz="1300" b="1" spc="100" kern="0" dirty="0">
+              <a:rPr lang="en-US" sz="1300" b="1" kern="0" spc="100" dirty="0">
                 <a:solidFill>
                   <a:srgbClr val="FFFFFF"/>
                 </a:solidFill>
@@ -20873,7 +20495,7 @@
           <a:bodyPr wrap="square" lIns="0" tIns="0" rIns="0" bIns="0" rtlCol="0" anchor="ctr"/>
           <a:lstStyle/>
           <a:p>
-            <a:pPr indent="0" marL="0">
+            <a:pPr marL="0" indent="0">
               <a:buNone/>
             </a:pPr>
             <a:r>
@@ -20912,7 +20534,7 @@
           <a:bodyPr wrap="square" lIns="0" tIns="0" rIns="0" bIns="0" rtlCol="0" anchor="ctr"/>
           <a:lstStyle/>
           <a:p>
-            <a:pPr indent="0" marL="0">
+            <a:pPr marL="0" indent="0">
               <a:buNone/>
             </a:pPr>
             <a:r>
@@ -20951,7 +20573,7 @@
           <a:bodyPr wrap="square" lIns="0" tIns="0" rIns="0" bIns="0" rtlCol="0" anchor="ctr"/>
           <a:lstStyle/>
           <a:p>
-            <a:pPr algn="l" indent="0" marL="0">
+            <a:pPr marL="0" indent="0" algn="l">
               <a:lnSpc>
                 <a:spcPct val="104000"/>
               </a:lnSpc>
@@ -21047,11 +20669,11 @@
           <a:bodyPr wrap="square" lIns="0" tIns="0" rIns="0" bIns="0" rtlCol="0" anchor="ctr"/>
           <a:lstStyle/>
           <a:p>
-            <a:pPr algn="ctr" indent="0" marL="0">
+            <a:pPr marL="0" indent="0" algn="ctr">
               <a:buNone/>
             </a:pPr>
             <a:r>
-              <a:rPr lang="en-US" sz="1300" b="1" spc="100" kern="0" dirty="0">
+              <a:rPr lang="en-US" sz="1300" b="1" kern="0" spc="100" dirty="0">
                 <a:solidFill>
                   <a:srgbClr val="FFFFFF"/>
                 </a:solidFill>
@@ -21086,7 +20708,7 @@
           <a:bodyPr wrap="square" lIns="0" tIns="0" rIns="0" bIns="0" rtlCol="0" anchor="ctr"/>
           <a:lstStyle/>
           <a:p>
-            <a:pPr indent="0" marL="0">
+            <a:pPr marL="0" indent="0">
               <a:buNone/>
             </a:pPr>
             <a:r>
@@ -21125,7 +20747,7 @@
           <a:bodyPr wrap="square" lIns="0" tIns="0" rIns="0" bIns="0" rtlCol="0" anchor="ctr"/>
           <a:lstStyle/>
           <a:p>
-            <a:pPr indent="0" marL="0">
+            <a:pPr marL="0" indent="0">
               <a:buNone/>
             </a:pPr>
             <a:r>
@@ -21164,7 +20786,7 @@
           <a:bodyPr wrap="square" lIns="0" tIns="0" rIns="0" bIns="0" rtlCol="0" anchor="ctr"/>
           <a:lstStyle/>
           <a:p>
-            <a:pPr algn="l" indent="0" marL="0">
+            <a:pPr marL="0" indent="0" algn="l">
               <a:lnSpc>
                 <a:spcPct val="104000"/>
               </a:lnSpc>
@@ -21260,11 +20882,11 @@
           <a:bodyPr wrap="square" lIns="0" tIns="0" rIns="0" bIns="0" rtlCol="0" anchor="ctr"/>
           <a:lstStyle/>
           <a:p>
-            <a:pPr algn="ctr" indent="0" marL="0">
+            <a:pPr marL="0" indent="0" algn="ctr">
               <a:buNone/>
             </a:pPr>
             <a:r>
-              <a:rPr lang="en-US" sz="1300" b="1" spc="100" kern="0" dirty="0">
+              <a:rPr lang="en-US" sz="1300" b="1" kern="0" spc="100" dirty="0">
                 <a:solidFill>
                   <a:srgbClr val="FFFFFF"/>
                 </a:solidFill>
@@ -21299,7 +20921,7 @@
           <a:bodyPr wrap="square" lIns="0" tIns="0" rIns="0" bIns="0" rtlCol="0" anchor="ctr"/>
           <a:lstStyle/>
           <a:p>
-            <a:pPr indent="0" marL="0">
+            <a:pPr marL="0" indent="0">
               <a:buNone/>
             </a:pPr>
             <a:r>
@@ -21338,7 +20960,7 @@
           <a:bodyPr wrap="square" lIns="0" tIns="0" rIns="0" bIns="0" rtlCol="0" anchor="ctr"/>
           <a:lstStyle/>
           <a:p>
-            <a:pPr indent="0" marL="0">
+            <a:pPr marL="0" indent="0">
               <a:buNone/>
             </a:pPr>
             <a:r>
@@ -21377,7 +20999,7 @@
           <a:bodyPr wrap="square" lIns="0" tIns="0" rIns="0" bIns="0" rtlCol="0" anchor="ctr"/>
           <a:lstStyle/>
           <a:p>
-            <a:pPr algn="l" indent="0" marL="0">
+            <a:pPr marL="0" indent="0" algn="l">
               <a:lnSpc>
                 <a:spcPct val="104000"/>
               </a:lnSpc>
@@ -21473,11 +21095,11 @@
           <a:bodyPr wrap="square" lIns="0" tIns="0" rIns="0" bIns="0" rtlCol="0" anchor="ctr"/>
           <a:lstStyle/>
           <a:p>
-            <a:pPr algn="ctr" indent="0" marL="0">
+            <a:pPr marL="0" indent="0" algn="ctr">
               <a:buNone/>
             </a:pPr>
             <a:r>
-              <a:rPr lang="en-US" sz="1300" b="1" spc="100" kern="0" dirty="0">
+              <a:rPr lang="en-US" sz="1300" b="1" kern="0" spc="100" dirty="0">
                 <a:solidFill>
                   <a:srgbClr val="FFFFFF"/>
                 </a:solidFill>
@@ -21512,7 +21134,7 @@
           <a:bodyPr wrap="square" lIns="0" tIns="0" rIns="0" bIns="0" rtlCol="0" anchor="ctr"/>
           <a:lstStyle/>
           <a:p>
-            <a:pPr indent="0" marL="0">
+            <a:pPr marL="0" indent="0">
               <a:buNone/>
             </a:pPr>
             <a:r>
@@ -21551,7 +21173,7 @@
           <a:bodyPr wrap="square" lIns="0" tIns="0" rIns="0" bIns="0" rtlCol="0" anchor="ctr"/>
           <a:lstStyle/>
           <a:p>
-            <a:pPr indent="0" marL="0">
+            <a:pPr marL="0" indent="0">
               <a:buNone/>
             </a:pPr>
             <a:r>
@@ -21590,7 +21212,7 @@
           <a:bodyPr wrap="square" lIns="0" tIns="0" rIns="0" bIns="0" rtlCol="0" anchor="ctr"/>
           <a:lstStyle/>
           <a:p>
-            <a:pPr algn="l" indent="0" marL="0">
+            <a:pPr marL="0" indent="0" algn="l">
               <a:lnSpc>
                 <a:spcPct val="104000"/>
               </a:lnSpc>
@@ -21686,11 +21308,11 @@
           <a:bodyPr wrap="square" lIns="0" tIns="0" rIns="0" bIns="0" rtlCol="0" anchor="ctr"/>
           <a:lstStyle/>
           <a:p>
-            <a:pPr algn="ctr" indent="0" marL="0">
+            <a:pPr marL="0" indent="0" algn="ctr">
               <a:buNone/>
             </a:pPr>
             <a:r>
-              <a:rPr lang="en-US" sz="1300" b="1" spc="100" kern="0" dirty="0">
+              <a:rPr lang="en-US" sz="1300" b="1" kern="0" spc="100" dirty="0">
                 <a:solidFill>
                   <a:srgbClr val="FFFFFF"/>
                 </a:solidFill>
@@ -21725,7 +21347,7 @@
           <a:bodyPr wrap="square" lIns="0" tIns="0" rIns="0" bIns="0" rtlCol="0" anchor="ctr"/>
           <a:lstStyle/>
           <a:p>
-            <a:pPr indent="0" marL="0">
+            <a:pPr marL="0" indent="0">
               <a:buNone/>
             </a:pPr>
             <a:r>
@@ -21764,7 +21386,7 @@
           <a:bodyPr wrap="square" lIns="0" tIns="0" rIns="0" bIns="0" rtlCol="0" anchor="ctr"/>
           <a:lstStyle/>
           <a:p>
-            <a:pPr indent="0" marL="0">
+            <a:pPr marL="0" indent="0">
               <a:buNone/>
             </a:pPr>
             <a:r>
@@ -21803,7 +21425,7 @@
           <a:bodyPr wrap="square" lIns="0" tIns="0" rIns="0" bIns="0" rtlCol="0" anchor="ctr"/>
           <a:lstStyle/>
           <a:p>
-            <a:pPr algn="l" indent="0" marL="0">
+            <a:pPr marL="0" indent="0" algn="l">
               <a:lnSpc>
                 <a:spcPct val="104000"/>
               </a:lnSpc>
@@ -21872,7 +21494,7 @@
           <a:bodyPr wrap="square" lIns="0" tIns="0" rIns="0" bIns="0" rtlCol="0" anchor="ctr"/>
           <a:lstStyle/>
           <a:p>
-            <a:pPr algn="l" indent="0" marL="0">
+            <a:pPr marL="0" indent="0" algn="l">
               <a:lnSpc>
                 <a:spcPct val="108000"/>
               </a:lnSpc>
@@ -21909,6 +21531,7 @@
         <a:solidFill>
           <a:srgbClr val="F5F7FB"/>
         </a:solidFill>
+        <a:effectLst/>
       </p:bgPr>
     </p:bg>
     <p:spTree>
@@ -21973,11 +21596,11 @@
           <a:bodyPr wrap="square" lIns="0" tIns="0" rIns="0" bIns="0" rtlCol="0" anchor="ctr"/>
           <a:lstStyle/>
           <a:p>
-            <a:pPr algn="ctr" indent="0" marL="0">
+            <a:pPr marL="0" indent="0" algn="ctr">
               <a:buNone/>
             </a:pPr>
             <a:r>
-              <a:rPr lang="en-US" sz="1150" b="1" spc="100" kern="0" dirty="0">
+              <a:rPr lang="en-US" sz="1150" b="1" kern="0" spc="100" dirty="0">
                 <a:solidFill>
                   <a:srgbClr val="FFFFFF"/>
                 </a:solidFill>
@@ -22012,7 +21635,7 @@
           <a:bodyPr wrap="square" lIns="0" tIns="0" rIns="0" bIns="0" rtlCol="0" anchor="ctr"/>
           <a:lstStyle/>
           <a:p>
-            <a:pPr indent="0" marL="0">
+            <a:pPr marL="0" indent="0">
               <a:buNone/>
             </a:pPr>
             <a:r>
@@ -22051,7 +21674,7 @@
           <a:bodyPr wrap="square" lIns="0" tIns="0" rIns="0" bIns="0" rtlCol="0" anchor="ctr"/>
           <a:lstStyle/>
           <a:p>
-            <a:pPr indent="0" marL="0">
+            <a:pPr marL="0" indent="0">
               <a:buNone/>
             </a:pPr>
             <a:r>
@@ -22117,11 +21740,11 @@
           <a:bodyPr wrap="square" lIns="0" tIns="0" rIns="0" bIns="0" rtlCol="0" anchor="ctr"/>
           <a:lstStyle/>
           <a:p>
-            <a:pPr indent="0" marL="0">
+            <a:pPr marL="0" indent="0">
               <a:buNone/>
             </a:pPr>
             <a:r>
-              <a:rPr lang="en-US" sz="1100" b="1" spc="100" kern="0" dirty="0">
+              <a:rPr lang="en-US" sz="1100" b="1" kern="0" spc="100" dirty="0">
                 <a:solidFill>
                   <a:srgbClr val="1A56E8"/>
                 </a:solidFill>
@@ -22156,7 +21779,7 @@
           <a:bodyPr wrap="square" lIns="0" tIns="0" rIns="0" bIns="0" rtlCol="0" anchor="ctr"/>
           <a:lstStyle/>
           <a:p>
-            <a:pPr indent="0" marL="0">
+            <a:pPr marL="0" indent="0">
               <a:buNone/>
             </a:pPr>
             <a:r>
@@ -22195,7 +21818,7 @@
           <a:bodyPr wrap="square" lIns="0" tIns="0" rIns="0" bIns="0" rtlCol="0" anchor="t"/>
           <a:lstStyle/>
           <a:p>
-            <a:pPr algn="l" indent="0" marL="0">
+            <a:pPr marL="0" indent="0" algn="l">
               <a:lnSpc>
                 <a:spcPct val="112000"/>
               </a:lnSpc>
@@ -22215,7 +21838,7 @@
             <a:endParaRPr lang="en-US" sz="1250" dirty="0"/>
           </a:p>
           <a:p>
-            <a:pPr algn="l" indent="0" marL="0">
+            <a:pPr marL="0" indent="0" algn="l">
               <a:lnSpc>
                 <a:spcPct val="112000"/>
               </a:lnSpc>
@@ -22284,11 +21907,11 @@
           <a:bodyPr wrap="square" lIns="0" tIns="0" rIns="0" bIns="0" rtlCol="0" anchor="ctr"/>
           <a:lstStyle/>
           <a:p>
-            <a:pPr indent="0" marL="0">
+            <a:pPr marL="0" indent="0">
               <a:buNone/>
             </a:pPr>
             <a:r>
-              <a:rPr lang="en-US" sz="1100" b="1" spc="100" kern="0" dirty="0">
+              <a:rPr lang="en-US" sz="1100" b="1" kern="0" spc="100" dirty="0">
                 <a:solidFill>
                   <a:srgbClr val="E6115E"/>
                 </a:solidFill>
@@ -22323,7 +21946,7 @@
           <a:bodyPr wrap="square" lIns="0" tIns="0" rIns="0" bIns="0" rtlCol="0" anchor="ctr"/>
           <a:lstStyle/>
           <a:p>
-            <a:pPr indent="0" marL="0">
+            <a:pPr marL="0" indent="0">
               <a:buNone/>
             </a:pPr>
             <a:r>
@@ -22362,7 +21985,7 @@
           <a:bodyPr wrap="square" lIns="0" tIns="0" rIns="0" bIns="0" rtlCol="0" anchor="t"/>
           <a:lstStyle/>
           <a:p>
-            <a:pPr algn="l" indent="0" marL="0">
+            <a:pPr marL="0" indent="0" algn="l">
               <a:lnSpc>
                 <a:spcPct val="112000"/>
               </a:lnSpc>
@@ -22382,7 +22005,7 @@
             <a:endParaRPr lang="en-US" sz="1250" dirty="0"/>
           </a:p>
           <a:p>
-            <a:pPr algn="l" indent="0" marL="0">
+            <a:pPr marL="0" indent="0" algn="l">
               <a:lnSpc>
                 <a:spcPct val="112000"/>
               </a:lnSpc>
@@ -22478,7 +22101,7 @@
           <a:bodyPr wrap="square" lIns="0" tIns="0" rIns="0" bIns="0" rtlCol="0" anchor="ctr"/>
           <a:lstStyle/>
           <a:p>
-            <a:pPr indent="0" marL="0">
+            <a:pPr marL="0" indent="0">
               <a:buNone/>
             </a:pPr>
             <a:r>
@@ -22517,7 +22140,7 @@
           <a:bodyPr wrap="square" lIns="0" tIns="0" rIns="0" bIns="0" rtlCol="0" anchor="t"/>
           <a:lstStyle/>
           <a:p>
-            <a:pPr algn="l" indent="0" marL="0">
+            <a:pPr marL="0" indent="0" algn="l">
               <a:lnSpc>
                 <a:spcPct val="110000"/>
               </a:lnSpc>
@@ -22613,7 +22236,7 @@
           <a:bodyPr wrap="square" lIns="0" tIns="0" rIns="0" bIns="0" rtlCol="0" anchor="ctr"/>
           <a:lstStyle/>
           <a:p>
-            <a:pPr indent="0" marL="0">
+            <a:pPr marL="0" indent="0">
               <a:buNone/>
             </a:pPr>
             <a:r>
@@ -22652,7 +22275,7 @@
           <a:bodyPr wrap="square" lIns="0" tIns="0" rIns="0" bIns="0" rtlCol="0" anchor="t"/>
           <a:lstStyle/>
           <a:p>
-            <a:pPr algn="l" indent="0" marL="0">
+            <a:pPr marL="0" indent="0" algn="l">
               <a:lnSpc>
                 <a:spcPct val="105000"/>
               </a:lnSpc>
@@ -22689,6 +22312,7 @@
         <a:solidFill>
           <a:srgbClr val="F5F7FB"/>
         </a:solidFill>
+        <a:effectLst/>
       </p:bgPr>
     </p:bg>
     <p:spTree>
@@ -22753,11 +22377,11 @@
           <a:bodyPr wrap="square" lIns="0" tIns="0" rIns="0" bIns="0" rtlCol="0" anchor="ctr"/>
           <a:lstStyle/>
           <a:p>
-            <a:pPr algn="ctr" indent="0" marL="0">
+            <a:pPr marL="0" indent="0" algn="ctr">
               <a:buNone/>
             </a:pPr>
             <a:r>
-              <a:rPr lang="en-US" sz="1150" b="1" spc="100" kern="0" dirty="0">
+              <a:rPr lang="en-US" sz="1150" b="1" kern="0" spc="100" dirty="0">
                 <a:solidFill>
                   <a:srgbClr val="FFFFFF"/>
                 </a:solidFill>
@@ -22792,7 +22416,7 @@
           <a:bodyPr wrap="square" lIns="0" tIns="0" rIns="0" bIns="0" rtlCol="0" anchor="ctr"/>
           <a:lstStyle/>
           <a:p>
-            <a:pPr indent="0" marL="0">
+            <a:pPr marL="0" indent="0">
               <a:buNone/>
             </a:pPr>
             <a:r>
@@ -22831,7 +22455,7 @@
           <a:bodyPr wrap="square" lIns="0" tIns="0" rIns="0" bIns="0" rtlCol="0" anchor="ctr"/>
           <a:lstStyle/>
           <a:p>
-            <a:pPr indent="0" marL="0">
+            <a:pPr marL="0" indent="0">
               <a:buNone/>
             </a:pPr>
             <a:r>
@@ -22924,7 +22548,7 @@
           <a:bodyPr wrap="square" lIns="0" tIns="0" rIns="0" bIns="0" rtlCol="0" anchor="ctr"/>
           <a:lstStyle/>
           <a:p>
-            <a:pPr indent="0" marL="0">
+            <a:pPr marL="0" indent="0">
               <a:buNone/>
             </a:pPr>
             <a:r>
@@ -22963,7 +22587,7 @@
           <a:bodyPr wrap="square" lIns="0" tIns="0" rIns="0" bIns="0" rtlCol="0" anchor="t"/>
           <a:lstStyle/>
           <a:p>
-            <a:pPr algn="l" indent="0" marL="0">
+            <a:pPr marL="0" indent="0" algn="l">
               <a:lnSpc>
                 <a:spcPct val="108000"/>
               </a:lnSpc>
@@ -23005,7 +22629,7 @@
           <a:bodyPr wrap="square" lIns="0" tIns="0" rIns="0" bIns="0" rtlCol="0" anchor="t"/>
           <a:lstStyle/>
           <a:p>
-            <a:pPr algn="l" indent="0" marL="0">
+            <a:pPr marL="0" indent="0" algn="l">
               <a:lnSpc>
                 <a:spcPct val="106000"/>
               </a:lnSpc>
@@ -23101,7 +22725,7 @@
           <a:bodyPr wrap="square" lIns="0" tIns="0" rIns="0" bIns="0" rtlCol="0" anchor="ctr"/>
           <a:lstStyle/>
           <a:p>
-            <a:pPr indent="0" marL="0">
+            <a:pPr marL="0" indent="0">
               <a:buNone/>
             </a:pPr>
             <a:r>
@@ -23140,7 +22764,7 @@
           <a:bodyPr wrap="square" lIns="0" tIns="0" rIns="0" bIns="0" rtlCol="0" anchor="t"/>
           <a:lstStyle/>
           <a:p>
-            <a:pPr algn="l" indent="0" marL="0">
+            <a:pPr marL="0" indent="0" algn="l">
               <a:lnSpc>
                 <a:spcPct val="110000"/>
               </a:lnSpc>
@@ -23236,7 +22860,7 @@
           <a:bodyPr wrap="square" lIns="0" tIns="0" rIns="0" bIns="0" rtlCol="0" anchor="ctr"/>
           <a:lstStyle/>
           <a:p>
-            <a:pPr indent="0" marL="0">
+            <a:pPr marL="0" indent="0">
               <a:buNone/>
             </a:pPr>
             <a:r>
@@ -23275,7 +22899,7 @@
           <a:bodyPr wrap="square" lIns="0" tIns="0" rIns="0" bIns="0" rtlCol="0" anchor="t"/>
           <a:lstStyle/>
           <a:p>
-            <a:pPr algn="l" indent="0" marL="0">
+            <a:pPr marL="0" indent="0" algn="l">
               <a:lnSpc>
                 <a:spcPct val="104000"/>
               </a:lnSpc>
@@ -23371,7 +22995,7 @@
           <a:bodyPr wrap="square" lIns="0" tIns="0" rIns="0" bIns="0" rtlCol="0" anchor="ctr"/>
           <a:lstStyle/>
           <a:p>
-            <a:pPr indent="0" marL="0">
+            <a:pPr marL="0" indent="0">
               <a:buNone/>
             </a:pPr>
             <a:r>
@@ -23410,7 +23034,7 @@
           <a:bodyPr wrap="square" lIns="0" tIns="0" rIns="0" bIns="0" rtlCol="0" anchor="t"/>
           <a:lstStyle/>
           <a:p>
-            <a:pPr algn="l" indent="0" marL="0">
+            <a:pPr marL="0" indent="0" algn="l">
               <a:lnSpc>
                 <a:spcPct val="104000"/>
               </a:lnSpc>
@@ -23506,7 +23130,7 @@
           <a:bodyPr wrap="square" lIns="0" tIns="0" rIns="0" bIns="0" rtlCol="0" anchor="ctr"/>
           <a:lstStyle/>
           <a:p>
-            <a:pPr indent="0" marL="0">
+            <a:pPr marL="0" indent="0">
               <a:buNone/>
             </a:pPr>
             <a:r>
@@ -23545,7 +23169,7 @@
           <a:bodyPr wrap="square" lIns="0" tIns="0" rIns="0" bIns="0" rtlCol="0" anchor="t"/>
           <a:lstStyle/>
           <a:p>
-            <a:pPr algn="l" indent="0" marL="0">
+            <a:pPr marL="0" indent="0" algn="l">
               <a:lnSpc>
                 <a:spcPct val="104000"/>
               </a:lnSpc>
@@ -23641,7 +23265,7 @@
           <a:bodyPr wrap="square" lIns="0" tIns="0" rIns="0" bIns="0" rtlCol="0" anchor="ctr"/>
           <a:lstStyle/>
           <a:p>
-            <a:pPr indent="0" marL="0">
+            <a:pPr marL="0" indent="0">
               <a:buNone/>
             </a:pPr>
             <a:r>
@@ -23680,7 +23304,7 @@
           <a:bodyPr wrap="square" lIns="0" tIns="0" rIns="0" bIns="0" rtlCol="0" anchor="t"/>
           <a:lstStyle/>
           <a:p>
-            <a:pPr algn="l" indent="0" marL="0">
+            <a:pPr marL="0" indent="0" algn="l">
               <a:lnSpc>
                 <a:spcPct val="104000"/>
               </a:lnSpc>
@@ -23776,7 +23400,7 @@
           <a:bodyPr wrap="square" lIns="0" tIns="0" rIns="0" bIns="0" rtlCol="0" anchor="ctr"/>
           <a:lstStyle/>
           <a:p>
-            <a:pPr indent="0" marL="0">
+            <a:pPr marL="0" indent="0">
               <a:buNone/>
             </a:pPr>
             <a:r>
@@ -23815,7 +23439,7 @@
           <a:bodyPr wrap="square" lIns="0" tIns="0" rIns="0" bIns="0" rtlCol="0" anchor="t"/>
           <a:lstStyle/>
           <a:p>
-            <a:pPr algn="l" indent="0" marL="0">
+            <a:pPr marL="0" indent="0" algn="l">
               <a:lnSpc>
                 <a:spcPct val="104000"/>
               </a:lnSpc>
@@ -23911,7 +23535,7 @@
           <a:bodyPr wrap="square" lIns="0" tIns="0" rIns="0" bIns="0" rtlCol="0" anchor="ctr"/>
           <a:lstStyle/>
           <a:p>
-            <a:pPr indent="0" marL="0">
+            <a:pPr marL="0" indent="0">
               <a:buNone/>
             </a:pPr>
             <a:r>
@@ -23950,7 +23574,7 @@
           <a:bodyPr wrap="square" lIns="0" tIns="0" rIns="0" bIns="0" rtlCol="0" anchor="t"/>
           <a:lstStyle/>
           <a:p>
-            <a:pPr algn="l" indent="0" marL="0">
+            <a:pPr marL="0" indent="0" algn="l">
               <a:lnSpc>
                 <a:spcPct val="104000"/>
               </a:lnSpc>
@@ -23992,7 +23616,7 @@
           <a:bodyPr wrap="square" lIns="0" tIns="0" rIns="0" bIns="0" rtlCol="0" anchor="ctr"/>
           <a:lstStyle/>
           <a:p>
-            <a:pPr indent="0" marL="0">
+            <a:pPr marL="0" indent="0">
               <a:buNone/>
             </a:pPr>
             <a:r>
@@ -24026,6 +23650,7 @@
         <a:solidFill>
           <a:srgbClr val="0A2559"/>
         </a:solidFill>
+        <a:effectLst/>
       </p:bgPr>
     </p:bg>
     <p:spTree>
@@ -25315,11 +24940,11 @@
           <a:bodyPr wrap="square" lIns="0" tIns="0" rIns="0" bIns="0" rtlCol="0" anchor="ctr"/>
           <a:lstStyle/>
           <a:p>
-            <a:pPr algn="ctr" indent="0" marL="0">
+            <a:pPr marL="0" indent="0" algn="ctr">
               <a:buNone/>
             </a:pPr>
             <a:r>
-              <a:rPr lang="en-US" sz="1150" b="1" spc="100" kern="0" dirty="0">
+              <a:rPr lang="en-US" sz="1150" b="1" kern="0" spc="100" dirty="0">
                 <a:solidFill>
                   <a:srgbClr val="FFFFFF"/>
                 </a:solidFill>
@@ -25354,7 +24979,7 @@
           <a:bodyPr wrap="square" lIns="0" tIns="0" rIns="0" bIns="0" rtlCol="0" anchor="ctr"/>
           <a:lstStyle/>
           <a:p>
-            <a:pPr indent="0" marL="0">
+            <a:pPr marL="0" indent="0">
               <a:buNone/>
             </a:pPr>
             <a:r>
@@ -25393,7 +25018,7 @@
           <a:bodyPr wrap="square" lIns="0" tIns="0" rIns="0" bIns="0" rtlCol="0" anchor="t"/>
           <a:lstStyle/>
           <a:p>
-            <a:pPr algn="l" indent="0" marL="0">
+            <a:pPr marL="0" indent="0" algn="l">
               <a:lnSpc>
                 <a:spcPct val="108000"/>
               </a:lnSpc>
@@ -25489,7 +25114,7 @@
           <a:bodyPr wrap="square" lIns="0" tIns="0" rIns="0" bIns="0" rtlCol="0" anchor="ctr"/>
           <a:lstStyle/>
           <a:p>
-            <a:pPr indent="0" marL="0">
+            <a:pPr marL="0" indent="0">
               <a:buNone/>
             </a:pPr>
             <a:r>
@@ -25730,7 +25355,7 @@
           <a:bodyPr wrap="square" lIns="0" tIns="0" rIns="0" bIns="0" rtlCol="0" anchor="ctr"/>
           <a:lstStyle/>
           <a:p>
-            <a:pPr indent="0" marL="0">
+            <a:pPr marL="0" indent="0">
               <a:buNone/>
             </a:pPr>
             <a:r>
@@ -25769,7 +25394,7 @@
           <a:bodyPr wrap="square" lIns="0" tIns="0" rIns="0" bIns="0" rtlCol="0" anchor="t"/>
           <a:lstStyle/>
           <a:p>
-            <a:pPr algn="l" indent="0" marL="0">
+            <a:pPr marL="0" indent="0" algn="l">
               <a:lnSpc>
                 <a:spcPct val="110000"/>
               </a:lnSpc>
@@ -25789,7 +25414,7 @@
             <a:endParaRPr lang="en-US" sz="1150" dirty="0"/>
           </a:p>
           <a:p>
-            <a:pPr algn="l" indent="0" marL="0">
+            <a:pPr marL="0" indent="0" algn="l">
               <a:lnSpc>
                 <a:spcPct val="110000"/>
               </a:lnSpc>
@@ -25798,7 +25423,7 @@
             <a:endParaRPr lang="en-US" sz="1150" dirty="0"/>
           </a:p>
           <a:p>
-            <a:pPr algn="l" indent="0" marL="0">
+            <a:pPr marL="0" indent="0" algn="l">
               <a:lnSpc>
                 <a:spcPct val="110000"/>
               </a:lnSpc>
@@ -25818,7 +25443,7 @@
             <a:endParaRPr lang="en-US" sz="1150" dirty="0"/>
           </a:p>
           <a:p>
-            <a:pPr algn="l" indent="0" marL="0">
+            <a:pPr marL="0" indent="0" algn="l">
               <a:lnSpc>
                 <a:spcPct val="110000"/>
               </a:lnSpc>
@@ -25827,7 +25452,7 @@
             <a:endParaRPr lang="en-US" sz="1150" dirty="0"/>
           </a:p>
           <a:p>
-            <a:pPr algn="l" indent="0" marL="0">
+            <a:pPr marL="0" indent="0" algn="l">
               <a:lnSpc>
                 <a:spcPct val="110000"/>
               </a:lnSpc>
@@ -25923,7 +25548,7 @@
           <a:bodyPr wrap="square" lIns="0" tIns="0" rIns="0" bIns="0" rtlCol="0" anchor="ctr"/>
           <a:lstStyle/>
           <a:p>
-            <a:pPr indent="0" marL="0">
+            <a:pPr marL="0" indent="0">
               <a:buNone/>
             </a:pPr>
             <a:r>
@@ -25962,7 +25587,7 @@
           <a:bodyPr wrap="square" lIns="0" tIns="0" rIns="0" bIns="0" rtlCol="0" anchor="t"/>
           <a:lstStyle/>
           <a:p>
-            <a:pPr algn="l" indent="0" marL="0">
+            <a:pPr marL="0" indent="0" algn="l">
               <a:lnSpc>
                 <a:spcPct val="110000"/>
               </a:lnSpc>
@@ -26004,7 +25629,7 @@
           <a:bodyPr wrap="square" lIns="0" tIns="0" rIns="0" bIns="0" rtlCol="0" anchor="ctr"/>
           <a:lstStyle/>
           <a:p>
-            <a:pPr indent="0" marL="0">
+            <a:pPr marL="0" indent="0">
               <a:buNone/>
             </a:pPr>
             <a:r>
@@ -26038,6 +25663,7 @@
         <a:solidFill>
           <a:srgbClr val="F5F7FB"/>
         </a:solidFill>
+        <a:effectLst/>
       </p:bgPr>
     </p:bg>
     <p:spTree>
@@ -26102,11 +25728,11 @@
           <a:bodyPr wrap="square" lIns="0" tIns="0" rIns="0" bIns="0" rtlCol="0" anchor="ctr"/>
           <a:lstStyle/>
           <a:p>
-            <a:pPr algn="ctr" indent="0" marL="0">
+            <a:pPr marL="0" indent="0" algn="ctr">
               <a:buNone/>
             </a:pPr>
             <a:r>
-              <a:rPr lang="en-US" sz="1150" b="1" spc="100" kern="0" dirty="0">
+              <a:rPr lang="en-US" sz="1150" b="1" kern="0" spc="100" dirty="0">
                 <a:solidFill>
                   <a:srgbClr val="FFFFFF"/>
                 </a:solidFill>
@@ -26141,7 +25767,7 @@
           <a:bodyPr wrap="square" lIns="0" tIns="0" rIns="0" bIns="0" rtlCol="0" anchor="ctr"/>
           <a:lstStyle/>
           <a:p>
-            <a:pPr indent="0" marL="0">
+            <a:pPr marL="0" indent="0">
               <a:buNone/>
             </a:pPr>
             <a:r>
@@ -26180,7 +25806,7 @@
           <a:bodyPr wrap="square" lIns="0" tIns="0" rIns="0" bIns="0" rtlCol="0" anchor="ctr"/>
           <a:lstStyle/>
           <a:p>
-            <a:pPr indent="0" marL="0">
+            <a:pPr marL="0" indent="0">
               <a:buNone/>
             </a:pPr>
             <a:r>
@@ -26200,7 +25826,7 @@
       </p:sp>
       <p:graphicFrame>
         <p:nvGraphicFramePr>
-          <p:cNvPr id="4" name="Table 0"/>
+          <p:cNvPr id="6" name="Table 0"/>
           <p:cNvGraphicFramePr>
             <a:graphicFrameLocks noGrp="1"/>
           </p:cNvGraphicFramePr>
@@ -26214,17 +25840,41 @@
         </p:nvGraphicFramePr>
         <p:xfrm>
           <a:off x="548640" y="2011680"/>
-          <a:ext cx="7315200" cy="914400"/>
+          <a:ext cx="7315200" cy="2688336"/>
         </p:xfrm>
         <a:graphic>
           <a:graphicData uri="http://schemas.openxmlformats.org/drawingml/2006/table">
             <a:tbl>
               <a:tblPr/>
               <a:tblGrid>
-                <a:gridCol w="685800"/>
-                <a:gridCol w="4206240"/>
-                <a:gridCol w="777240"/>
-                <a:gridCol w="1645920"/>
+                <a:gridCol w="685800">
+                  <a:extLst>
+                    <a:ext uri="{9D8B030D-6E8A-4147-A177-3AD203B41FA5}">
+                      <a16:colId xmlns:a16="http://schemas.microsoft.com/office/drawing/2014/main" val="20000"/>
+                    </a:ext>
+                  </a:extLst>
+                </a:gridCol>
+                <a:gridCol w="4206240">
+                  <a:extLst>
+                    <a:ext uri="{9D8B030D-6E8A-4147-A177-3AD203B41FA5}">
+                      <a16:colId xmlns:a16="http://schemas.microsoft.com/office/drawing/2014/main" val="20001"/>
+                    </a:ext>
+                  </a:extLst>
+                </a:gridCol>
+                <a:gridCol w="777240">
+                  <a:extLst>
+                    <a:ext uri="{9D8B030D-6E8A-4147-A177-3AD203B41FA5}">
+                      <a16:colId xmlns:a16="http://schemas.microsoft.com/office/drawing/2014/main" val="20002"/>
+                    </a:ext>
+                  </a:extLst>
+                </a:gridCol>
+                <a:gridCol w="1645920">
+                  <a:extLst>
+                    <a:ext uri="{9D8B030D-6E8A-4147-A177-3AD203B41FA5}">
+                      <a16:colId xmlns:a16="http://schemas.microsoft.com/office/drawing/2014/main" val="20003"/>
+                    </a:ext>
+                  </a:extLst>
+                </a:gridCol>
               </a:tblGrid>
               <a:tr h="384048">
                 <a:tc>
@@ -26232,7 +25882,7 @@
                     <a:bodyPr/>
                     <a:lstStyle/>
                     <a:p>
-                      <a:pPr indent="0" marL="0">
+                      <a:pPr marL="0" indent="0">
                         <a:buNone/>
                       </a:pPr>
                       <a:r>
@@ -26300,7 +25950,7 @@
                     <a:bodyPr/>
                     <a:lstStyle/>
                     <a:p>
-                      <a:pPr indent="0" marL="0">
+                      <a:pPr marL="0" indent="0">
                         <a:buNone/>
                       </a:pPr>
                       <a:r>
@@ -26368,7 +26018,7 @@
                     <a:bodyPr/>
                     <a:lstStyle/>
                     <a:p>
-                      <a:pPr indent="0" marL="0">
+                      <a:pPr marL="0" indent="0">
                         <a:buNone/>
                       </a:pPr>
                       <a:r>
@@ -26436,7 +26086,7 @@
                     <a:bodyPr/>
                     <a:lstStyle/>
                     <a:p>
-                      <a:pPr indent="0" marL="0">
+                      <a:pPr marL="0" indent="0">
                         <a:buNone/>
                       </a:pPr>
                       <a:r>
@@ -26499,6 +26149,11 @@
                     </a:solidFill>
                   </a:tcPr>
                 </a:tc>
+                <a:extLst>
+                  <a:ext uri="{0D108BD9-81ED-4DB2-BD59-A6C34878D82A}">
+                    <a16:rowId xmlns:a16="http://schemas.microsoft.com/office/drawing/2014/main" val="10000"/>
+                  </a:ext>
+                </a:extLst>
               </a:tr>
               <a:tr h="384048">
                 <a:tc>
@@ -26506,7 +26161,7 @@
                     <a:bodyPr/>
                     <a:lstStyle/>
                     <a:p>
-                      <a:pPr indent="0" marL="0">
+                      <a:pPr marL="0" indent="0">
                         <a:buNone/>
                       </a:pPr>
                       <a:r>
@@ -26574,7 +26229,7 @@
                     <a:bodyPr/>
                     <a:lstStyle/>
                     <a:p>
-                      <a:pPr indent="0" marL="0">
+                      <a:pPr marL="0" indent="0">
                         <a:buNone/>
                       </a:pPr>
                       <a:r>
@@ -26642,7 +26297,7 @@
                     <a:bodyPr/>
                     <a:lstStyle/>
                     <a:p>
-                      <a:pPr algn="ctr" indent="0" marL="0">
+                      <a:pPr marL="0" indent="0" algn="ctr">
                         <a:buNone/>
                       </a:pPr>
                       <a:r>
@@ -26710,7 +26365,7 @@
                     <a:bodyPr/>
                     <a:lstStyle/>
                     <a:p>
-                      <a:pPr indent="0" marL="0">
+                      <a:pPr marL="0" indent="0">
                         <a:buNone/>
                       </a:pPr>
                       <a:r>
@@ -26773,6 +26428,11 @@
                     </a:solidFill>
                   </a:tcPr>
                 </a:tc>
+                <a:extLst>
+                  <a:ext uri="{0D108BD9-81ED-4DB2-BD59-A6C34878D82A}">
+                    <a16:rowId xmlns:a16="http://schemas.microsoft.com/office/drawing/2014/main" val="10001"/>
+                  </a:ext>
+                </a:extLst>
               </a:tr>
               <a:tr h="384048">
                 <a:tc>
@@ -26780,7 +26440,7 @@
                     <a:bodyPr/>
                     <a:lstStyle/>
                     <a:p>
-                      <a:pPr indent="0" marL="0">
+                      <a:pPr marL="0" indent="0">
                         <a:buNone/>
                       </a:pPr>
                       <a:r>
@@ -26848,7 +26508,7 @@
                     <a:bodyPr/>
                     <a:lstStyle/>
                     <a:p>
-                      <a:pPr indent="0" marL="0">
+                      <a:pPr marL="0" indent="0">
                         <a:buNone/>
                       </a:pPr>
                       <a:r>
@@ -26916,7 +26576,7 @@
                     <a:bodyPr/>
                     <a:lstStyle/>
                     <a:p>
-                      <a:pPr algn="ctr" indent="0" marL="0">
+                      <a:pPr marL="0" indent="0" algn="ctr">
                         <a:buNone/>
                       </a:pPr>
                       <a:r>
@@ -26984,7 +26644,7 @@
                     <a:bodyPr/>
                     <a:lstStyle/>
                     <a:p>
-                      <a:pPr indent="0" marL="0">
+                      <a:pPr marL="0" indent="0">
                         <a:buNone/>
                       </a:pPr>
                       <a:r>
@@ -27047,6 +26707,11 @@
                     </a:solidFill>
                   </a:tcPr>
                 </a:tc>
+                <a:extLst>
+                  <a:ext uri="{0D108BD9-81ED-4DB2-BD59-A6C34878D82A}">
+                    <a16:rowId xmlns:a16="http://schemas.microsoft.com/office/drawing/2014/main" val="10002"/>
+                  </a:ext>
+                </a:extLst>
               </a:tr>
               <a:tr h="384048">
                 <a:tc>
@@ -27054,7 +26719,7 @@
                     <a:bodyPr/>
                     <a:lstStyle/>
                     <a:p>
-                      <a:pPr indent="0" marL="0">
+                      <a:pPr marL="0" indent="0">
                         <a:buNone/>
                       </a:pPr>
                       <a:r>
@@ -27122,7 +26787,7 @@
                     <a:bodyPr/>
                     <a:lstStyle/>
                     <a:p>
-                      <a:pPr indent="0" marL="0">
+                      <a:pPr marL="0" indent="0">
                         <a:buNone/>
                       </a:pPr>
                       <a:r>
@@ -27190,7 +26855,7 @@
                     <a:bodyPr/>
                     <a:lstStyle/>
                     <a:p>
-                      <a:pPr algn="ctr" indent="0" marL="0">
+                      <a:pPr marL="0" indent="0" algn="ctr">
                         <a:buNone/>
                       </a:pPr>
                       <a:r>
@@ -27258,7 +26923,7 @@
                     <a:bodyPr/>
                     <a:lstStyle/>
                     <a:p>
-                      <a:pPr indent="0" marL="0">
+                      <a:pPr marL="0" indent="0">
                         <a:buNone/>
                       </a:pPr>
                       <a:r>
@@ -27321,6 +26986,11 @@
                     </a:solidFill>
                   </a:tcPr>
                 </a:tc>
+                <a:extLst>
+                  <a:ext uri="{0D108BD9-81ED-4DB2-BD59-A6C34878D82A}">
+                    <a16:rowId xmlns:a16="http://schemas.microsoft.com/office/drawing/2014/main" val="10003"/>
+                  </a:ext>
+                </a:extLst>
               </a:tr>
               <a:tr h="384048">
                 <a:tc>
@@ -27328,7 +26998,7 @@
                     <a:bodyPr/>
                     <a:lstStyle/>
                     <a:p>
-                      <a:pPr indent="0" marL="0">
+                      <a:pPr marL="0" indent="0">
                         <a:buNone/>
                       </a:pPr>
                       <a:r>
@@ -27396,7 +27066,7 @@
                     <a:bodyPr/>
                     <a:lstStyle/>
                     <a:p>
-                      <a:pPr indent="0" marL="0">
+                      <a:pPr marL="0" indent="0">
                         <a:buNone/>
                       </a:pPr>
                       <a:r>
@@ -27464,7 +27134,7 @@
                     <a:bodyPr/>
                     <a:lstStyle/>
                     <a:p>
-                      <a:pPr algn="ctr" indent="0" marL="0">
+                      <a:pPr marL="0" indent="0" algn="ctr">
                         <a:buNone/>
                       </a:pPr>
                       <a:r>
@@ -27532,7 +27202,7 @@
                     <a:bodyPr/>
                     <a:lstStyle/>
                     <a:p>
-                      <a:pPr indent="0" marL="0">
+                      <a:pPr marL="0" indent="0">
                         <a:buNone/>
                       </a:pPr>
                       <a:r>
@@ -27595,6 +27265,11 @@
                     </a:solidFill>
                   </a:tcPr>
                 </a:tc>
+                <a:extLst>
+                  <a:ext uri="{0D108BD9-81ED-4DB2-BD59-A6C34878D82A}">
+                    <a16:rowId xmlns:a16="http://schemas.microsoft.com/office/drawing/2014/main" val="10004"/>
+                  </a:ext>
+                </a:extLst>
               </a:tr>
               <a:tr h="384048">
                 <a:tc>
@@ -27602,7 +27277,7 @@
                     <a:bodyPr/>
                     <a:lstStyle/>
                     <a:p>
-                      <a:pPr indent="0" marL="0">
+                      <a:pPr marL="0" indent="0">
                         <a:buNone/>
                       </a:pPr>
                       <a:r>
@@ -27670,7 +27345,7 @@
                     <a:bodyPr/>
                     <a:lstStyle/>
                     <a:p>
-                      <a:pPr indent="0" marL="0">
+                      <a:pPr marL="0" indent="0">
                         <a:buNone/>
                       </a:pPr>
                       <a:r>
@@ -27738,7 +27413,7 @@
                     <a:bodyPr/>
                     <a:lstStyle/>
                     <a:p>
-                      <a:pPr algn="ctr" indent="0" marL="0">
+                      <a:pPr marL="0" indent="0" algn="ctr">
                         <a:buNone/>
                       </a:pPr>
                       <a:r>
@@ -27806,7 +27481,7 @@
                     <a:bodyPr/>
                     <a:lstStyle/>
                     <a:p>
-                      <a:pPr indent="0" marL="0">
+                      <a:pPr marL="0" indent="0">
                         <a:buNone/>
                       </a:pPr>
                       <a:r>
@@ -27869,6 +27544,11 @@
                     </a:solidFill>
                   </a:tcPr>
                 </a:tc>
+                <a:extLst>
+                  <a:ext uri="{0D108BD9-81ED-4DB2-BD59-A6C34878D82A}">
+                    <a16:rowId xmlns:a16="http://schemas.microsoft.com/office/drawing/2014/main" val="10005"/>
+                  </a:ext>
+                </a:extLst>
               </a:tr>
               <a:tr h="384048">
                 <a:tc>
@@ -27876,7 +27556,7 @@
                     <a:bodyPr/>
                     <a:lstStyle/>
                     <a:p>
-                      <a:pPr indent="0" marL="0">
+                      <a:pPr marL="0" indent="0">
                         <a:buNone/>
                       </a:pPr>
                       <a:r>
@@ -27944,7 +27624,7 @@
                     <a:bodyPr/>
                     <a:lstStyle/>
                     <a:p>
-                      <a:pPr indent="0" marL="0">
+                      <a:pPr marL="0" indent="0">
                         <a:buNone/>
                       </a:pPr>
                       <a:r>
@@ -28012,7 +27692,7 @@
                     <a:bodyPr/>
                     <a:lstStyle/>
                     <a:p>
-                      <a:pPr algn="ctr" indent="0" marL="0">
+                      <a:pPr marL="0" indent="0" algn="ctr">
                         <a:buNone/>
                       </a:pPr>
                       <a:r>
@@ -28080,7 +27760,7 @@
                     <a:bodyPr/>
                     <a:lstStyle/>
                     <a:p>
-                      <a:pPr indent="0" marL="0">
+                      <a:pPr marL="0" indent="0">
                         <a:buNone/>
                       </a:pPr>
                       <a:r>
@@ -28143,6 +27823,11 @@
                     </a:solidFill>
                   </a:tcPr>
                 </a:tc>
+                <a:extLst>
+                  <a:ext uri="{0D108BD9-81ED-4DB2-BD59-A6C34878D82A}">
+                    <a16:rowId xmlns:a16="http://schemas.microsoft.com/office/drawing/2014/main" val="10006"/>
+                  </a:ext>
+                </a:extLst>
               </a:tr>
             </a:tbl>
           </a:graphicData>
@@ -28223,7 +27908,7 @@
           <a:bodyPr wrap="square" lIns="0" tIns="0" rIns="0" bIns="0" rtlCol="0" anchor="ctr"/>
           <a:lstStyle/>
           <a:p>
-            <a:pPr indent="0" marL="0">
+            <a:pPr marL="0" indent="0">
               <a:buNone/>
             </a:pPr>
             <a:r>
@@ -28262,7 +27947,7 @@
           <a:bodyPr wrap="square" lIns="0" tIns="0" rIns="0" bIns="0" rtlCol="0" anchor="t"/>
           <a:lstStyle/>
           <a:p>
-            <a:pPr algn="l" indent="0" marL="0">
+            <a:pPr marL="0" indent="0" algn="l">
               <a:lnSpc>
                 <a:spcPct val="110000"/>
               </a:lnSpc>
@@ -28358,7 +28043,7 @@
           <a:bodyPr wrap="square" lIns="0" tIns="0" rIns="0" bIns="0" rtlCol="0" anchor="ctr"/>
           <a:lstStyle/>
           <a:p>
-            <a:pPr indent="0" marL="0">
+            <a:pPr marL="0" indent="0">
               <a:buNone/>
             </a:pPr>
             <a:r>
@@ -28578,7 +28263,7 @@
           <a:bodyPr wrap="square" lIns="0" tIns="0" rIns="0" bIns="0" rtlCol="0" anchor="ctr"/>
           <a:lstStyle/>
           <a:p>
-            <a:pPr indent="0" marL="0">
+            <a:pPr marL="0" indent="0">
               <a:buNone/>
             </a:pPr>
             <a:r>
@@ -28617,7 +28302,7 @@
           <a:bodyPr wrap="square" lIns="0" tIns="0" rIns="0" bIns="0" rtlCol="0" anchor="t"/>
           <a:lstStyle/>
           <a:p>
-            <a:pPr algn="l" indent="0" marL="0">
+            <a:pPr marL="0" indent="0" algn="l">
               <a:lnSpc>
                 <a:spcPct val="110000"/>
               </a:lnSpc>
@@ -28659,7 +28344,7 @@
           <a:bodyPr wrap="square" lIns="0" tIns="0" rIns="0" bIns="0" rtlCol="0" anchor="ctr"/>
           <a:lstStyle/>
           <a:p>
-            <a:pPr indent="0" marL="0">
+            <a:pPr marL="0" indent="0">
               <a:buNone/>
             </a:pPr>
             <a:r>
@@ -28693,6 +28378,7 @@
         <a:solidFill>
           <a:srgbClr val="F5F7FB"/>
         </a:solidFill>
+        <a:effectLst/>
       </p:bgPr>
     </p:bg>
     <p:spTree>
@@ -28757,11 +28443,11 @@
           <a:bodyPr wrap="square" lIns="0" tIns="0" rIns="0" bIns="0" rtlCol="0" anchor="ctr"/>
           <a:lstStyle/>
           <a:p>
-            <a:pPr algn="ctr" indent="0" marL="0">
+            <a:pPr marL="0" indent="0" algn="ctr">
               <a:buNone/>
             </a:pPr>
             <a:r>
-              <a:rPr lang="en-US" sz="1150" b="1" spc="100" kern="0" dirty="0">
+              <a:rPr lang="en-US" sz="1150" b="1" kern="0" spc="100" dirty="0">
                 <a:solidFill>
                   <a:srgbClr val="FFFFFF"/>
                 </a:solidFill>
@@ -28796,7 +28482,7 @@
           <a:bodyPr wrap="square" lIns="0" tIns="0" rIns="0" bIns="0" rtlCol="0" anchor="ctr"/>
           <a:lstStyle/>
           <a:p>
-            <a:pPr indent="0" marL="0">
+            <a:pPr marL="0" indent="0">
               <a:buNone/>
             </a:pPr>
             <a:r>
@@ -28835,7 +28521,7 @@
           <a:bodyPr wrap="square" lIns="0" tIns="0" rIns="0" bIns="0" rtlCol="0" anchor="ctr"/>
           <a:lstStyle/>
           <a:p>
-            <a:pPr indent="0" marL="0">
+            <a:pPr marL="0" indent="0">
               <a:buNone/>
             </a:pPr>
             <a:r>
@@ -28928,7 +28614,7 @@
           <a:bodyPr wrap="square" lIns="0" tIns="0" rIns="0" bIns="0" rtlCol="0" anchor="ctr"/>
           <a:lstStyle/>
           <a:p>
-            <a:pPr algn="ctr" indent="0" marL="0">
+            <a:pPr marL="0" indent="0" algn="ctr">
               <a:buNone/>
             </a:pPr>
             <a:r>
@@ -28967,7 +28653,7 @@
           <a:bodyPr wrap="square" lIns="0" tIns="0" rIns="0" bIns="0" rtlCol="0" anchor="ctr"/>
           <a:lstStyle/>
           <a:p>
-            <a:pPr indent="0" marL="0">
+            <a:pPr marL="0" indent="0">
               <a:buNone/>
             </a:pPr>
             <a:r>
@@ -29006,7 +28692,7 @@
           <a:bodyPr wrap="square" lIns="0" tIns="0" rIns="0" bIns="0" rtlCol="0" anchor="t"/>
           <a:lstStyle/>
           <a:p>
-            <a:pPr algn="l" indent="0" marL="0">
+            <a:pPr marL="0" indent="0" algn="l">
               <a:lnSpc>
                 <a:spcPct val="102000"/>
               </a:lnSpc>
@@ -29102,7 +28788,7 @@
           <a:bodyPr wrap="square" lIns="0" tIns="0" rIns="0" bIns="0" rtlCol="0" anchor="ctr"/>
           <a:lstStyle/>
           <a:p>
-            <a:pPr algn="ctr" indent="0" marL="0">
+            <a:pPr marL="0" indent="0" algn="ctr">
               <a:buNone/>
             </a:pPr>
             <a:r>
@@ -29141,7 +28827,7 @@
           <a:bodyPr wrap="square" lIns="0" tIns="0" rIns="0" bIns="0" rtlCol="0" anchor="ctr"/>
           <a:lstStyle/>
           <a:p>
-            <a:pPr indent="0" marL="0">
+            <a:pPr marL="0" indent="0">
               <a:buNone/>
             </a:pPr>
             <a:r>
@@ -29180,7 +28866,7 @@
           <a:bodyPr wrap="square" lIns="0" tIns="0" rIns="0" bIns="0" rtlCol="0" anchor="t"/>
           <a:lstStyle/>
           <a:p>
-            <a:pPr algn="l" indent="0" marL="0">
+            <a:pPr marL="0" indent="0" algn="l">
               <a:lnSpc>
                 <a:spcPct val="102000"/>
               </a:lnSpc>
@@ -29276,7 +28962,7 @@
           <a:bodyPr wrap="square" lIns="0" tIns="0" rIns="0" bIns="0" rtlCol="0" anchor="ctr"/>
           <a:lstStyle/>
           <a:p>
-            <a:pPr algn="ctr" indent="0" marL="0">
+            <a:pPr marL="0" indent="0" algn="ctr">
               <a:buNone/>
             </a:pPr>
             <a:r>
@@ -29315,7 +29001,7 @@
           <a:bodyPr wrap="square" lIns="0" tIns="0" rIns="0" bIns="0" rtlCol="0" anchor="ctr"/>
           <a:lstStyle/>
           <a:p>
-            <a:pPr indent="0" marL="0">
+            <a:pPr marL="0" indent="0">
               <a:buNone/>
             </a:pPr>
             <a:r>
@@ -29354,7 +29040,7 @@
           <a:bodyPr wrap="square" lIns="0" tIns="0" rIns="0" bIns="0" rtlCol="0" anchor="t"/>
           <a:lstStyle/>
           <a:p>
-            <a:pPr algn="l" indent="0" marL="0">
+            <a:pPr marL="0" indent="0" algn="l">
               <a:lnSpc>
                 <a:spcPct val="102000"/>
               </a:lnSpc>
@@ -29450,7 +29136,7 @@
           <a:bodyPr wrap="square" lIns="0" tIns="0" rIns="0" bIns="0" rtlCol="0" anchor="ctr"/>
           <a:lstStyle/>
           <a:p>
-            <a:pPr algn="ctr" indent="0" marL="0">
+            <a:pPr marL="0" indent="0" algn="ctr">
               <a:buNone/>
             </a:pPr>
             <a:r>
@@ -29489,7 +29175,7 @@
           <a:bodyPr wrap="square" lIns="0" tIns="0" rIns="0" bIns="0" rtlCol="0" anchor="ctr"/>
           <a:lstStyle/>
           <a:p>
-            <a:pPr indent="0" marL="0">
+            <a:pPr marL="0" indent="0">
               <a:buNone/>
             </a:pPr>
             <a:r>
@@ -29528,7 +29214,7 @@
           <a:bodyPr wrap="square" lIns="0" tIns="0" rIns="0" bIns="0" rtlCol="0" anchor="t"/>
           <a:lstStyle/>
           <a:p>
-            <a:pPr algn="l" indent="0" marL="0">
+            <a:pPr marL="0" indent="0" algn="l">
               <a:lnSpc>
                 <a:spcPct val="102000"/>
               </a:lnSpc>
@@ -29624,7 +29310,7 @@
           <a:bodyPr wrap="square" lIns="0" tIns="0" rIns="0" bIns="0" rtlCol="0" anchor="ctr"/>
           <a:lstStyle/>
           <a:p>
-            <a:pPr algn="ctr" indent="0" marL="0">
+            <a:pPr marL="0" indent="0" algn="ctr">
               <a:buNone/>
             </a:pPr>
             <a:r>
@@ -29663,7 +29349,7 @@
           <a:bodyPr wrap="square" lIns="0" tIns="0" rIns="0" bIns="0" rtlCol="0" anchor="ctr"/>
           <a:lstStyle/>
           <a:p>
-            <a:pPr indent="0" marL="0">
+            <a:pPr marL="0" indent="0">
               <a:buNone/>
             </a:pPr>
             <a:r>
@@ -29702,7 +29388,7 @@
           <a:bodyPr wrap="square" lIns="0" tIns="0" rIns="0" bIns="0" rtlCol="0" anchor="t"/>
           <a:lstStyle/>
           <a:p>
-            <a:pPr algn="l" indent="0" marL="0">
+            <a:pPr marL="0" indent="0" algn="l">
               <a:lnSpc>
                 <a:spcPct val="102000"/>
               </a:lnSpc>
@@ -29798,7 +29484,7 @@
           <a:bodyPr wrap="square" lIns="0" tIns="0" rIns="0" bIns="0" rtlCol="0" anchor="ctr"/>
           <a:lstStyle/>
           <a:p>
-            <a:pPr algn="ctr" indent="0" marL="0">
+            <a:pPr marL="0" indent="0" algn="ctr">
               <a:buNone/>
             </a:pPr>
             <a:r>
@@ -29837,7 +29523,7 @@
           <a:bodyPr wrap="square" lIns="0" tIns="0" rIns="0" bIns="0" rtlCol="0" anchor="ctr"/>
           <a:lstStyle/>
           <a:p>
-            <a:pPr indent="0" marL="0">
+            <a:pPr marL="0" indent="0">
               <a:buNone/>
             </a:pPr>
             <a:r>
@@ -29876,7 +29562,7 @@
           <a:bodyPr wrap="square" lIns="0" tIns="0" rIns="0" bIns="0" rtlCol="0" anchor="t"/>
           <a:lstStyle/>
           <a:p>
-            <a:pPr algn="l" indent="0" marL="0">
+            <a:pPr marL="0" indent="0" algn="l">
               <a:lnSpc>
                 <a:spcPct val="102000"/>
               </a:lnSpc>
@@ -29972,7 +29658,7 @@
           <a:bodyPr wrap="square" lIns="0" tIns="0" rIns="0" bIns="0" rtlCol="0" anchor="ctr"/>
           <a:lstStyle/>
           <a:p>
-            <a:pPr algn="ctr" indent="0" marL="0">
+            <a:pPr marL="0" indent="0" algn="ctr">
               <a:buNone/>
             </a:pPr>
             <a:r>
@@ -30011,7 +29697,7 @@
           <a:bodyPr wrap="square" lIns="0" tIns="0" rIns="0" bIns="0" rtlCol="0" anchor="ctr"/>
           <a:lstStyle/>
           <a:p>
-            <a:pPr indent="0" marL="0">
+            <a:pPr marL="0" indent="0">
               <a:buNone/>
             </a:pPr>
             <a:r>
@@ -30050,7 +29736,7 @@
           <a:bodyPr wrap="square" lIns="0" tIns="0" rIns="0" bIns="0" rtlCol="0" anchor="t"/>
           <a:lstStyle/>
           <a:p>
-            <a:pPr algn="l" indent="0" marL="0">
+            <a:pPr marL="0" indent="0" algn="l">
               <a:lnSpc>
                 <a:spcPct val="102000"/>
               </a:lnSpc>
@@ -30146,7 +29832,7 @@
           <a:bodyPr wrap="square" lIns="0" tIns="0" rIns="0" bIns="0" rtlCol="0" anchor="ctr"/>
           <a:lstStyle/>
           <a:p>
-            <a:pPr algn="ctr" indent="0" marL="0">
+            <a:pPr marL="0" indent="0" algn="ctr">
               <a:buNone/>
             </a:pPr>
             <a:r>
@@ -30185,7 +29871,7 @@
           <a:bodyPr wrap="square" lIns="0" tIns="0" rIns="0" bIns="0" rtlCol="0" anchor="ctr"/>
           <a:lstStyle/>
           <a:p>
-            <a:pPr indent="0" marL="0">
+            <a:pPr marL="0" indent="0">
               <a:buNone/>
             </a:pPr>
             <a:r>
@@ -30224,7 +29910,7 @@
           <a:bodyPr wrap="square" lIns="0" tIns="0" rIns="0" bIns="0" rtlCol="0" anchor="t"/>
           <a:lstStyle/>
           <a:p>
-            <a:pPr algn="l" indent="0" marL="0">
+            <a:pPr marL="0" indent="0" algn="l">
               <a:lnSpc>
                 <a:spcPct val="102000"/>
               </a:lnSpc>
@@ -30266,7 +29952,7 @@
           <a:bodyPr wrap="square" lIns="0" tIns="0" rIns="0" bIns="0" rtlCol="0" anchor="ctr"/>
           <a:lstStyle/>
           <a:p>
-            <a:pPr indent="0" marL="0">
+            <a:pPr marL="0" indent="0">
               <a:buNone/>
             </a:pPr>
             <a:r>
@@ -30300,6 +29986,7 @@
         <a:solidFill>
           <a:srgbClr val="F5F7FB"/>
         </a:solidFill>
+        <a:effectLst/>
       </p:bgPr>
     </p:bg>
     <p:spTree>
@@ -30364,11 +30051,11 @@
           <a:bodyPr wrap="square" lIns="0" tIns="0" rIns="0" bIns="0" rtlCol="0" anchor="ctr"/>
           <a:lstStyle/>
           <a:p>
-            <a:pPr algn="ctr" indent="0" marL="0">
+            <a:pPr marL="0" indent="0" algn="ctr">
               <a:buNone/>
             </a:pPr>
             <a:r>
-              <a:rPr lang="en-US" sz="1150" b="1" spc="100" kern="0" dirty="0">
+              <a:rPr lang="en-US" sz="1150" b="1" kern="0" spc="100" dirty="0">
                 <a:solidFill>
                   <a:srgbClr val="FFFFFF"/>
                 </a:solidFill>
@@ -30403,7 +30090,7 @@
           <a:bodyPr wrap="square" lIns="0" tIns="0" rIns="0" bIns="0" rtlCol="0" anchor="ctr"/>
           <a:lstStyle/>
           <a:p>
-            <a:pPr indent="0" marL="0">
+            <a:pPr marL="0" indent="0">
               <a:buNone/>
             </a:pPr>
             <a:r>
@@ -30442,7 +30129,7 @@
           <a:bodyPr wrap="square" lIns="0" tIns="0" rIns="0" bIns="0" rtlCol="0" anchor="ctr"/>
           <a:lstStyle/>
           <a:p>
-            <a:pPr indent="0" marL="0">
+            <a:pPr marL="0" indent="0">
               <a:buNone/>
             </a:pPr>
             <a:r>
@@ -30535,7 +30222,7 @@
           <a:bodyPr wrap="square" lIns="0" tIns="0" rIns="0" bIns="0" rtlCol="0" anchor="ctr"/>
           <a:lstStyle/>
           <a:p>
-            <a:pPr indent="0" marL="0">
+            <a:pPr marL="0" indent="0">
               <a:buNone/>
             </a:pPr>
             <a:r>
@@ -30574,7 +30261,7 @@
           <a:bodyPr wrap="square" lIns="0" tIns="0" rIns="0" bIns="0" rtlCol="0" anchor="t"/>
           <a:lstStyle/>
           <a:p>
-            <a:pPr algn="l" indent="0" marL="0">
+            <a:pPr marL="0" indent="0" algn="l">
               <a:lnSpc>
                 <a:spcPct val="108000"/>
               </a:lnSpc>
@@ -30594,7 +30281,7 @@
             <a:endParaRPr lang="en-US" sz="1150" dirty="0"/>
           </a:p>
           <a:p>
-            <a:pPr algn="l" indent="0" marL="0">
+            <a:pPr marL="0" indent="0" algn="l">
               <a:lnSpc>
                 <a:spcPct val="108000"/>
               </a:lnSpc>
@@ -30603,7 +30290,7 @@
             <a:endParaRPr lang="en-US" sz="1150" dirty="0"/>
           </a:p>
           <a:p>
-            <a:pPr algn="l" indent="0" marL="0">
+            <a:pPr marL="0" indent="0" algn="l">
               <a:lnSpc>
                 <a:spcPct val="108000"/>
               </a:lnSpc>
@@ -30623,7 +30310,7 @@
             <a:endParaRPr lang="en-US" sz="1150" dirty="0"/>
           </a:p>
           <a:p>
-            <a:pPr algn="l" indent="0" marL="0">
+            <a:pPr marL="0" indent="0" algn="l">
               <a:lnSpc>
                 <a:spcPct val="108000"/>
               </a:lnSpc>
@@ -30632,7 +30319,7 @@
             <a:endParaRPr lang="en-US" sz="1150" dirty="0"/>
           </a:p>
           <a:p>
-            <a:pPr algn="l" indent="0" marL="0">
+            <a:pPr marL="0" indent="0" algn="l">
               <a:lnSpc>
                 <a:spcPct val="108000"/>
               </a:lnSpc>
@@ -30728,7 +30415,7 @@
           <a:bodyPr wrap="square" lIns="0" tIns="0" rIns="0" bIns="0" rtlCol="0" anchor="ctr"/>
           <a:lstStyle/>
           <a:p>
-            <a:pPr indent="0" marL="0">
+            <a:pPr marL="0" indent="0">
               <a:buNone/>
             </a:pPr>
             <a:r>
@@ -30767,7 +30454,7 @@
           <a:bodyPr wrap="square" lIns="0" tIns="0" rIns="0" bIns="0" rtlCol="0" anchor="t"/>
           <a:lstStyle/>
           <a:p>
-            <a:pPr algn="l" indent="0" marL="0">
+            <a:pPr marL="0" indent="0" algn="l">
               <a:lnSpc>
                 <a:spcPct val="108000"/>
               </a:lnSpc>
@@ -30809,7 +30496,7 @@
           <a:bodyPr wrap="square" lIns="0" tIns="0" rIns="0" bIns="0" rtlCol="0" anchor="t"/>
           <a:lstStyle/>
           <a:p>
-            <a:pPr algn="l" indent="0" marL="0">
+            <a:pPr marL="0" indent="0" algn="l">
               <a:lnSpc>
                 <a:spcPct val="106000"/>
               </a:lnSpc>
@@ -30851,7 +30538,7 @@
           <a:bodyPr wrap="square" lIns="0" tIns="0" rIns="0" bIns="0" rtlCol="0" anchor="t"/>
           <a:lstStyle/>
           <a:p>
-            <a:pPr algn="l" indent="0" marL="0">
+            <a:pPr marL="0" indent="0" algn="l">
               <a:lnSpc>
                 <a:spcPct val="108000"/>
               </a:lnSpc>
@@ -30893,7 +30580,7 @@
           <a:bodyPr wrap="square" lIns="0" tIns="0" rIns="0" bIns="0" rtlCol="0" anchor="t"/>
           <a:lstStyle/>
           <a:p>
-            <a:pPr algn="l" indent="0" marL="0">
+            <a:pPr marL="0" indent="0" algn="l">
               <a:lnSpc>
                 <a:spcPct val="106000"/>
               </a:lnSpc>
@@ -30989,7 +30676,7 @@
           <a:bodyPr wrap="square" lIns="0" tIns="0" rIns="0" bIns="0" rtlCol="0" anchor="ctr"/>
           <a:lstStyle/>
           <a:p>
-            <a:pPr algn="ctr" indent="0" marL="0">
+            <a:pPr marL="0" indent="0" algn="ctr">
               <a:buNone/>
             </a:pPr>
             <a:r>
@@ -31028,7 +30715,7 @@
           <a:bodyPr wrap="square" lIns="0" tIns="0" rIns="0" bIns="0" rtlCol="0" anchor="ctr"/>
           <a:lstStyle/>
           <a:p>
-            <a:pPr indent="0" marL="0">
+            <a:pPr marL="0" indent="0">
               <a:buNone/>
             </a:pPr>
             <a:r>
@@ -31067,7 +30754,7 @@
           <a:bodyPr wrap="square" lIns="0" tIns="0" rIns="0" bIns="0" rtlCol="0" anchor="t"/>
           <a:lstStyle/>
           <a:p>
-            <a:pPr algn="l" indent="0" marL="0">
+            <a:pPr marL="0" indent="0" algn="l">
               <a:lnSpc>
                 <a:spcPct val="104000"/>
               </a:lnSpc>
@@ -31163,7 +30850,7 @@
           <a:bodyPr wrap="square" lIns="0" tIns="0" rIns="0" bIns="0" rtlCol="0" anchor="ctr"/>
           <a:lstStyle/>
           <a:p>
-            <a:pPr algn="ctr" indent="0" marL="0">
+            <a:pPr marL="0" indent="0" algn="ctr">
               <a:buNone/>
             </a:pPr>
             <a:r>
@@ -31202,7 +30889,7 @@
           <a:bodyPr wrap="square" lIns="0" tIns="0" rIns="0" bIns="0" rtlCol="0" anchor="ctr"/>
           <a:lstStyle/>
           <a:p>
-            <a:pPr indent="0" marL="0">
+            <a:pPr marL="0" indent="0">
               <a:buNone/>
             </a:pPr>
             <a:r>
@@ -31241,7 +30928,7 @@
           <a:bodyPr wrap="square" lIns="0" tIns="0" rIns="0" bIns="0" rtlCol="0" anchor="t"/>
           <a:lstStyle/>
           <a:p>
-            <a:pPr algn="l" indent="0" marL="0">
+            <a:pPr marL="0" indent="0" algn="l">
               <a:lnSpc>
                 <a:spcPct val="104000"/>
               </a:lnSpc>
@@ -31337,7 +31024,7 @@
           <a:bodyPr wrap="square" lIns="0" tIns="0" rIns="0" bIns="0" rtlCol="0" anchor="ctr"/>
           <a:lstStyle/>
           <a:p>
-            <a:pPr algn="ctr" indent="0" marL="0">
+            <a:pPr marL="0" indent="0" algn="ctr">
               <a:buNone/>
             </a:pPr>
             <a:r>
@@ -31376,7 +31063,7 @@
           <a:bodyPr wrap="square" lIns="0" tIns="0" rIns="0" bIns="0" rtlCol="0" anchor="ctr"/>
           <a:lstStyle/>
           <a:p>
-            <a:pPr indent="0" marL="0">
+            <a:pPr marL="0" indent="0">
               <a:buNone/>
             </a:pPr>
             <a:r>
@@ -31415,7 +31102,7 @@
           <a:bodyPr wrap="square" lIns="0" tIns="0" rIns="0" bIns="0" rtlCol="0" anchor="t"/>
           <a:lstStyle/>
           <a:p>
-            <a:pPr algn="l" indent="0" marL="0">
+            <a:pPr marL="0" indent="0" algn="l">
               <a:lnSpc>
                 <a:spcPct val="104000"/>
               </a:lnSpc>
@@ -31457,7 +31144,7 @@
           <a:bodyPr wrap="square" lIns="0" tIns="0" rIns="0" bIns="0" rtlCol="0" anchor="ctr"/>
           <a:lstStyle/>
           <a:p>
-            <a:pPr indent="0" marL="0">
+            <a:pPr marL="0" indent="0">
               <a:buNone/>
             </a:pPr>
             <a:r>
@@ -31491,6 +31178,7 @@
         <a:solidFill>
           <a:srgbClr val="F5F7FB"/>
         </a:solidFill>
+        <a:effectLst/>
       </p:bgPr>
     </p:bg>
     <p:spTree>
@@ -31555,11 +31243,11 @@
           <a:bodyPr wrap="square" lIns="0" tIns="0" rIns="0" bIns="0" rtlCol="0" anchor="ctr"/>
           <a:lstStyle/>
           <a:p>
-            <a:pPr algn="ctr" indent="0" marL="0">
+            <a:pPr marL="0" indent="0" algn="ctr">
               <a:buNone/>
             </a:pPr>
             <a:r>
-              <a:rPr lang="en-US" sz="1150" b="1" spc="100" kern="0" dirty="0">
+              <a:rPr lang="en-US" sz="1150" b="1" kern="0" spc="100" dirty="0">
                 <a:solidFill>
                   <a:srgbClr val="FFFFFF"/>
                 </a:solidFill>
@@ -31594,7 +31282,7 @@
           <a:bodyPr wrap="square" lIns="0" tIns="0" rIns="0" bIns="0" rtlCol="0" anchor="ctr"/>
           <a:lstStyle/>
           <a:p>
-            <a:pPr indent="0" marL="0">
+            <a:pPr marL="0" indent="0">
               <a:buNone/>
             </a:pPr>
             <a:r>
@@ -31633,7 +31321,7 @@
           <a:bodyPr wrap="square" lIns="0" tIns="0" rIns="0" bIns="0" rtlCol="0" anchor="ctr"/>
           <a:lstStyle/>
           <a:p>
-            <a:pPr indent="0" marL="0">
+            <a:pPr marL="0" indent="0">
               <a:buNone/>
             </a:pPr>
             <a:r>
@@ -31726,11 +31414,11 @@
           <a:bodyPr wrap="square" lIns="0" tIns="0" rIns="0" bIns="0" rtlCol="0" anchor="ctr"/>
           <a:lstStyle/>
           <a:p>
-            <a:pPr algn="ctr" indent="0" marL="0">
+            <a:pPr marL="0" indent="0" algn="ctr">
               <a:buNone/>
             </a:pPr>
             <a:r>
-              <a:rPr lang="en-US" sz="1300" b="1" spc="100" kern="0" dirty="0">
+              <a:rPr lang="en-US" sz="1300" b="1" kern="0" spc="100" dirty="0">
                 <a:solidFill>
                   <a:srgbClr val="FFFFFF"/>
                 </a:solidFill>
@@ -31765,7 +31453,7 @@
           <a:bodyPr wrap="square" lIns="0" tIns="0" rIns="0" bIns="0" rtlCol="0" anchor="ctr"/>
           <a:lstStyle/>
           <a:p>
-            <a:pPr indent="0" marL="0">
+            <a:pPr marL="0" indent="0">
               <a:buNone/>
             </a:pPr>
             <a:r>
@@ -31804,7 +31492,7 @@
           <a:bodyPr wrap="square" lIns="0" tIns="0" rIns="0" bIns="0" rtlCol="0" anchor="ctr"/>
           <a:lstStyle/>
           <a:p>
-            <a:pPr algn="l" indent="0" marL="0">
+            <a:pPr marL="0" indent="0" algn="l">
               <a:lnSpc>
                 <a:spcPct val="104000"/>
               </a:lnSpc>
@@ -31846,7 +31534,7 @@
           <a:bodyPr wrap="square" lIns="0" tIns="0" rIns="0" bIns="0" rtlCol="0" anchor="ctr"/>
           <a:lstStyle/>
           <a:p>
-            <a:pPr indent="0" marL="0">
+            <a:pPr marL="0" indent="0">
               <a:lnSpc>
                 <a:spcPct val="100000"/>
               </a:lnSpc>
@@ -31866,7 +31554,7 @@
             <a:endParaRPr lang="en-US" sz="1050" dirty="0"/>
           </a:p>
           <a:p>
-            <a:pPr indent="0" marL="0">
+            <a:pPr marL="0" indent="0">
               <a:lnSpc>
                 <a:spcPct val="100000"/>
               </a:lnSpc>
@@ -31962,11 +31650,11 @@
           <a:bodyPr wrap="square" lIns="0" tIns="0" rIns="0" bIns="0" rtlCol="0" anchor="ctr"/>
           <a:lstStyle/>
           <a:p>
-            <a:pPr algn="ctr" indent="0" marL="0">
+            <a:pPr marL="0" indent="0" algn="ctr">
               <a:buNone/>
             </a:pPr>
             <a:r>
-              <a:rPr lang="en-US" sz="1300" b="1" spc="100" kern="0" dirty="0">
+              <a:rPr lang="en-US" sz="1300" b="1" kern="0" spc="100" dirty="0">
                 <a:solidFill>
                   <a:srgbClr val="FFFFFF"/>
                 </a:solidFill>
@@ -32001,7 +31689,7 @@
           <a:bodyPr wrap="square" lIns="0" tIns="0" rIns="0" bIns="0" rtlCol="0" anchor="ctr"/>
           <a:lstStyle/>
           <a:p>
-            <a:pPr indent="0" marL="0">
+            <a:pPr marL="0" indent="0">
               <a:buNone/>
             </a:pPr>
             <a:r>
@@ -32040,7 +31728,7 @@
           <a:bodyPr wrap="square" lIns="0" tIns="0" rIns="0" bIns="0" rtlCol="0" anchor="ctr"/>
           <a:lstStyle/>
           <a:p>
-            <a:pPr algn="l" indent="0" marL="0">
+            <a:pPr marL="0" indent="0" algn="l">
               <a:lnSpc>
                 <a:spcPct val="104000"/>
               </a:lnSpc>
@@ -32082,7 +31770,7 @@
           <a:bodyPr wrap="square" lIns="0" tIns="0" rIns="0" bIns="0" rtlCol="0" anchor="ctr"/>
           <a:lstStyle/>
           <a:p>
-            <a:pPr indent="0" marL="0">
+            <a:pPr marL="0" indent="0">
               <a:lnSpc>
                 <a:spcPct val="100000"/>
               </a:lnSpc>
@@ -32178,11 +31866,11 @@
           <a:bodyPr wrap="square" lIns="0" tIns="0" rIns="0" bIns="0" rtlCol="0" anchor="ctr"/>
           <a:lstStyle/>
           <a:p>
-            <a:pPr algn="ctr" indent="0" marL="0">
+            <a:pPr marL="0" indent="0" algn="ctr">
               <a:buNone/>
             </a:pPr>
             <a:r>
-              <a:rPr lang="en-US" sz="1300" b="1" spc="100" kern="0" dirty="0">
+              <a:rPr lang="en-US" sz="1300" b="1" kern="0" spc="100" dirty="0">
                 <a:solidFill>
                   <a:srgbClr val="FFFFFF"/>
                 </a:solidFill>
@@ -32217,7 +31905,7 @@
           <a:bodyPr wrap="square" lIns="0" tIns="0" rIns="0" bIns="0" rtlCol="0" anchor="ctr"/>
           <a:lstStyle/>
           <a:p>
-            <a:pPr indent="0" marL="0">
+            <a:pPr marL="0" indent="0">
               <a:buNone/>
             </a:pPr>
             <a:r>
@@ -32256,7 +31944,7 @@
           <a:bodyPr wrap="square" lIns="0" tIns="0" rIns="0" bIns="0" rtlCol="0" anchor="ctr"/>
           <a:lstStyle/>
           <a:p>
-            <a:pPr algn="l" indent="0" marL="0">
+            <a:pPr marL="0" indent="0" algn="l">
               <a:lnSpc>
                 <a:spcPct val="104000"/>
               </a:lnSpc>
@@ -32298,7 +31986,7 @@
           <a:bodyPr wrap="square" lIns="0" tIns="0" rIns="0" bIns="0" rtlCol="0" anchor="ctr"/>
           <a:lstStyle/>
           <a:p>
-            <a:pPr indent="0" marL="0">
+            <a:pPr marL="0" indent="0">
               <a:lnSpc>
                 <a:spcPct val="100000"/>
               </a:lnSpc>
@@ -32394,11 +32082,11 @@
           <a:bodyPr wrap="square" lIns="0" tIns="0" rIns="0" bIns="0" rtlCol="0" anchor="ctr"/>
           <a:lstStyle/>
           <a:p>
-            <a:pPr algn="ctr" indent="0" marL="0">
+            <a:pPr marL="0" indent="0" algn="ctr">
               <a:buNone/>
             </a:pPr>
             <a:r>
-              <a:rPr lang="en-US" sz="1300" b="1" spc="100" kern="0" dirty="0">
+              <a:rPr lang="en-US" sz="1300" b="1" kern="0" spc="100" dirty="0">
                 <a:solidFill>
                   <a:srgbClr val="FFFFFF"/>
                 </a:solidFill>
@@ -32433,7 +32121,7 @@
           <a:bodyPr wrap="square" lIns="0" tIns="0" rIns="0" bIns="0" rtlCol="0" anchor="ctr"/>
           <a:lstStyle/>
           <a:p>
-            <a:pPr indent="0" marL="0">
+            <a:pPr marL="0" indent="0">
               <a:buNone/>
             </a:pPr>
             <a:r>
@@ -32472,7 +32160,7 @@
           <a:bodyPr wrap="square" lIns="0" tIns="0" rIns="0" bIns="0" rtlCol="0" anchor="ctr"/>
           <a:lstStyle/>
           <a:p>
-            <a:pPr algn="l" indent="0" marL="0">
+            <a:pPr marL="0" indent="0" algn="l">
               <a:lnSpc>
                 <a:spcPct val="104000"/>
               </a:lnSpc>
@@ -32514,7 +32202,7 @@
           <a:bodyPr wrap="square" lIns="0" tIns="0" rIns="0" bIns="0" rtlCol="0" anchor="ctr"/>
           <a:lstStyle/>
           <a:p>
-            <a:pPr indent="0" marL="0">
+            <a:pPr marL="0" indent="0">
               <a:lnSpc>
                 <a:spcPct val="100000"/>
               </a:lnSpc>
@@ -32610,11 +32298,11 @@
           <a:bodyPr wrap="square" lIns="0" tIns="0" rIns="0" bIns="0" rtlCol="0" anchor="ctr"/>
           <a:lstStyle/>
           <a:p>
-            <a:pPr algn="ctr" indent="0" marL="0">
+            <a:pPr marL="0" indent="0" algn="ctr">
               <a:buNone/>
             </a:pPr>
             <a:r>
-              <a:rPr lang="en-US" sz="1300" b="1" spc="100" kern="0" dirty="0">
+              <a:rPr lang="en-US" sz="1300" b="1" kern="0" spc="100" dirty="0">
                 <a:solidFill>
                   <a:srgbClr val="FFFFFF"/>
                 </a:solidFill>
@@ -32649,7 +32337,7 @@
           <a:bodyPr wrap="square" lIns="0" tIns="0" rIns="0" bIns="0" rtlCol="0" anchor="ctr"/>
           <a:lstStyle/>
           <a:p>
-            <a:pPr indent="0" marL="0">
+            <a:pPr marL="0" indent="0">
               <a:buNone/>
             </a:pPr>
             <a:r>
@@ -32688,7 +32376,7 @@
           <a:bodyPr wrap="square" lIns="0" tIns="0" rIns="0" bIns="0" rtlCol="0" anchor="ctr"/>
           <a:lstStyle/>
           <a:p>
-            <a:pPr algn="l" indent="0" marL="0">
+            <a:pPr marL="0" indent="0" algn="l">
               <a:lnSpc>
                 <a:spcPct val="104000"/>
               </a:lnSpc>
@@ -32730,7 +32418,7 @@
           <a:bodyPr wrap="square" lIns="0" tIns="0" rIns="0" bIns="0" rtlCol="0" anchor="ctr"/>
           <a:lstStyle/>
           <a:p>
-            <a:pPr indent="0" marL="0">
+            <a:pPr marL="0" indent="0">
               <a:lnSpc>
                 <a:spcPct val="100000"/>
               </a:lnSpc>
@@ -32799,7 +32487,7 @@
           <a:bodyPr wrap="square" lIns="0" tIns="0" rIns="0" bIns="0" rtlCol="0" anchor="ctr"/>
           <a:lstStyle/>
           <a:p>
-            <a:pPr algn="l" indent="0" marL="0">
+            <a:pPr marL="0" indent="0" algn="l">
               <a:lnSpc>
                 <a:spcPct val="108000"/>
               </a:lnSpc>
@@ -32836,6 +32524,7 @@
         <a:solidFill>
           <a:srgbClr val="F5F7FB"/>
         </a:solidFill>
+        <a:effectLst/>
       </p:bgPr>
     </p:bg>
     <p:spTree>
@@ -32900,11 +32589,11 @@
           <a:bodyPr wrap="square" lIns="0" tIns="0" rIns="0" bIns="0" rtlCol="0" anchor="ctr"/>
           <a:lstStyle/>
           <a:p>
-            <a:pPr algn="ctr" indent="0" marL="0">
+            <a:pPr marL="0" indent="0" algn="ctr">
               <a:buNone/>
             </a:pPr>
             <a:r>
-              <a:rPr lang="en-US" sz="1150" b="1" spc="100" kern="0" dirty="0">
+              <a:rPr lang="en-US" sz="1150" b="1" kern="0" spc="100" dirty="0">
                 <a:solidFill>
                   <a:srgbClr val="FFFFFF"/>
                 </a:solidFill>
@@ -32939,7 +32628,7 @@
           <a:bodyPr wrap="square" lIns="0" tIns="0" rIns="0" bIns="0" rtlCol="0" anchor="ctr"/>
           <a:lstStyle/>
           <a:p>
-            <a:pPr indent="0" marL="0">
+            <a:pPr marL="0" indent="0">
               <a:buNone/>
             </a:pPr>
             <a:r>
@@ -32978,7 +32667,7 @@
           <a:bodyPr wrap="square" lIns="0" tIns="0" rIns="0" bIns="0" rtlCol="0" anchor="ctr"/>
           <a:lstStyle/>
           <a:p>
-            <a:pPr indent="0" marL="0">
+            <a:pPr marL="0" indent="0">
               <a:buNone/>
             </a:pPr>
             <a:r>
@@ -33044,7 +32733,7 @@
           <a:bodyPr wrap="square" lIns="0" tIns="0" rIns="0" bIns="0" rtlCol="0" anchor="ctr"/>
           <a:lstStyle/>
           <a:p>
-            <a:pPr algn="ctr" indent="0" marL="0">
+            <a:pPr marL="0" indent="0" algn="ctr">
               <a:buNone/>
             </a:pPr>
             <a:r>
@@ -33137,11 +32826,11 @@
           <a:bodyPr wrap="square" lIns="0" tIns="0" rIns="0" bIns="0" rtlCol="0" anchor="ctr"/>
           <a:lstStyle/>
           <a:p>
-            <a:pPr algn="ctr" indent="0" marL="0">
+            <a:pPr marL="0" indent="0" algn="ctr">
               <a:buNone/>
             </a:pPr>
             <a:r>
-              <a:rPr lang="en-US" sz="1200" b="1" spc="100" kern="0" dirty="0">
+              <a:rPr lang="en-US" sz="1200" b="1" kern="0" spc="100" dirty="0">
                 <a:solidFill>
                   <a:srgbClr val="FFFFFF"/>
                 </a:solidFill>
@@ -33176,7 +32865,7 @@
           <a:bodyPr wrap="square" lIns="0" tIns="0" rIns="0" bIns="0" rtlCol="0" anchor="ctr"/>
           <a:lstStyle/>
           <a:p>
-            <a:pPr indent="0" marL="0">
+            <a:pPr marL="0" indent="0">
               <a:buNone/>
             </a:pPr>
             <a:r>
@@ -33215,7 +32904,7 @@
           <a:bodyPr wrap="square" lIns="0" tIns="0" rIns="0" bIns="0" rtlCol="0" anchor="t"/>
           <a:lstStyle/>
           <a:p>
-            <a:pPr algn="l" indent="0" marL="0">
+            <a:pPr marL="0" indent="0" algn="l">
               <a:lnSpc>
                 <a:spcPct val="106000"/>
               </a:lnSpc>
@@ -33311,11 +33000,11 @@
           <a:bodyPr wrap="square" lIns="0" tIns="0" rIns="0" bIns="0" rtlCol="0" anchor="ctr"/>
           <a:lstStyle/>
           <a:p>
-            <a:pPr algn="ctr" indent="0" marL="0">
+            <a:pPr marL="0" indent="0" algn="ctr">
               <a:buNone/>
             </a:pPr>
             <a:r>
-              <a:rPr lang="en-US" sz="1200" b="1" spc="100" kern="0" dirty="0">
+              <a:rPr lang="en-US" sz="1200" b="1" kern="0" spc="100" dirty="0">
                 <a:solidFill>
                   <a:srgbClr val="FFFFFF"/>
                 </a:solidFill>
@@ -33350,7 +33039,7 @@
           <a:bodyPr wrap="square" lIns="0" tIns="0" rIns="0" bIns="0" rtlCol="0" anchor="ctr"/>
           <a:lstStyle/>
           <a:p>
-            <a:pPr indent="0" marL="0">
+            <a:pPr marL="0" indent="0">
               <a:buNone/>
             </a:pPr>
             <a:r>
@@ -33389,7 +33078,7 @@
           <a:bodyPr wrap="square" lIns="0" tIns="0" rIns="0" bIns="0" rtlCol="0" anchor="t"/>
           <a:lstStyle/>
           <a:p>
-            <a:pPr algn="l" indent="0" marL="0">
+            <a:pPr marL="0" indent="0" algn="l">
               <a:lnSpc>
                 <a:spcPct val="106000"/>
               </a:lnSpc>
@@ -33485,11 +33174,11 @@
           <a:bodyPr wrap="square" lIns="0" tIns="0" rIns="0" bIns="0" rtlCol="0" anchor="ctr"/>
           <a:lstStyle/>
           <a:p>
-            <a:pPr algn="ctr" indent="0" marL="0">
+            <a:pPr marL="0" indent="0" algn="ctr">
               <a:buNone/>
             </a:pPr>
             <a:r>
-              <a:rPr lang="en-US" sz="1200" b="1" spc="100" kern="0" dirty="0">
+              <a:rPr lang="en-US" sz="1200" b="1" kern="0" spc="100" dirty="0">
                 <a:solidFill>
                   <a:srgbClr val="FFFFFF"/>
                 </a:solidFill>
@@ -33524,7 +33213,7 @@
           <a:bodyPr wrap="square" lIns="0" tIns="0" rIns="0" bIns="0" rtlCol="0" anchor="ctr"/>
           <a:lstStyle/>
           <a:p>
-            <a:pPr indent="0" marL="0">
+            <a:pPr marL="0" indent="0">
               <a:buNone/>
             </a:pPr>
             <a:r>
@@ -33563,7 +33252,7 @@
           <a:bodyPr wrap="square" lIns="0" tIns="0" rIns="0" bIns="0" rtlCol="0" anchor="t"/>
           <a:lstStyle/>
           <a:p>
-            <a:pPr algn="l" indent="0" marL="0">
+            <a:pPr marL="0" indent="0" algn="l">
               <a:lnSpc>
                 <a:spcPct val="106000"/>
               </a:lnSpc>
@@ -33586,7 +33275,7 @@
       </p:sp>
       <p:graphicFrame>
         <p:nvGraphicFramePr>
-          <p:cNvPr id="8" name="Table 0"/>
+          <p:cNvPr id="23" name="Table 0"/>
           <p:cNvGraphicFramePr>
             <a:graphicFrameLocks noGrp="1"/>
           </p:cNvGraphicFramePr>
@@ -33600,18 +33289,48 @@
         </p:nvGraphicFramePr>
         <p:xfrm>
           <a:off x="548640" y="4480560"/>
-          <a:ext cx="11091672" cy="914400"/>
+          <a:ext cx="11091672" cy="1261872"/>
         </p:xfrm>
         <a:graphic>
           <a:graphicData uri="http://schemas.openxmlformats.org/drawingml/2006/table">
             <a:tbl>
               <a:tblPr/>
               <a:tblGrid>
-                <a:gridCol w="2468880"/>
-                <a:gridCol w="2377440"/>
-                <a:gridCol w="1371600"/>
-                <a:gridCol w="1645920"/>
-                <a:gridCol w="3227832"/>
+                <a:gridCol w="2468880">
+                  <a:extLst>
+                    <a:ext uri="{9D8B030D-6E8A-4147-A177-3AD203B41FA5}">
+                      <a16:colId xmlns:a16="http://schemas.microsoft.com/office/drawing/2014/main" val="20000"/>
+                    </a:ext>
+                  </a:extLst>
+                </a:gridCol>
+                <a:gridCol w="2377440">
+                  <a:extLst>
+                    <a:ext uri="{9D8B030D-6E8A-4147-A177-3AD203B41FA5}">
+                      <a16:colId xmlns:a16="http://schemas.microsoft.com/office/drawing/2014/main" val="20001"/>
+                    </a:ext>
+                  </a:extLst>
+                </a:gridCol>
+                <a:gridCol w="1371600">
+                  <a:extLst>
+                    <a:ext uri="{9D8B030D-6E8A-4147-A177-3AD203B41FA5}">
+                      <a16:colId xmlns:a16="http://schemas.microsoft.com/office/drawing/2014/main" val="20002"/>
+                    </a:ext>
+                  </a:extLst>
+                </a:gridCol>
+                <a:gridCol w="1645920">
+                  <a:extLst>
+                    <a:ext uri="{9D8B030D-6E8A-4147-A177-3AD203B41FA5}">
+                      <a16:colId xmlns:a16="http://schemas.microsoft.com/office/drawing/2014/main" val="20003"/>
+                    </a:ext>
+                  </a:extLst>
+                </a:gridCol>
+                <a:gridCol w="3227832">
+                  <a:extLst>
+                    <a:ext uri="{9D8B030D-6E8A-4147-A177-3AD203B41FA5}">
+                      <a16:colId xmlns:a16="http://schemas.microsoft.com/office/drawing/2014/main" val="20004"/>
+                    </a:ext>
+                  </a:extLst>
+                </a:gridCol>
               </a:tblGrid>
               <a:tr h="420624">
                 <a:tc>
@@ -33619,7 +33338,7 @@
                     <a:bodyPr/>
                     <a:lstStyle/>
                     <a:p>
-                      <a:pPr indent="0" marL="0">
+                      <a:pPr marL="0" indent="0">
                         <a:buNone/>
                       </a:pPr>
                       <a:r>
@@ -33687,7 +33406,7 @@
                     <a:bodyPr/>
                     <a:lstStyle/>
                     <a:p>
-                      <a:pPr indent="0" marL="0">
+                      <a:pPr marL="0" indent="0">
                         <a:buNone/>
                       </a:pPr>
                       <a:r>
@@ -33755,7 +33474,7 @@
                     <a:bodyPr/>
                     <a:lstStyle/>
                     <a:p>
-                      <a:pPr indent="0" marL="0">
+                      <a:pPr marL="0" indent="0">
                         <a:buNone/>
                       </a:pPr>
                       <a:r>
@@ -33823,7 +33542,7 @@
                     <a:bodyPr/>
                     <a:lstStyle/>
                     <a:p>
-                      <a:pPr indent="0" marL="0">
+                      <a:pPr marL="0" indent="0">
                         <a:buNone/>
                       </a:pPr>
                       <a:r>
@@ -33891,7 +33610,7 @@
                     <a:bodyPr/>
                     <a:lstStyle/>
                     <a:p>
-                      <a:pPr indent="0" marL="0">
+                      <a:pPr marL="0" indent="0">
                         <a:buNone/>
                       </a:pPr>
                       <a:r>
@@ -33954,6 +33673,11 @@
                     </a:solidFill>
                   </a:tcPr>
                 </a:tc>
+                <a:extLst>
+                  <a:ext uri="{0D108BD9-81ED-4DB2-BD59-A6C34878D82A}">
+                    <a16:rowId xmlns:a16="http://schemas.microsoft.com/office/drawing/2014/main" val="10000"/>
+                  </a:ext>
+                </a:extLst>
               </a:tr>
               <a:tr h="420624">
                 <a:tc>
@@ -33961,7 +33685,7 @@
                     <a:bodyPr/>
                     <a:lstStyle/>
                     <a:p>
-                      <a:pPr algn="ctr" indent="0" marL="0">
+                      <a:pPr marL="0" indent="0" algn="ctr">
                         <a:buNone/>
                       </a:pPr>
                       <a:r>
@@ -34029,7 +33753,7 @@
                     <a:bodyPr/>
                     <a:lstStyle/>
                     <a:p>
-                      <a:pPr algn="ctr" indent="0" marL="0">
+                      <a:pPr marL="0" indent="0" algn="ctr">
                         <a:buNone/>
                       </a:pPr>
                       <a:r>
@@ -34097,7 +33821,7 @@
                     <a:bodyPr/>
                     <a:lstStyle/>
                     <a:p>
-                      <a:pPr algn="ctr" indent="0" marL="0">
+                      <a:pPr marL="0" indent="0" algn="ctr">
                         <a:buNone/>
                       </a:pPr>
                       <a:r>
@@ -34165,7 +33889,7 @@
                     <a:bodyPr/>
                     <a:lstStyle/>
                     <a:p>
-                      <a:pPr algn="ctr" indent="0" marL="0">
+                      <a:pPr marL="0" indent="0" algn="ctr">
                         <a:buNone/>
                       </a:pPr>
                       <a:r>
@@ -34233,7 +33957,7 @@
                     <a:bodyPr/>
                     <a:lstStyle/>
                     <a:p>
-                      <a:pPr algn="ctr" indent="0" marL="0">
+                      <a:pPr marL="0" indent="0" algn="ctr">
                         <a:buNone/>
                       </a:pPr>
                       <a:r>
@@ -34296,6 +34020,11 @@
                     </a:solidFill>
                   </a:tcPr>
                 </a:tc>
+                <a:extLst>
+                  <a:ext uri="{0D108BD9-81ED-4DB2-BD59-A6C34878D82A}">
+                    <a16:rowId xmlns:a16="http://schemas.microsoft.com/office/drawing/2014/main" val="10001"/>
+                  </a:ext>
+                </a:extLst>
               </a:tr>
               <a:tr h="420624">
                 <a:tc>
@@ -34303,7 +34032,7 @@
                     <a:bodyPr/>
                     <a:lstStyle/>
                     <a:p>
-                      <a:pPr algn="ctr" indent="0" marL="0">
+                      <a:pPr marL="0" indent="0" algn="ctr">
                         <a:buNone/>
                       </a:pPr>
                       <a:r>
@@ -34371,7 +34100,7 @@
                     <a:bodyPr/>
                     <a:lstStyle/>
                     <a:p>
-                      <a:pPr algn="ctr" indent="0" marL="0">
+                      <a:pPr marL="0" indent="0" algn="ctr">
                         <a:buNone/>
                       </a:pPr>
                       <a:r>
@@ -34439,7 +34168,7 @@
                     <a:bodyPr/>
                     <a:lstStyle/>
                     <a:p>
-                      <a:pPr algn="ctr" indent="0" marL="0">
+                      <a:pPr marL="0" indent="0" algn="ctr">
                         <a:buNone/>
                       </a:pPr>
                       <a:r>
@@ -34507,7 +34236,7 @@
                     <a:bodyPr/>
                     <a:lstStyle/>
                     <a:p>
-                      <a:pPr algn="ctr" indent="0" marL="0">
+                      <a:pPr marL="0" indent="0" algn="ctr">
                         <a:buNone/>
                       </a:pPr>
                       <a:r>
@@ -34575,7 +34304,7 @@
                     <a:bodyPr/>
                     <a:lstStyle/>
                     <a:p>
-                      <a:pPr algn="ctr" indent="0" marL="0">
+                      <a:pPr marL="0" indent="0" algn="ctr">
                         <a:buNone/>
                       </a:pPr>
                       <a:r>
@@ -34638,6 +34367,11 @@
                     </a:solidFill>
                   </a:tcPr>
                 </a:tc>
+                <a:extLst>
+                  <a:ext uri="{0D108BD9-81ED-4DB2-BD59-A6C34878D82A}">
+                    <a16:rowId xmlns:a16="http://schemas.microsoft.com/office/drawing/2014/main" val="10002"/>
+                  </a:ext>
+                </a:extLst>
               </a:tr>
             </a:tbl>
           </a:graphicData>
@@ -34691,7 +34425,7 @@
           <a:bodyPr wrap="square" lIns="0" tIns="0" rIns="0" bIns="0" rtlCol="0" anchor="ctr"/>
           <a:lstStyle/>
           <a:p>
-            <a:pPr algn="l" indent="0" marL="0">
+            <a:pPr marL="0" indent="0" algn="l">
               <a:lnSpc>
                 <a:spcPct val="106000"/>
               </a:lnSpc>
@@ -34728,6 +34462,7 @@
         <a:solidFill>
           <a:srgbClr val="F5F7FB"/>
         </a:solidFill>
+        <a:effectLst/>
       </p:bgPr>
     </p:bg>
     <p:spTree>
@@ -34792,11 +34527,11 @@
           <a:bodyPr wrap="square" lIns="0" tIns="0" rIns="0" bIns="0" rtlCol="0" anchor="ctr"/>
           <a:lstStyle/>
           <a:p>
-            <a:pPr algn="ctr" indent="0" marL="0">
+            <a:pPr marL="0" indent="0" algn="ctr">
               <a:buNone/>
             </a:pPr>
             <a:r>
-              <a:rPr lang="en-US" sz="1150" b="1" spc="100" kern="0" dirty="0">
+              <a:rPr lang="en-US" sz="1150" b="1" kern="0" spc="100" dirty="0">
                 <a:solidFill>
                   <a:srgbClr val="FFFFFF"/>
                 </a:solidFill>
@@ -34831,7 +34566,7 @@
           <a:bodyPr wrap="square" lIns="0" tIns="0" rIns="0" bIns="0" rtlCol="0" anchor="ctr"/>
           <a:lstStyle/>
           <a:p>
-            <a:pPr indent="0" marL="0">
+            <a:pPr marL="0" indent="0">
               <a:buNone/>
             </a:pPr>
             <a:r>
@@ -34870,7 +34605,7 @@
           <a:bodyPr wrap="square" lIns="0" tIns="0" rIns="0" bIns="0" rtlCol="0" anchor="ctr"/>
           <a:lstStyle/>
           <a:p>
-            <a:pPr indent="0" marL="0">
+            <a:pPr marL="0" indent="0">
               <a:buNone/>
             </a:pPr>
             <a:r>
@@ -34955,7 +34690,7 @@
           <a:bodyPr wrap="square" lIns="0" tIns="0" rIns="0" bIns="0" rtlCol="0" anchor="ctr"/>
           <a:lstStyle/>
           <a:p>
-            <a:pPr algn="ctr" indent="0" marL="0">
+            <a:pPr marL="0" indent="0" algn="ctr">
               <a:buNone/>
             </a:pPr>
             <a:r>
@@ -35017,7 +34752,7 @@
           <a:bodyPr wrap="square" lIns="0" tIns="0" rIns="0" bIns="0" rtlCol="0" anchor="ctr"/>
           <a:lstStyle/>
           <a:p>
-            <a:pPr algn="ctr" indent="0" marL="0">
+            <a:pPr marL="0" indent="0" algn="ctr">
               <a:buNone/>
             </a:pPr>
             <a:r>
@@ -35079,7 +34814,7 @@
           <a:bodyPr wrap="square" lIns="0" tIns="0" rIns="0" bIns="0" rtlCol="0" anchor="ctr"/>
           <a:lstStyle/>
           <a:p>
-            <a:pPr algn="ctr" indent="0" marL="0">
+            <a:pPr marL="0" indent="0" algn="ctr">
               <a:buNone/>
             </a:pPr>
             <a:r>
@@ -35141,7 +34876,7 @@
           <a:bodyPr wrap="square" lIns="0" tIns="0" rIns="0" bIns="0" rtlCol="0" anchor="ctr"/>
           <a:lstStyle/>
           <a:p>
-            <a:pPr algn="ctr" indent="0" marL="0">
+            <a:pPr marL="0" indent="0" algn="ctr">
               <a:buNone/>
             </a:pPr>
             <a:r>
@@ -35203,7 +34938,7 @@
           <a:bodyPr wrap="square" lIns="0" tIns="0" rIns="0" bIns="0" rtlCol="0" anchor="ctr"/>
           <a:lstStyle/>
           <a:p>
-            <a:pPr algn="ctr" indent="0" marL="0">
+            <a:pPr marL="0" indent="0" algn="ctr">
               <a:buNone/>
             </a:pPr>
             <a:r>
@@ -35265,7 +35000,7 @@
           <a:bodyPr wrap="square" lIns="0" tIns="0" rIns="0" bIns="0" rtlCol="0" anchor="ctr"/>
           <a:lstStyle/>
           <a:p>
-            <a:pPr algn="ctr" indent="0" marL="0">
+            <a:pPr marL="0" indent="0" algn="ctr">
               <a:buNone/>
             </a:pPr>
             <a:r>
@@ -35327,7 +35062,7 @@
           <a:bodyPr wrap="square" lIns="0" tIns="0" rIns="0" bIns="0" rtlCol="0" anchor="ctr"/>
           <a:lstStyle/>
           <a:p>
-            <a:pPr algn="ctr" indent="0" marL="0">
+            <a:pPr marL="0" indent="0" algn="ctr">
               <a:buNone/>
             </a:pPr>
             <a:r>
@@ -35389,7 +35124,7 @@
           <a:bodyPr wrap="square" lIns="0" tIns="0" rIns="0" bIns="0" rtlCol="0" anchor="ctr"/>
           <a:lstStyle/>
           <a:p>
-            <a:pPr algn="ctr" indent="0" marL="0">
+            <a:pPr marL="0" indent="0" algn="ctr">
               <a:buNone/>
             </a:pPr>
             <a:r>
@@ -35451,7 +35186,7 @@
           <a:bodyPr wrap="square" lIns="0" tIns="0" rIns="0" bIns="0" rtlCol="0" anchor="ctr"/>
           <a:lstStyle/>
           <a:p>
-            <a:pPr algn="ctr" indent="0" marL="0">
+            <a:pPr marL="0" indent="0" algn="ctr">
               <a:buNone/>
             </a:pPr>
             <a:r>
@@ -35513,7 +35248,7 @@
           <a:bodyPr wrap="square" lIns="0" tIns="0" rIns="0" bIns="0" rtlCol="0" anchor="ctr"/>
           <a:lstStyle/>
           <a:p>
-            <a:pPr algn="ctr" indent="0" marL="0">
+            <a:pPr marL="0" indent="0" algn="ctr">
               <a:buNone/>
             </a:pPr>
             <a:r>
@@ -35575,7 +35310,7 @@
           <a:bodyPr wrap="square" lIns="0" tIns="0" rIns="0" bIns="0" rtlCol="0" anchor="ctr"/>
           <a:lstStyle/>
           <a:p>
-            <a:pPr algn="ctr" indent="0" marL="0">
+            <a:pPr marL="0" indent="0" algn="ctr">
               <a:buNone/>
             </a:pPr>
             <a:r>
@@ -35637,7 +35372,7 @@
           <a:bodyPr wrap="square" lIns="0" tIns="0" rIns="0" bIns="0" rtlCol="0" anchor="ctr"/>
           <a:lstStyle/>
           <a:p>
-            <a:pPr algn="ctr" indent="0" marL="0">
+            <a:pPr marL="0" indent="0" algn="ctr">
               <a:buNone/>
             </a:pPr>
             <a:r>
@@ -35701,7 +35436,7 @@
           <a:bodyPr wrap="square" lIns="0" tIns="0" rIns="0" bIns="0" rtlCol="0" anchor="ctr"/>
           <a:lstStyle/>
           <a:p>
-            <a:pPr algn="ctr" indent="0" marL="0">
+            <a:pPr marL="0" indent="0" algn="ctr">
               <a:buNone/>
             </a:pPr>
             <a:r>
@@ -35763,7 +35498,7 @@
           <a:bodyPr wrap="square" lIns="0" tIns="0" rIns="0" bIns="0" rtlCol="0" anchor="ctr"/>
           <a:lstStyle/>
           <a:p>
-            <a:pPr algn="ctr" indent="0" marL="0">
+            <a:pPr marL="0" indent="0" algn="ctr">
               <a:buNone/>
             </a:pPr>
             <a:r>
@@ -35825,7 +35560,7 @@
           <a:bodyPr wrap="square" lIns="0" tIns="0" rIns="0" bIns="0" rtlCol="0" anchor="ctr"/>
           <a:lstStyle/>
           <a:p>
-            <a:pPr algn="ctr" indent="0" marL="0">
+            <a:pPr marL="0" indent="0" algn="ctr">
               <a:buNone/>
             </a:pPr>
             <a:r>
@@ -35891,7 +35626,7 @@
           <a:bodyPr wrap="square" lIns="0" tIns="0" rIns="0" bIns="0" rtlCol="0" anchor="ctr"/>
           <a:lstStyle/>
           <a:p>
-            <a:pPr algn="ctr" indent="0" marL="0">
+            <a:pPr marL="0" indent="0" algn="ctr">
               <a:buNone/>
             </a:pPr>
             <a:r>
@@ -35999,7 +35734,7 @@
           <a:bodyPr wrap="square" lIns="0" tIns="0" rIns="0" bIns="0" rtlCol="0" anchor="ctr"/>
           <a:lstStyle/>
           <a:p>
-            <a:pPr algn="ctr" indent="0" marL="0">
+            <a:pPr marL="0" indent="0" algn="ctr">
               <a:lnSpc>
                 <a:spcPct val="100000"/>
               </a:lnSpc>
@@ -36019,7 +35754,7 @@
             <a:endParaRPr lang="en-US" sz="1100" dirty="0"/>
           </a:p>
           <a:p>
-            <a:pPr algn="ctr" indent="0" marL="0">
+            <a:pPr marL="0" indent="0" algn="ctr">
               <a:lnSpc>
                 <a:spcPct val="100000"/>
               </a:lnSpc>
@@ -36107,7 +35842,7 @@
           <a:bodyPr wrap="square" lIns="0" tIns="0" rIns="0" bIns="0" rtlCol="0" anchor="ctr"/>
           <a:lstStyle/>
           <a:p>
-            <a:pPr algn="ctr" indent="0" marL="0">
+            <a:pPr marL="0" indent="0" algn="ctr">
               <a:lnSpc>
                 <a:spcPct val="100000"/>
               </a:lnSpc>
@@ -36127,7 +35862,7 @@
             <a:endParaRPr lang="en-US" sz="1100" dirty="0"/>
           </a:p>
           <a:p>
-            <a:pPr algn="ctr" indent="0" marL="0">
+            <a:pPr marL="0" indent="0" algn="ctr">
               <a:lnSpc>
                 <a:spcPct val="100000"/>
               </a:lnSpc>
@@ -36223,7 +35958,7 @@
           <a:bodyPr wrap="square" lIns="0" tIns="0" rIns="0" bIns="0" rtlCol="0" anchor="ctr"/>
           <a:lstStyle/>
           <a:p>
-            <a:pPr indent="0" marL="0">
+            <a:pPr marL="0" indent="0">
               <a:buNone/>
             </a:pPr>
             <a:r>
@@ -36262,7 +35997,7 @@
           <a:bodyPr wrap="square" lIns="0" tIns="0" rIns="0" bIns="0" rtlCol="0" anchor="t"/>
           <a:lstStyle/>
           <a:p>
-            <a:pPr algn="l" indent="0" marL="0">
+            <a:pPr marL="0" indent="0" algn="l">
               <a:lnSpc>
                 <a:spcPct val="106000"/>
               </a:lnSpc>
@@ -36358,7 +36093,7 @@
           <a:bodyPr wrap="square" lIns="0" tIns="0" rIns="0" bIns="0" rtlCol="0" anchor="ctr"/>
           <a:lstStyle/>
           <a:p>
-            <a:pPr indent="0" marL="0">
+            <a:pPr marL="0" indent="0">
               <a:buNone/>
             </a:pPr>
             <a:r>
@@ -36397,7 +36132,7 @@
           <a:bodyPr wrap="square" lIns="0" tIns="0" rIns="0" bIns="0" rtlCol="0" anchor="t"/>
           <a:lstStyle/>
           <a:p>
-            <a:pPr algn="l" indent="0" marL="0">
+            <a:pPr marL="0" indent="0" algn="l">
               <a:lnSpc>
                 <a:spcPct val="106000"/>
               </a:lnSpc>
@@ -36493,7 +36228,7 @@
           <a:bodyPr wrap="square" lIns="0" tIns="0" rIns="0" bIns="0" rtlCol="0" anchor="ctr"/>
           <a:lstStyle/>
           <a:p>
-            <a:pPr indent="0" marL="0">
+            <a:pPr marL="0" indent="0">
               <a:buNone/>
             </a:pPr>
             <a:r>
@@ -36532,7 +36267,7 @@
           <a:bodyPr wrap="square" lIns="0" tIns="0" rIns="0" bIns="0" rtlCol="0" anchor="t"/>
           <a:lstStyle/>
           <a:p>
-            <a:pPr algn="l" indent="0" marL="0">
+            <a:pPr marL="0" indent="0" algn="l">
               <a:lnSpc>
                 <a:spcPct val="104000"/>
               </a:lnSpc>
@@ -36569,6 +36304,7 @@
         <a:solidFill>
           <a:srgbClr val="F5F7FB"/>
         </a:solidFill>
+        <a:effectLst/>
       </p:bgPr>
     </p:bg>
     <p:spTree>
@@ -36633,11 +36369,11 @@
           <a:bodyPr wrap="square" lIns="0" tIns="0" rIns="0" bIns="0" rtlCol="0" anchor="ctr"/>
           <a:lstStyle/>
           <a:p>
-            <a:pPr algn="ctr" indent="0" marL="0">
+            <a:pPr marL="0" indent="0" algn="ctr">
               <a:buNone/>
             </a:pPr>
             <a:r>
-              <a:rPr lang="en-US" sz="1150" b="1" spc="100" kern="0" dirty="0">
+              <a:rPr lang="en-US" sz="1150" b="1" kern="0" spc="100" dirty="0">
                 <a:solidFill>
                   <a:srgbClr val="FFFFFF"/>
                 </a:solidFill>
@@ -36672,7 +36408,7 @@
           <a:bodyPr wrap="square" lIns="0" tIns="0" rIns="0" bIns="0" rtlCol="0" anchor="ctr"/>
           <a:lstStyle/>
           <a:p>
-            <a:pPr indent="0" marL="0">
+            <a:pPr marL="0" indent="0">
               <a:buNone/>
             </a:pPr>
             <a:r>
@@ -36711,7 +36447,7 @@
           <a:bodyPr wrap="square" lIns="0" tIns="0" rIns="0" bIns="0" rtlCol="0" anchor="ctr"/>
           <a:lstStyle/>
           <a:p>
-            <a:pPr indent="0" marL="0">
+            <a:pPr marL="0" indent="0">
               <a:buNone/>
             </a:pPr>
             <a:r>
@@ -36731,7 +36467,7 @@
       </p:sp>
       <p:graphicFrame>
         <p:nvGraphicFramePr>
-          <p:cNvPr id="6" name="Chart 0" descr=""/>
+          <p:cNvPr id="6" name="Chart 0"/>
           <p:cNvGraphicFramePr/>
           <p:nvPr/>
         </p:nvGraphicFramePr>
@@ -36739,9 +36475,9 @@
           <a:off x="548640" y="1938528"/>
           <a:ext cx="7269480" cy="3246120"/>
         </p:xfrm>
-        <a:graphic xmlns:a="http://schemas.openxmlformats.org/drawingml/2006/main">
+        <a:graphic>
           <a:graphicData uri="http://schemas.openxmlformats.org/drawingml/2006/chart">
-            <c:chart xmlns:c="http://schemas.openxmlformats.org/drawingml/2006/chart" r:id="rId1"/>
+            <c:chart xmlns:c="http://schemas.openxmlformats.org/drawingml/2006/chart" xmlns:r="http://schemas.openxmlformats.org/officeDocument/2006/relationships" r:id="rId3"/>
           </a:graphicData>
         </a:graphic>
       </p:graphicFrame>
@@ -36766,7 +36502,7 @@
           <a:bodyPr wrap="square" lIns="0" tIns="0" rIns="0" bIns="0" rtlCol="0" anchor="t"/>
           <a:lstStyle/>
           <a:p>
-            <a:pPr algn="r" indent="0" marL="0">
+            <a:pPr marL="0" indent="0" algn="r">
               <a:lnSpc>
                 <a:spcPct val="100000"/>
               </a:lnSpc>
@@ -36786,7 +36522,7 @@
             <a:endParaRPr lang="en-US" sz="1000" dirty="0"/>
           </a:p>
           <a:p>
-            <a:pPr algn="r" indent="0" marL="0">
+            <a:pPr marL="0" indent="0" algn="r">
               <a:lnSpc>
                 <a:spcPct val="100000"/>
               </a:lnSpc>
@@ -36882,7 +36618,7 @@
           <a:bodyPr wrap="square" lIns="0" tIns="0" rIns="0" bIns="0" rtlCol="0" anchor="ctr"/>
           <a:lstStyle/>
           <a:p>
-            <a:pPr indent="0" marL="0">
+            <a:pPr marL="0" indent="0">
               <a:buNone/>
             </a:pPr>
             <a:r>
@@ -36921,7 +36657,7 @@
           <a:bodyPr wrap="square" lIns="0" tIns="0" rIns="0" bIns="0" rtlCol="0" anchor="t"/>
           <a:lstStyle/>
           <a:p>
-            <a:pPr algn="l" indent="0" marL="0">
+            <a:pPr marL="0" indent="0" algn="l">
               <a:lnSpc>
                 <a:spcPct val="106000"/>
               </a:lnSpc>
@@ -36941,7 +36677,7 @@
             <a:endParaRPr lang="en-US" sz="1150" dirty="0"/>
           </a:p>
           <a:p>
-            <a:pPr algn="l" indent="0" marL="0">
+            <a:pPr marL="0" indent="0" algn="l">
               <a:lnSpc>
                 <a:spcPct val="106000"/>
               </a:lnSpc>
@@ -36950,7 +36686,7 @@
             <a:endParaRPr lang="en-US" sz="1150" dirty="0"/>
           </a:p>
           <a:p>
-            <a:pPr algn="l" indent="0" marL="0">
+            <a:pPr marL="0" indent="0" algn="l">
               <a:lnSpc>
                 <a:spcPct val="106000"/>
               </a:lnSpc>
@@ -37046,7 +36782,7 @@
           <a:bodyPr wrap="square" lIns="0" tIns="0" rIns="0" bIns="0" rtlCol="0" anchor="ctr"/>
           <a:lstStyle/>
           <a:p>
-            <a:pPr indent="0" marL="0">
+            <a:pPr marL="0" indent="0">
               <a:buNone/>
             </a:pPr>
             <a:r>
@@ -37085,7 +36821,7 @@
           <a:bodyPr wrap="square" lIns="0" tIns="0" rIns="0" bIns="0" rtlCol="0" anchor="t"/>
           <a:lstStyle/>
           <a:p>
-            <a:pPr algn="l" indent="0" marL="0">
+            <a:pPr marL="0" indent="0" algn="l">
               <a:lnSpc>
                 <a:spcPct val="114000"/>
               </a:lnSpc>
@@ -37105,7 +36841,7 @@
             <a:endParaRPr lang="en-US" sz="1150" dirty="0"/>
           </a:p>
           <a:p>
-            <a:pPr algn="l" indent="0" marL="0">
+            <a:pPr marL="0" indent="0" algn="l">
               <a:lnSpc>
                 <a:spcPct val="114000"/>
               </a:lnSpc>
@@ -37125,7 +36861,7 @@
             <a:endParaRPr lang="en-US" sz="1150" dirty="0"/>
           </a:p>
           <a:p>
-            <a:pPr algn="l" indent="0" marL="0">
+            <a:pPr marL="0" indent="0" algn="l">
               <a:lnSpc>
                 <a:spcPct val="114000"/>
               </a:lnSpc>
@@ -37145,7 +36881,7 @@
             <a:endParaRPr lang="en-US" sz="1150" dirty="0"/>
           </a:p>
           <a:p>
-            <a:pPr algn="l" indent="0" marL="0">
+            <a:pPr marL="0" indent="0" algn="l">
               <a:lnSpc>
                 <a:spcPct val="114000"/>
               </a:lnSpc>
@@ -37154,7 +36890,7 @@
             <a:endParaRPr lang="en-US" sz="1150" dirty="0"/>
           </a:p>
           <a:p>
-            <a:pPr algn="l" indent="0" marL="0">
+            <a:pPr marL="0" indent="0" algn="l">
               <a:lnSpc>
                 <a:spcPct val="114000"/>
               </a:lnSpc>
@@ -37250,7 +36986,7 @@
           <a:bodyPr wrap="square" lIns="0" tIns="0" rIns="0" bIns="0" rtlCol="0" anchor="ctr"/>
           <a:lstStyle/>
           <a:p>
-            <a:pPr indent="0" marL="0">
+            <a:pPr marL="0" indent="0">
               <a:buNone/>
             </a:pPr>
             <a:r>
@@ -37289,7 +37025,7 @@
           <a:bodyPr wrap="square" lIns="0" tIns="0" rIns="0" bIns="0" rtlCol="0" anchor="t"/>
           <a:lstStyle/>
           <a:p>
-            <a:pPr algn="l" indent="0" marL="0">
+            <a:pPr marL="0" indent="0" algn="l">
               <a:lnSpc>
                 <a:spcPct val="104000"/>
               </a:lnSpc>
@@ -37611,4 +37347,319 @@
     </a:ext>
   </a:extLst>
 </a:theme>
+</file>
+
+<file path=ppt/theme/theme2.xml><?xml version="1.0" encoding="utf-8"?>
+<a:theme xmlns:a="http://schemas.openxmlformats.org/drawingml/2006/main" name="Office Theme">
+  <a:themeElements>
+    <a:clrScheme name="Office">
+      <a:dk1>
+        <a:sysClr val="windowText" lastClr="000000"/>
+      </a:dk1>
+      <a:lt1>
+        <a:sysClr val="window" lastClr="FFFFFF"/>
+      </a:lt1>
+      <a:dk2>
+        <a:srgbClr val="0E2841"/>
+      </a:dk2>
+      <a:lt2>
+        <a:srgbClr val="E8E8E8"/>
+      </a:lt2>
+      <a:accent1>
+        <a:srgbClr val="156082"/>
+      </a:accent1>
+      <a:accent2>
+        <a:srgbClr val="E97132"/>
+      </a:accent2>
+      <a:accent3>
+        <a:srgbClr val="196B24"/>
+      </a:accent3>
+      <a:accent4>
+        <a:srgbClr val="0F9ED5"/>
+      </a:accent4>
+      <a:accent5>
+        <a:srgbClr val="A02B93"/>
+      </a:accent5>
+      <a:accent6>
+        <a:srgbClr val="4EA72E"/>
+      </a:accent6>
+      <a:hlink>
+        <a:srgbClr val="467886"/>
+      </a:hlink>
+      <a:folHlink>
+        <a:srgbClr val="96607D"/>
+      </a:folHlink>
+    </a:clrScheme>
+    <a:fontScheme name="Office">
+      <a:majorFont>
+        <a:latin typeface="Aptos Display" panose="02110004020202020204"/>
+        <a:ea typeface=""/>
+        <a:cs typeface=""/>
+        <a:font script="Jpan" typeface="游ゴシック Light"/>
+        <a:font script="Hang" typeface="맑은 고딕"/>
+        <a:font script="Hans" typeface="等线 Light"/>
+        <a:font script="Hant" typeface="新細明體"/>
+        <a:font script="Arab" typeface="Times New Roman"/>
+        <a:font script="Hebr" typeface="Times New Roman"/>
+        <a:font script="Thai" typeface="Angsana New"/>
+        <a:font script="Ethi" typeface="Nyala"/>
+        <a:font script="Beng" typeface="Vrinda"/>
+        <a:font script="Gujr" typeface="Shruti"/>
+        <a:font script="Khmr" typeface="MoolBoran"/>
+        <a:font script="Knda" typeface="Tunga"/>
+        <a:font script="Guru" typeface="Raavi"/>
+        <a:font script="Cans" typeface="Euphemia"/>
+        <a:font script="Cher" typeface="Plantagenet Cherokee"/>
+        <a:font script="Yiii" typeface="Microsoft Yi Baiti"/>
+        <a:font script="Tibt" typeface="Microsoft Himalaya"/>
+        <a:font script="Thaa" typeface="MV Boli"/>
+        <a:font script="Deva" typeface="Mangal"/>
+        <a:font script="Telu" typeface="Gautami"/>
+        <a:font script="Taml" typeface="Latha"/>
+        <a:font script="Syrc" typeface="Estrangelo Edessa"/>
+        <a:font script="Orya" typeface="Kalinga"/>
+        <a:font script="Mlym" typeface="Kartika"/>
+        <a:font script="Laoo" typeface="DokChampa"/>
+        <a:font script="Sinh" typeface="Iskoola Pota"/>
+        <a:font script="Mong" typeface="Mongolian Baiti"/>
+        <a:font script="Viet" typeface="Times New Roman"/>
+        <a:font script="Uigh" typeface="Microsoft Uighur"/>
+        <a:font script="Geor" typeface="Sylfaen"/>
+        <a:font script="Armn" typeface="Arial"/>
+        <a:font script="Bugi" typeface="Leelawadee UI"/>
+        <a:font script="Bopo" typeface="Microsoft JhengHei"/>
+        <a:font script="Java" typeface="Javanese Text"/>
+        <a:font script="Lisu" typeface="Segoe UI"/>
+        <a:font script="Mymr" typeface="Myanmar Text"/>
+        <a:font script="Nkoo" typeface="Ebrima"/>
+        <a:font script="Olck" typeface="Nirmala UI"/>
+        <a:font script="Osma" typeface="Ebrima"/>
+        <a:font script="Phag" typeface="Phagspa"/>
+        <a:font script="Syrn" typeface="Estrangelo Edessa"/>
+        <a:font script="Syrj" typeface="Estrangelo Edessa"/>
+        <a:font script="Syre" typeface="Estrangelo Edessa"/>
+        <a:font script="Sora" typeface="Nirmala UI"/>
+        <a:font script="Tale" typeface="Microsoft Tai Le"/>
+        <a:font script="Talu" typeface="Microsoft New Tai Lue"/>
+        <a:font script="Tfng" typeface="Ebrima"/>
+      </a:majorFont>
+      <a:minorFont>
+        <a:latin typeface="Aptos" panose="02110004020202020204"/>
+        <a:ea typeface=""/>
+        <a:cs typeface=""/>
+        <a:font script="Jpan" typeface="游ゴシック"/>
+        <a:font script="Hang" typeface="맑은 고딕"/>
+        <a:font script="Hans" typeface="等线"/>
+        <a:font script="Hant" typeface="新細明體"/>
+        <a:font script="Arab" typeface="Arial"/>
+        <a:font script="Hebr" typeface="Arial"/>
+        <a:font script="Thai" typeface="Cordia New"/>
+        <a:font script="Ethi" typeface="Nyala"/>
+        <a:font script="Beng" typeface="Vrinda"/>
+        <a:font script="Gujr" typeface="Shruti"/>
+        <a:font script="Khmr" typeface="DaunPenh"/>
+        <a:font script="Knda" typeface="Tunga"/>
+        <a:font script="Guru" typeface="Raavi"/>
+        <a:font script="Cans" typeface="Euphemia"/>
+        <a:font script="Cher" typeface="Plantagenet Cherokee"/>
+        <a:font script="Yiii" typeface="Microsoft Yi Baiti"/>
+        <a:font script="Tibt" typeface="Microsoft Himalaya"/>
+        <a:font script="Thaa" typeface="MV Boli"/>
+        <a:font script="Deva" typeface="Mangal"/>
+        <a:font script="Telu" typeface="Gautami"/>
+        <a:font script="Taml" typeface="Latha"/>
+        <a:font script="Syrc" typeface="Estrangelo Edessa"/>
+        <a:font script="Orya" typeface="Kalinga"/>
+        <a:font script="Mlym" typeface="Kartika"/>
+        <a:font script="Laoo" typeface="DokChampa"/>
+        <a:font script="Sinh" typeface="Iskoola Pota"/>
+        <a:font script="Mong" typeface="Mongolian Baiti"/>
+        <a:font script="Viet" typeface="Arial"/>
+        <a:font script="Uigh" typeface="Microsoft Uighur"/>
+        <a:font script="Geor" typeface="Sylfaen"/>
+        <a:font script="Armn" typeface="Arial"/>
+        <a:font script="Bugi" typeface="Leelawadee UI"/>
+        <a:font script="Bopo" typeface="Microsoft JhengHei"/>
+        <a:font script="Java" typeface="Javanese Text"/>
+        <a:font script="Lisu" typeface="Segoe UI"/>
+        <a:font script="Mymr" typeface="Myanmar Text"/>
+        <a:font script="Nkoo" typeface="Ebrima"/>
+        <a:font script="Olck" typeface="Nirmala UI"/>
+        <a:font script="Osma" typeface="Ebrima"/>
+        <a:font script="Phag" typeface="Phagspa"/>
+        <a:font script="Syrn" typeface="Estrangelo Edessa"/>
+        <a:font script="Syrj" typeface="Estrangelo Edessa"/>
+        <a:font script="Syre" typeface="Estrangelo Edessa"/>
+        <a:font script="Sora" typeface="Nirmala UI"/>
+        <a:font script="Tale" typeface="Microsoft Tai Le"/>
+        <a:font script="Talu" typeface="Microsoft New Tai Lue"/>
+        <a:font script="Tfng" typeface="Ebrima"/>
+      </a:minorFont>
+    </a:fontScheme>
+    <a:fmtScheme name="Office">
+      <a:fillStyleLst>
+        <a:solidFill>
+          <a:schemeClr val="phClr"/>
+        </a:solidFill>
+        <a:gradFill rotWithShape="1">
+          <a:gsLst>
+            <a:gs pos="0">
+              <a:schemeClr val="phClr">
+                <a:lumMod val="110000"/>
+                <a:satMod val="105000"/>
+                <a:tint val="67000"/>
+              </a:schemeClr>
+            </a:gs>
+            <a:gs pos="50000">
+              <a:schemeClr val="phClr">
+                <a:lumMod val="105000"/>
+                <a:satMod val="103000"/>
+                <a:tint val="73000"/>
+              </a:schemeClr>
+            </a:gs>
+            <a:gs pos="100000">
+              <a:schemeClr val="phClr">
+                <a:lumMod val="105000"/>
+                <a:satMod val="109000"/>
+                <a:tint val="81000"/>
+              </a:schemeClr>
+            </a:gs>
+          </a:gsLst>
+          <a:lin ang="5400000" scaled="0"/>
+        </a:gradFill>
+        <a:gradFill rotWithShape="1">
+          <a:gsLst>
+            <a:gs pos="0">
+              <a:schemeClr val="phClr">
+                <a:satMod val="103000"/>
+                <a:lumMod val="102000"/>
+                <a:tint val="94000"/>
+              </a:schemeClr>
+            </a:gs>
+            <a:gs pos="50000">
+              <a:schemeClr val="phClr">
+                <a:satMod val="110000"/>
+                <a:lumMod val="100000"/>
+                <a:shade val="100000"/>
+              </a:schemeClr>
+            </a:gs>
+            <a:gs pos="100000">
+              <a:schemeClr val="phClr">
+                <a:lumMod val="99000"/>
+                <a:satMod val="120000"/>
+                <a:shade val="78000"/>
+              </a:schemeClr>
+            </a:gs>
+          </a:gsLst>
+          <a:lin ang="5400000" scaled="0"/>
+        </a:gradFill>
+      </a:fillStyleLst>
+      <a:lnStyleLst>
+        <a:ln w="12700" cap="flat" cmpd="sng" algn="ctr">
+          <a:solidFill>
+            <a:schemeClr val="phClr"/>
+          </a:solidFill>
+          <a:prstDash val="solid"/>
+          <a:miter lim="800000"/>
+        </a:ln>
+        <a:ln w="19050" cap="flat" cmpd="sng" algn="ctr">
+          <a:solidFill>
+            <a:schemeClr val="phClr"/>
+          </a:solidFill>
+          <a:prstDash val="solid"/>
+          <a:miter lim="800000"/>
+        </a:ln>
+        <a:ln w="25400" cap="flat" cmpd="sng" algn="ctr">
+          <a:solidFill>
+            <a:schemeClr val="phClr"/>
+          </a:solidFill>
+          <a:prstDash val="solid"/>
+          <a:miter lim="800000"/>
+        </a:ln>
+      </a:lnStyleLst>
+      <a:effectStyleLst>
+        <a:effectStyle>
+          <a:effectLst/>
+        </a:effectStyle>
+        <a:effectStyle>
+          <a:effectLst/>
+        </a:effectStyle>
+        <a:effectStyle>
+          <a:effectLst>
+            <a:outerShdw blurRad="57150" dist="19050" dir="5400000" algn="ctr" rotWithShape="0">
+              <a:srgbClr val="000000">
+                <a:alpha val="63000"/>
+              </a:srgbClr>
+            </a:outerShdw>
+          </a:effectLst>
+        </a:effectStyle>
+      </a:effectStyleLst>
+      <a:bgFillStyleLst>
+        <a:solidFill>
+          <a:schemeClr val="phClr"/>
+        </a:solidFill>
+        <a:solidFill>
+          <a:schemeClr val="phClr">
+            <a:tint val="95000"/>
+            <a:satMod val="170000"/>
+          </a:schemeClr>
+        </a:solidFill>
+        <a:gradFill rotWithShape="1">
+          <a:gsLst>
+            <a:gs pos="0">
+              <a:schemeClr val="phClr">
+                <a:tint val="93000"/>
+                <a:satMod val="150000"/>
+                <a:shade val="98000"/>
+                <a:lumMod val="102000"/>
+              </a:schemeClr>
+            </a:gs>
+            <a:gs pos="50000">
+              <a:schemeClr val="phClr">
+                <a:tint val="98000"/>
+                <a:satMod val="130000"/>
+                <a:shade val="90000"/>
+                <a:lumMod val="103000"/>
+              </a:schemeClr>
+            </a:gs>
+            <a:gs pos="100000">
+              <a:schemeClr val="phClr">
+                <a:shade val="63000"/>
+                <a:satMod val="120000"/>
+              </a:schemeClr>
+            </a:gs>
+          </a:gsLst>
+          <a:lin ang="5400000" scaled="0"/>
+        </a:gradFill>
+      </a:bgFillStyleLst>
+    </a:fmtScheme>
+  </a:themeElements>
+  <a:objectDefaults>
+    <a:lnDef>
+      <a:spPr/>
+      <a:bodyPr/>
+      <a:lstStyle/>
+      <a:style>
+        <a:lnRef idx="2">
+          <a:schemeClr val="accent1"/>
+        </a:lnRef>
+        <a:fillRef idx="0">
+          <a:schemeClr val="accent1"/>
+        </a:fillRef>
+        <a:effectRef idx="1">
+          <a:schemeClr val="accent1"/>
+        </a:effectRef>
+        <a:fontRef idx="minor">
+          <a:schemeClr val="tx1"/>
+        </a:fontRef>
+      </a:style>
+    </a:lnDef>
+  </a:objectDefaults>
+  <a:extraClrSchemeLst/>
+  <a:extLst>
+    <a:ext uri="{05A4C25C-085E-4340-85A3-A5531E510DB2}">
+      <thm15:themeFamily xmlns:thm15="http://schemas.microsoft.com/office/thememl/2012/main" name="Office Theme" id="{2E142A2C-CD16-42D6-873A-C26D2A0506FA}" vid="{1BDDFF52-6CD6-40A5-AB3C-68EB2F1E4D0A}"/>
+    </a:ext>
+  </a:extLst>
+</a:theme>
 </file>